--- a/crater_presentation.pptx
+++ b/crater_presentation.pptx
@@ -3141,7 +3141,7 @@
         <p:spPr>
           <a:xfrm>
             <a:off x="640080" y="1554480"/>
-            <a:ext cx="6035040" cy="2377440"/>
+            <a:ext cx="5669280" cy="2377440"/>
           </a:xfrm>
           <a:prstGeom prst="rect">
             <a:avLst/>
@@ -3219,7 +3219,7 @@
         <p:spPr>
           <a:xfrm>
             <a:off x="640080" y="3794760"/>
-            <a:ext cx="6035040" cy="640080"/>
+            <a:ext cx="5669280" cy="640080"/>
           </a:xfrm>
           <a:prstGeom prst="rect">
             <a:avLst/>
@@ -3278,7 +3278,7 @@
         <p:spPr>
           <a:xfrm>
             <a:off x="640080" y="5120640"/>
-            <a:ext cx="6035040" cy="365760"/>
+            <a:ext cx="5669280" cy="365760"/>
           </a:xfrm>
           <a:prstGeom prst="rect">
             <a:avLst/>
@@ -3318,7 +3318,7 @@
         <p:spPr>
           <a:xfrm>
             <a:off x="640080" y="5486400"/>
-            <a:ext cx="6035040" cy="1143000"/>
+            <a:ext cx="5669280" cy="1143000"/>
           </a:xfrm>
           <a:prstGeom prst="rect">
             <a:avLst/>

--- a/crater_presentation.pptx
+++ b/crater_presentation.pptx
@@ -3658,7 +3658,7 @@
                 </a:solidFill>
                 <a:latin typeface="Calibri"/>
               </a:rPr>
-              <a:t>30 м/пиксель не резолвит кратеры &lt;~500 м (Kaali, 110 м — использованы только опубликованные данные)</a:t>
+              <a:t>30 м/пиксель не резолвит кратеры мельче ~500 м (Kaali, 110 м — использованы только опубликованные данные)</a:t>
             </a:r>
           </a:p>
         </p:txBody>
@@ -7986,7 +7986,7 @@
                 </a:solidFill>
                 <a:latin typeface="Calibri"/>
               </a:rPr>
-              <a:t>glubina/diametr</a:t>
+              <a:t>глубина/диаметр</a:t>
             </a:r>
           </a:p>
         </p:txBody>

--- a/crater_presentation.pptx
+++ b/crater_presentation.pptx
@@ -18,6 +18,8 @@
     <p:sldId id="266" r:id="rId17"/>
     <p:sldId id="267" r:id="rId18"/>
     <p:sldId id="268" r:id="rId19"/>
+    <p:sldId id="269" r:id="rId20"/>
+    <p:sldId id="270" r:id="rId21"/>
   </p:sldIdLst>
   <p:sldSz cx="12191695" cy="6858000" type="screen4x3"/>
   <p:notesSz cx="6858000" cy="9144000"/>
@@ -3096,7 +3098,7 @@
     <p:bg>
       <p:bgPr>
         <a:solidFill>
-          <a:srgbClr val="0B0D13"/>
+          <a:srgbClr val="10203C"/>
         </a:solidFill>
         <a:effectLst/>
       </p:bgPr>
@@ -3382,7 +3384,7 @@
     <p:bg>
       <p:bgPr>
         <a:solidFill>
-          <a:srgbClr val="0B0D13"/>
+          <a:srgbClr val="10203C"/>
         </a:solidFill>
         <a:effectLst/>
       </p:bgPr>
@@ -3429,14 +3431,54 @@
                 </a:solidFill>
                 <a:latin typeface="Cambria"/>
               </a:rPr>
-              <a:t>Наши измерения vs публикации vs эталон свежих кратеров</a:t>
+              <a:t>Радар видит вал независимо от освещения и облачности</a:t>
+            </a:r>
+          </a:p>
+        </p:txBody>
+      </p:sp>
+      <p:sp>
+        <p:nvSpPr>
+          <p:cNvPr id="3" name="TextBox 2"/>
+          <p:cNvSpPr txBox="1"/>
+          <p:nvPr/>
+        </p:nvSpPr>
+        <p:spPr>
+          <a:xfrm>
+            <a:off x="457200" y="932688"/>
+            <a:ext cx="11277295" cy="320040"/>
+          </a:xfrm>
+          <a:prstGeom prst="rect">
+            <a:avLst/>
+          </a:prstGeom>
+          <a:noFill/>
+        </p:spPr>
+        <p:txBody>
+          <a:bodyPr wrap="square" anchor="t" lIns="0" rIns="0" tIns="0" bIns="0"/>
+          <a:lstStyle/>
+          <a:p>
+            <a:pPr algn="l">
+              <a:lnSpc>
+                <a:spcPct val="100000"/>
+              </a:lnSpc>
+              <a:spcAft>
+                <a:spcPts val="0"/>
+              </a:spcAft>
+            </a:pPr>
+            <a:r>
+              <a:rPr sz="1300" b="0" i="1">
+                <a:solidFill>
+                  <a:srgbClr val="9B978D"/>
+                </a:solidFill>
+                <a:latin typeface="Calibri"/>
+              </a:rPr>
+              <a:t>Sentinel-1, среднее VV на валу против дна кратера</a:t>
             </a:r>
           </a:p>
         </p:txBody>
       </p:sp>
       <p:pic>
         <p:nvPicPr>
-          <p:cNvPr id="3" name="Picture 2" descr="crater_geology_comparison.png"/>
+          <p:cNvPr id="4" name="Picture 3" descr="S1_VVVH_Barringer__Meteor_Crater______.png"/>
           <p:cNvPicPr>
             <a:picLocks noChangeAspect="1"/>
           </p:cNvPicPr>
@@ -3450,8 +3492,8 @@
         </p:blipFill>
         <p:spPr>
           <a:xfrm>
-            <a:off x="2841659" y="1417320"/>
-            <a:ext cx="6508376" cy="5029200"/>
+            <a:off x="500613" y="1691640"/>
+            <a:ext cx="3489391" cy="2880360"/>
           </a:xfrm>
           <a:prstGeom prst="rect">
             <a:avLst/>
@@ -3460,7 +3502,415 @@
       </p:pic>
       <p:sp>
         <p:nvSpPr>
-          <p:cNvPr id="4" name="TextBox 3"/>
+          <p:cNvPr id="5" name="TextBox 4"/>
+          <p:cNvSpPr txBox="1"/>
+          <p:nvPr/>
+        </p:nvSpPr>
+        <p:spPr>
+          <a:xfrm>
+            <a:off x="457200" y="4681728"/>
+            <a:ext cx="3576218" cy="365760"/>
+          </a:xfrm>
+          <a:prstGeom prst="rect">
+            <a:avLst/>
+          </a:prstGeom>
+          <a:noFill/>
+        </p:spPr>
+        <p:txBody>
+          <a:bodyPr wrap="square" anchor="t" lIns="0" rIns="0" tIns="0" bIns="0"/>
+          <a:lstStyle/>
+          <a:p>
+            <a:pPr algn="ctr">
+              <a:lnSpc>
+                <a:spcPct val="100000"/>
+              </a:lnSpc>
+              <a:spcAft>
+                <a:spcPts val="0"/>
+              </a:spcAft>
+            </a:pPr>
+            <a:r>
+              <a:rPr sz="1500" b="1" i="0">
+                <a:solidFill>
+                  <a:srgbClr val="E8E6DF"/>
+                </a:solidFill>
+                <a:latin typeface="Cambria"/>
+              </a:rPr>
+              <a:t>Барринджер</a:t>
+            </a:r>
+          </a:p>
+        </p:txBody>
+      </p:sp>
+      <p:sp>
+        <p:nvSpPr>
+          <p:cNvPr id="6" name="TextBox 5"/>
+          <p:cNvSpPr txBox="1"/>
+          <p:nvPr/>
+        </p:nvSpPr>
+        <p:spPr>
+          <a:xfrm>
+            <a:off x="457200" y="5074920"/>
+            <a:ext cx="3576218" cy="640080"/>
+          </a:xfrm>
+          <a:prstGeom prst="rect">
+            <a:avLst/>
+          </a:prstGeom>
+          <a:noFill/>
+        </p:spPr>
+        <p:txBody>
+          <a:bodyPr wrap="square" anchor="t" lIns="0" rIns="0" tIns="0" bIns="0"/>
+          <a:lstStyle/>
+          <a:p>
+            <a:pPr algn="ctr">
+              <a:lnSpc>
+                <a:spcPct val="100000"/>
+              </a:lnSpc>
+              <a:spcAft>
+                <a:spcPts val="0"/>
+              </a:spcAft>
+            </a:pPr>
+            <a:r>
+              <a:rPr sz="3000" b="1" i="0">
+                <a:solidFill>
+                  <a:srgbClr val="C1440E"/>
+                </a:solidFill>
+                <a:latin typeface="Cambria"/>
+              </a:rPr>
+              <a:t>+6.9 дБ</a:t>
+            </a:r>
+          </a:p>
+        </p:txBody>
+      </p:sp>
+      <p:sp>
+        <p:nvSpPr>
+          <p:cNvPr id="7" name="TextBox 6"/>
+          <p:cNvSpPr txBox="1"/>
+          <p:nvPr/>
+        </p:nvSpPr>
+        <p:spPr>
+          <a:xfrm>
+            <a:off x="457200" y="5687568"/>
+            <a:ext cx="3576218" cy="274320"/>
+          </a:xfrm>
+          <a:prstGeom prst="rect">
+            <a:avLst/>
+          </a:prstGeom>
+          <a:noFill/>
+        </p:spPr>
+        <p:txBody>
+          <a:bodyPr wrap="square" anchor="t" lIns="0" rIns="0" tIns="0" bIns="0"/>
+          <a:lstStyle/>
+          <a:p>
+            <a:pPr algn="ctr">
+              <a:lnSpc>
+                <a:spcPct val="100000"/>
+              </a:lnSpc>
+              <a:spcAft>
+                <a:spcPts val="0"/>
+              </a:spcAft>
+            </a:pPr>
+            <a:r>
+              <a:rPr sz="1050" b="0" i="1">
+                <a:solidFill>
+                  <a:srgbClr val="9B978D"/>
+                </a:solidFill>
+                <a:latin typeface="Calibri"/>
+              </a:rPr>
+              <a:t>вал ярче дна (VV)</a:t>
+            </a:r>
+          </a:p>
+        </p:txBody>
+      </p:sp>
+      <p:pic>
+        <p:nvPicPr>
+          <p:cNvPr id="8" name="Picture 7" descr="S1_VVVH_Lonar_______.png"/>
+          <p:cNvPicPr>
+            <a:picLocks noChangeAspect="1"/>
+          </p:cNvPicPr>
+          <p:nvPr/>
+        </p:nvPicPr>
+        <p:blipFill>
+          <a:blip r:embed="rId3"/>
+          <a:stretch>
+            <a:fillRect/>
+          </a:stretch>
+        </p:blipFill>
+        <p:spPr>
+          <a:xfrm>
+            <a:off x="4573063" y="1691640"/>
+            <a:ext cx="3045567" cy="2880360"/>
+          </a:xfrm>
+          <a:prstGeom prst="rect">
+            <a:avLst/>
+          </a:prstGeom>
+        </p:spPr>
+      </p:pic>
+      <p:sp>
+        <p:nvSpPr>
+          <p:cNvPr id="9" name="TextBox 8"/>
+          <p:cNvSpPr txBox="1"/>
+          <p:nvPr/>
+        </p:nvSpPr>
+        <p:spPr>
+          <a:xfrm>
+            <a:off x="4307738" y="4681728"/>
+            <a:ext cx="3576218" cy="365760"/>
+          </a:xfrm>
+          <a:prstGeom prst="rect">
+            <a:avLst/>
+          </a:prstGeom>
+          <a:noFill/>
+        </p:spPr>
+        <p:txBody>
+          <a:bodyPr wrap="square" anchor="t" lIns="0" rIns="0" tIns="0" bIns="0"/>
+          <a:lstStyle/>
+          <a:p>
+            <a:pPr algn="ctr">
+              <a:lnSpc>
+                <a:spcPct val="100000"/>
+              </a:lnSpc>
+              <a:spcAft>
+                <a:spcPts val="0"/>
+              </a:spcAft>
+            </a:pPr>
+            <a:r>
+              <a:rPr sz="1500" b="1" i="0">
+                <a:solidFill>
+                  <a:srgbClr val="E8E6DF"/>
+                </a:solidFill>
+                <a:latin typeface="Cambria"/>
+              </a:rPr>
+              <a:t>Lonar</a:t>
+            </a:r>
+          </a:p>
+        </p:txBody>
+      </p:sp>
+      <p:sp>
+        <p:nvSpPr>
+          <p:cNvPr id="10" name="TextBox 9"/>
+          <p:cNvSpPr txBox="1"/>
+          <p:nvPr/>
+        </p:nvSpPr>
+        <p:spPr>
+          <a:xfrm>
+            <a:off x="4307738" y="5074920"/>
+            <a:ext cx="3576218" cy="640080"/>
+          </a:xfrm>
+          <a:prstGeom prst="rect">
+            <a:avLst/>
+          </a:prstGeom>
+          <a:noFill/>
+        </p:spPr>
+        <p:txBody>
+          <a:bodyPr wrap="square" anchor="t" lIns="0" rIns="0" tIns="0" bIns="0"/>
+          <a:lstStyle/>
+          <a:p>
+            <a:pPr algn="ctr">
+              <a:lnSpc>
+                <a:spcPct val="100000"/>
+              </a:lnSpc>
+              <a:spcAft>
+                <a:spcPts val="0"/>
+              </a:spcAft>
+            </a:pPr>
+            <a:r>
+              <a:rPr sz="3000" b="1" i="0">
+                <a:solidFill>
+                  <a:srgbClr val="5B8A72"/>
+                </a:solidFill>
+                <a:latin typeface="Cambria"/>
+              </a:rPr>
+              <a:t>+12.3 дБ</a:t>
+            </a:r>
+          </a:p>
+        </p:txBody>
+      </p:sp>
+      <p:sp>
+        <p:nvSpPr>
+          <p:cNvPr id="11" name="TextBox 10"/>
+          <p:cNvSpPr txBox="1"/>
+          <p:nvPr/>
+        </p:nvSpPr>
+        <p:spPr>
+          <a:xfrm>
+            <a:off x="4307738" y="5687568"/>
+            <a:ext cx="3576218" cy="274320"/>
+          </a:xfrm>
+          <a:prstGeom prst="rect">
+            <a:avLst/>
+          </a:prstGeom>
+          <a:noFill/>
+        </p:spPr>
+        <p:txBody>
+          <a:bodyPr wrap="square" anchor="t" lIns="0" rIns="0" tIns="0" bIns="0"/>
+          <a:lstStyle/>
+          <a:p>
+            <a:pPr algn="ctr">
+              <a:lnSpc>
+                <a:spcPct val="100000"/>
+              </a:lnSpc>
+              <a:spcAft>
+                <a:spcPts val="0"/>
+              </a:spcAft>
+            </a:pPr>
+            <a:r>
+              <a:rPr sz="1050" b="0" i="1">
+                <a:solidFill>
+                  <a:srgbClr val="9B978D"/>
+                </a:solidFill>
+                <a:latin typeface="Calibri"/>
+              </a:rPr>
+              <a:t>вал ярче дна (VV)</a:t>
+            </a:r>
+          </a:p>
+        </p:txBody>
+      </p:sp>
+      <p:pic>
+        <p:nvPicPr>
+          <p:cNvPr id="12" name="Picture 11" descr="S1_VVVH_Wolfe_Creek___________.png"/>
+          <p:cNvPicPr>
+            <a:picLocks noChangeAspect="1"/>
+          </p:cNvPicPr>
+          <p:nvPr/>
+        </p:nvPicPr>
+        <p:blipFill>
+          <a:blip r:embed="rId4"/>
+          <a:stretch>
+            <a:fillRect/>
+          </a:stretch>
+        </p:blipFill>
+        <p:spPr>
+          <a:xfrm>
+            <a:off x="8434554" y="1691640"/>
+            <a:ext cx="3023661" cy="2880360"/>
+          </a:xfrm>
+          <a:prstGeom prst="rect">
+            <a:avLst/>
+          </a:prstGeom>
+        </p:spPr>
+      </p:pic>
+      <p:sp>
+        <p:nvSpPr>
+          <p:cNvPr id="13" name="TextBox 12"/>
+          <p:cNvSpPr txBox="1"/>
+          <p:nvPr/>
+        </p:nvSpPr>
+        <p:spPr>
+          <a:xfrm>
+            <a:off x="8158276" y="4681728"/>
+            <a:ext cx="3576218" cy="365760"/>
+          </a:xfrm>
+          <a:prstGeom prst="rect">
+            <a:avLst/>
+          </a:prstGeom>
+          <a:noFill/>
+        </p:spPr>
+        <p:txBody>
+          <a:bodyPr wrap="square" anchor="t" lIns="0" rIns="0" tIns="0" bIns="0"/>
+          <a:lstStyle/>
+          <a:p>
+            <a:pPr algn="ctr">
+              <a:lnSpc>
+                <a:spcPct val="100000"/>
+              </a:lnSpc>
+              <a:spcAft>
+                <a:spcPts val="0"/>
+              </a:spcAft>
+            </a:pPr>
+            <a:r>
+              <a:rPr sz="1500" b="1" i="0">
+                <a:solidFill>
+                  <a:srgbClr val="E8E6DF"/>
+                </a:solidFill>
+                <a:latin typeface="Cambria"/>
+              </a:rPr>
+              <a:t>Wolfe Creek</a:t>
+            </a:r>
+          </a:p>
+        </p:txBody>
+      </p:sp>
+      <p:sp>
+        <p:nvSpPr>
+          <p:cNvPr id="14" name="TextBox 13"/>
+          <p:cNvSpPr txBox="1"/>
+          <p:nvPr/>
+        </p:nvSpPr>
+        <p:spPr>
+          <a:xfrm>
+            <a:off x="8158276" y="5074920"/>
+            <a:ext cx="3576218" cy="640080"/>
+          </a:xfrm>
+          <a:prstGeom prst="rect">
+            <a:avLst/>
+          </a:prstGeom>
+          <a:noFill/>
+        </p:spPr>
+        <p:txBody>
+          <a:bodyPr wrap="square" anchor="t" lIns="0" rIns="0" tIns="0" bIns="0"/>
+          <a:lstStyle/>
+          <a:p>
+            <a:pPr algn="ctr">
+              <a:lnSpc>
+                <a:spcPct val="100000"/>
+              </a:lnSpc>
+              <a:spcAft>
+                <a:spcPts val="0"/>
+              </a:spcAft>
+            </a:pPr>
+            <a:r>
+              <a:rPr sz="3000" b="1" i="0">
+                <a:solidFill>
+                  <a:srgbClr val="E0A458"/>
+                </a:solidFill>
+                <a:latin typeface="Cambria"/>
+              </a:rPr>
+              <a:t>+9.3 дБ</a:t>
+            </a:r>
+          </a:p>
+        </p:txBody>
+      </p:sp>
+      <p:sp>
+        <p:nvSpPr>
+          <p:cNvPr id="15" name="TextBox 14"/>
+          <p:cNvSpPr txBox="1"/>
+          <p:nvPr/>
+        </p:nvSpPr>
+        <p:spPr>
+          <a:xfrm>
+            <a:off x="8158276" y="5687568"/>
+            <a:ext cx="3576218" cy="274320"/>
+          </a:xfrm>
+          <a:prstGeom prst="rect">
+            <a:avLst/>
+          </a:prstGeom>
+          <a:noFill/>
+        </p:spPr>
+        <p:txBody>
+          <a:bodyPr wrap="square" anchor="t" lIns="0" rIns="0" tIns="0" bIns="0"/>
+          <a:lstStyle/>
+          <a:p>
+            <a:pPr algn="ctr">
+              <a:lnSpc>
+                <a:spcPct val="100000"/>
+              </a:lnSpc>
+              <a:spcAft>
+                <a:spcPts val="0"/>
+              </a:spcAft>
+            </a:pPr>
+            <a:r>
+              <a:rPr sz="1050" b="0" i="1">
+                <a:solidFill>
+                  <a:srgbClr val="9B978D"/>
+                </a:solidFill>
+                <a:latin typeface="Calibri"/>
+              </a:rPr>
+              <a:t>вал ярче дна (VV)</a:t>
+            </a:r>
+          </a:p>
+        </p:txBody>
+      </p:sp>
+      <p:sp>
+        <p:nvSpPr>
+          <p:cNvPr id="16" name="TextBox 15"/>
           <p:cNvSpPr txBox="1"/>
           <p:nvPr/>
         </p:nvSpPr>
@@ -3512,7 +3962,7 @@
     <p:bg>
       <p:bgPr>
         <a:solidFill>
-          <a:srgbClr val="0B0D13"/>
+          <a:srgbClr val="10203C"/>
         </a:solidFill>
         <a:effectLst/>
       </p:bgPr>
@@ -3559,27 +4009,69 @@
                 </a:solidFill>
                 <a:latin typeface="Cambria"/>
               </a:rPr>
-              <a:t>Что метод пока не может</a:t>
-            </a:r>
-          </a:p>
-        </p:txBody>
-      </p:sp>
-      <p:sp>
-        <p:nvSpPr>
-          <p:cNvPr id="3" name="Oval 2"/>
+              <a:t>Радар vs оптика для кратеров: что уже сделано</a:t>
+            </a:r>
+          </a:p>
+        </p:txBody>
+      </p:sp>
+      <p:sp>
+        <p:nvSpPr>
+          <p:cNvPr id="3" name="TextBox 2"/>
+          <p:cNvSpPr txBox="1"/>
+          <p:nvPr/>
+        </p:nvSpPr>
+        <p:spPr>
+          <a:xfrm>
+            <a:off x="457200" y="932688"/>
+            <a:ext cx="11277295" cy="320040"/>
+          </a:xfrm>
+          <a:prstGeom prst="rect">
+            <a:avLst/>
+          </a:prstGeom>
+          <a:noFill/>
+        </p:spPr>
+        <p:txBody>
+          <a:bodyPr wrap="square" anchor="t" lIns="0" rIns="0" tIns="0" bIns="0"/>
+          <a:lstStyle/>
+          <a:p>
+            <a:pPr algn="l">
+              <a:lnSpc>
+                <a:spcPct val="100000"/>
+              </a:lnSpc>
+              <a:spcAft>
+                <a:spcPts val="0"/>
+              </a:spcAft>
+            </a:pPr>
+            <a:r>
+              <a:rPr sz="1300" b="0" i="1">
+                <a:solidFill>
+                  <a:srgbClr val="9B978D"/>
+                </a:solidFill>
+                <a:latin typeface="Calibri"/>
+              </a:rPr>
+              <a:t>Наш простой VV/VH — базовый вариант давно известного принципа</a:t>
+            </a:r>
+          </a:p>
+        </p:txBody>
+      </p:sp>
+      <p:sp>
+        <p:nvSpPr>
+          <p:cNvPr id="4" name="Rounded Rectangle 3"/>
           <p:cNvSpPr/>
           <p:nvPr/>
         </p:nvSpPr>
         <p:spPr>
           <a:xfrm>
             <a:off x="457200" y="1600200"/>
-            <a:ext cx="502920" cy="502920"/>
-          </a:xfrm>
-          <a:prstGeom prst="ellipse">
-            <a:avLst/>
+            <a:ext cx="5257800" cy="3794760"/>
+          </a:xfrm>
+          <a:prstGeom prst="roundRect">
+            <a:avLst>
+              <a:gd name="adj" fmla="val 4000"/>
+            </a:avLst>
           </a:prstGeom>
           <a:solidFill>
-            <a:srgbClr val="C1440E"/>
+            <a:srgbClr val="1C2E4A"/>
           </a:solidFill>
           <a:ln>
             <a:noFill/>
@@ -3601,32 +4093,63 @@
           </a:fontRef>
         </p:style>
         <p:txBody>
-          <a:bodyPr rtlCol="0" anchor="ctr" lIns="0" rIns="0" tIns="0" bIns="0"/>
+          <a:bodyPr rtlCol="0" anchor="ctr"/>
           <a:lstStyle/>
           <a:p>
             <a:pPr algn="ctr"/>
-            <a:r>
-              <a:rPr sz="2000" b="1">
-                <a:solidFill>
-                  <a:srgbClr val="0B0D13"/>
+          </a:p>
+        </p:txBody>
+      </p:sp>
+      <p:sp>
+        <p:nvSpPr>
+          <p:cNvPr id="5" name="TextBox 4"/>
+          <p:cNvSpPr txBox="1"/>
+          <p:nvPr/>
+        </p:nvSpPr>
+        <p:spPr>
+          <a:xfrm>
+            <a:off x="777240" y="1828800"/>
+            <a:ext cx="4617720" cy="365760"/>
+          </a:xfrm>
+          <a:prstGeom prst="rect">
+            <a:avLst/>
+          </a:prstGeom>
+          <a:noFill/>
+        </p:spPr>
+        <p:txBody>
+          <a:bodyPr wrap="square" anchor="t" lIns="0" rIns="0" tIns="0" bIns="0"/>
+          <a:lstStyle/>
+          <a:p>
+            <a:pPr algn="l">
+              <a:lnSpc>
+                <a:spcPct val="100000"/>
+              </a:lnSpc>
+              <a:spcAft>
+                <a:spcPts val="0"/>
+              </a:spcAft>
+            </a:pPr>
+            <a:r>
+              <a:rPr sz="1700" b="1" i="0">
+                <a:solidFill>
+                  <a:srgbClr val="C1440E"/>
                 </a:solidFill>
                 <a:latin typeface="Cambria"/>
               </a:rPr>
-              <a:t>1</a:t>
-            </a:r>
-          </a:p>
-        </p:txBody>
-      </p:sp>
-      <p:sp>
-        <p:nvSpPr>
-          <p:cNvPr id="4" name="TextBox 3"/>
+              <a:t>SIR-C/X-SAR, 1994</a:t>
+            </a:r>
+          </a:p>
+        </p:txBody>
+      </p:sp>
+      <p:sp>
+        <p:nvSpPr>
+          <p:cNvPr id="6" name="TextBox 5"/>
           <p:cNvSpPr txBox="1"/>
           <p:nvPr/>
         </p:nvSpPr>
         <p:spPr>
           <a:xfrm>
-            <a:off x="1234440" y="1581912"/>
-            <a:ext cx="9966960" cy="822960"/>
+            <a:off x="777240" y="2221992"/>
+            <a:ext cx="4617720" cy="320040"/>
           </a:xfrm>
           <a:prstGeom prst="rect">
             <a:avLst/>
@@ -3639,46 +4162,159 @@
           <a:p>
             <a:pPr algn="l">
               <a:lnSpc>
-                <a:spcPct val="120000"/>
-              </a:lnSpc>
-            </a:pPr>
-            <a:r>
-              <a:rPr sz="1550" b="1" i="0">
-                <a:solidFill>
-                  <a:srgbClr val="C1440E"/>
-                </a:solidFill>
-                <a:latin typeface="Calibri"/>
-              </a:rPr>
-              <a:t>Разрешение DEM — </a:t>
-            </a:r>
-            <a:r>
-              <a:rPr sz="1400" b="0" i="0">
+                <a:spcPct val="100000"/>
+              </a:lnSpc>
+              <a:spcAft>
+                <a:spcPts val="0"/>
+              </a:spcAft>
+            </a:pPr>
+            <a:r>
+              <a:rPr sz="1100" b="0" i="1">
+                <a:solidFill>
+                  <a:srgbClr val="9B978D"/>
+                </a:solidFill>
+                <a:latin typeface="Calibri"/>
+              </a:rPr>
+              <a:t>McHone et al., 2002, Meteoritics &amp; Planetary Science</a:t>
+            </a:r>
+          </a:p>
+        </p:txBody>
+      </p:sp>
+      <p:sp>
+        <p:nvSpPr>
+          <p:cNvPr id="7" name="TextBox 6"/>
+          <p:cNvSpPr txBox="1"/>
+          <p:nvPr/>
+        </p:nvSpPr>
+        <p:spPr>
+          <a:xfrm>
+            <a:off x="777240" y="2697480"/>
+            <a:ext cx="4617720" cy="2560320"/>
+          </a:xfrm>
+          <a:prstGeom prst="rect">
+            <a:avLst/>
+          </a:prstGeom>
+          <a:noFill/>
+        </p:spPr>
+        <p:txBody>
+          <a:bodyPr wrap="square" anchor="t" lIns="0" rIns="0" tIns="0" bIns="0"/>
+          <a:lstStyle/>
+          <a:p>
+            <a:pPr algn="l">
+              <a:lnSpc>
+                <a:spcPct val="135000"/>
+              </a:lnSpc>
+            </a:pPr>
+            <a:r>
+              <a:rPr sz="1350" b="1" i="0">
                 <a:solidFill>
                   <a:srgbClr val="E8E6DF"/>
                 </a:solidFill>
                 <a:latin typeface="Calibri"/>
               </a:rPr>
-              <a:t>30 м/пиксель не резолвит кратеры мельче ~500 м (Kaali, 110 м — использованы только опубликованные данные)</a:t>
-            </a:r>
-          </a:p>
-        </p:txBody>
-      </p:sp>
-      <p:sp>
-        <p:nvSpPr>
-          <p:cNvPr id="5" name="Oval 4"/>
+              <a:t>10 кратеров радаром, в т.ч. наш Wolfe Creek</a:t>
+            </a:r>
+          </a:p>
+          <a:p>
+            <a:pPr algn="l">
+              <a:lnSpc>
+                <a:spcPct val="135000"/>
+              </a:lnSpc>
+            </a:pPr>
+            <a:r>
+              <a:rPr sz="1250" b="0" i="0">
+                <a:solidFill>
+                  <a:srgbClr val="9B978D"/>
+                </a:solidFill>
+                <a:latin typeface="Calibri"/>
+              </a:rPr>
+              <a:t>методы: L/C/X-диапазоны, поляризация</a:t>
+            </a:r>
+          </a:p>
+          <a:p>
+            <a:pPr algn="l">
+              <a:lnSpc>
+                <a:spcPct val="135000"/>
+              </a:lnSpc>
+            </a:pPr>
+            <a:r>
+              <a:rPr sz="600" b="0" i="0">
+                <a:solidFill>
+                  <a:srgbClr val="E8E6DF"/>
+                </a:solidFill>
+                <a:latin typeface="Calibri"/>
+              </a:rPr>
+              <a:t/>
+            </a:r>
+          </a:p>
+          <a:p>
+            <a:pPr algn="l">
+              <a:lnSpc>
+                <a:spcPct val="135000"/>
+              </a:lnSpc>
+            </a:pPr>
+            <a:r>
+              <a:rPr sz="1350" b="0" i="0">
+                <a:solidFill>
+                  <a:srgbClr val="E8E6DF"/>
+                </a:solidFill>
+                <a:latin typeface="Calibri"/>
+              </a:rPr>
+              <a:t>Aorounga (Чад): на оптике — кольцо ~11 км;</a:t>
+            </a:r>
+          </a:p>
+          <a:p>
+            <a:pPr algn="l">
+              <a:lnSpc>
+                <a:spcPct val="135000"/>
+              </a:lnSpc>
+            </a:pPr>
+            <a:r>
+              <a:rPr sz="1350" b="0" i="0">
+                <a:solidFill>
+                  <a:srgbClr val="E8E6DF"/>
+                </a:solidFill>
+                <a:latin typeface="Calibri"/>
+              </a:rPr>
+              <a:t>радар вскрыл погребённое под песком второе</a:t>
+            </a:r>
+          </a:p>
+          <a:p>
+            <a:pPr algn="l">
+              <a:lnSpc>
+                <a:spcPct val="135000"/>
+              </a:lnSpc>
+            </a:pPr>
+            <a:r>
+              <a:rPr sz="1350" b="0" i="0">
+                <a:solidFill>
+                  <a:srgbClr val="E8E6DF"/>
+                </a:solidFill>
+                <a:latin typeface="Calibri"/>
+              </a:rPr>
+              <a:t>кольцо диаметром &gt;17 км, невидимое в оптике</a:t>
+            </a:r>
+          </a:p>
+        </p:txBody>
+      </p:sp>
+      <p:sp>
+        <p:nvSpPr>
+          <p:cNvPr id="8" name="Rounded Rectangle 7"/>
           <p:cNvSpPr/>
           <p:nvPr/>
         </p:nvSpPr>
         <p:spPr>
           <a:xfrm>
-            <a:off x="457200" y="2624328"/>
-            <a:ext cx="502920" cy="502920"/>
-          </a:xfrm>
-          <a:prstGeom prst="ellipse">
-            <a:avLst/>
+            <a:off x="6035040" y="1600200"/>
+            <a:ext cx="5257800" cy="3794760"/>
+          </a:xfrm>
+          <a:prstGeom prst="roundRect">
+            <a:avLst>
+              <a:gd name="adj" fmla="val 4000"/>
+            </a:avLst>
           </a:prstGeom>
           <a:solidFill>
-            <a:srgbClr val="E0A458"/>
+            <a:srgbClr val="1C2E4A"/>
           </a:solidFill>
           <a:ln>
             <a:noFill/>
@@ -3700,32 +4336,63 @@
           </a:fontRef>
         </p:style>
         <p:txBody>
-          <a:bodyPr rtlCol="0" anchor="ctr" lIns="0" rIns="0" tIns="0" bIns="0"/>
+          <a:bodyPr rtlCol="0" anchor="ctr"/>
           <a:lstStyle/>
           <a:p>
             <a:pPr algn="ctr"/>
-            <a:r>
-              <a:rPr sz="2000" b="1">
-                <a:solidFill>
-                  <a:srgbClr val="0B0D13"/>
+          </a:p>
+        </p:txBody>
+      </p:sp>
+      <p:sp>
+        <p:nvSpPr>
+          <p:cNvPr id="9" name="TextBox 8"/>
+          <p:cNvSpPr txBox="1"/>
+          <p:nvPr/>
+        </p:nvSpPr>
+        <p:spPr>
+          <a:xfrm>
+            <a:off x="6355080" y="1828800"/>
+            <a:ext cx="4617720" cy="365760"/>
+          </a:xfrm>
+          <a:prstGeom prst="rect">
+            <a:avLst/>
+          </a:prstGeom>
+          <a:noFill/>
+        </p:spPr>
+        <p:txBody>
+          <a:bodyPr wrap="square" anchor="t" lIns="0" rIns="0" tIns="0" bIns="0"/>
+          <a:lstStyle/>
+          <a:p>
+            <a:pPr algn="l">
+              <a:lnSpc>
+                <a:spcPct val="100000"/>
+              </a:lnSpc>
+              <a:spcAft>
+                <a:spcPts val="0"/>
+              </a:spcAft>
+            </a:pPr>
+            <a:r>
+              <a:rPr sz="1700" b="1" i="0">
+                <a:solidFill>
+                  <a:srgbClr val="5B8A72"/>
                 </a:solidFill>
                 <a:latin typeface="Cambria"/>
               </a:rPr>
-              <a:t>2</a:t>
-            </a:r>
-          </a:p>
-        </p:txBody>
-      </p:sp>
-      <p:sp>
-        <p:nvSpPr>
-          <p:cNvPr id="6" name="TextBox 5"/>
+              <a:t>ALOS PALSAR-2, 2017</a:t>
+            </a:r>
+          </a:p>
+        </p:txBody>
+      </p:sp>
+      <p:sp>
+        <p:nvSpPr>
+          <p:cNvPr id="10" name="TextBox 9"/>
           <p:cNvSpPr txBox="1"/>
           <p:nvPr/>
         </p:nvSpPr>
         <p:spPr>
           <a:xfrm>
-            <a:off x="1234440" y="2606040"/>
-            <a:ext cx="9966960" cy="822960"/>
+            <a:off x="6355080" y="2221992"/>
+            <a:ext cx="4617720" cy="320040"/>
           </a:xfrm>
           <a:prstGeom prst="rect">
             <a:avLst/>
@@ -3738,46 +4405,159 @@
           <a:p>
             <a:pPr algn="l">
               <a:lnSpc>
-                <a:spcPct val="120000"/>
-              </a:lnSpc>
-            </a:pPr>
-            <a:r>
-              <a:rPr sz="1550" b="1" i="0">
-                <a:solidFill>
-                  <a:srgbClr val="E0A458"/>
-                </a:solidFill>
-                <a:latin typeface="Calibri"/>
-              </a:rPr>
-              <a:t>Не заменяет полевую геологию — </a:t>
-            </a:r>
-            <a:r>
-              <a:rPr sz="1400" b="0" i="0">
+                <a:spcPct val="100000"/>
+              </a:lnSpc>
+              <a:spcAft>
+                <a:spcPts val="0"/>
+              </a:spcAft>
+            </a:pPr>
+            <a:r>
+              <a:rPr sz="1100" b="0" i="1">
+                <a:solidFill>
+                  <a:srgbClr val="9B978D"/>
+                </a:solidFill>
+                <a:latin typeface="Calibri"/>
+              </a:rPr>
+              <a:t>van Gasselt et al., Earth, Planets and Space</a:t>
+            </a:r>
+          </a:p>
+        </p:txBody>
+      </p:sp>
+      <p:sp>
+        <p:nvSpPr>
+          <p:cNvPr id="11" name="TextBox 10"/>
+          <p:cNvSpPr txBox="1"/>
+          <p:nvPr/>
+        </p:nvSpPr>
+        <p:spPr>
+          <a:xfrm>
+            <a:off x="6355080" y="2697480"/>
+            <a:ext cx="4617720" cy="2560320"/>
+          </a:xfrm>
+          <a:prstGeom prst="rect">
+            <a:avLst/>
+          </a:prstGeom>
+          <a:noFill/>
+        </p:spPr>
+        <p:txBody>
+          <a:bodyPr wrap="square" anchor="t" lIns="0" rIns="0" tIns="0" bIns="0"/>
+          <a:lstStyle/>
+          <a:p>
+            <a:pPr algn="l">
+              <a:lnSpc>
+                <a:spcPct val="135000"/>
+              </a:lnSpc>
+            </a:pPr>
+            <a:r>
+              <a:rPr sz="1350" b="1" i="0">
                 <a:solidFill>
                   <a:srgbClr val="E8E6DF"/>
                 </a:solidFill>
                 <a:latin typeface="Calibri"/>
               </a:rPr>
-              <a:t>определяет морфологию и радарный/рельефный сигнал, но не шоковый метаморфизм, брекчии, состав пород</a:t>
-            </a:r>
-          </a:p>
-        </p:txBody>
-      </p:sp>
-      <p:sp>
-        <p:nvSpPr>
-          <p:cNvPr id="7" name="Oval 6"/>
+              <a:t>Структура Oasis, Ливия (сильно эродирована)</a:t>
+            </a:r>
+          </a:p>
+          <a:p>
+            <a:pPr algn="l">
+              <a:lnSpc>
+                <a:spcPct val="135000"/>
+              </a:lnSpc>
+            </a:pPr>
+            <a:r>
+              <a:rPr sz="1250" b="0" i="0">
+                <a:solidFill>
+                  <a:srgbClr val="9B978D"/>
+                </a:solidFill>
+                <a:latin typeface="Calibri"/>
+              </a:rPr>
+              <a:t>методы: L-диапазон, амплитуда, фазовая</a:t>
+            </a:r>
+          </a:p>
+          <a:p>
+            <a:pPr algn="l">
+              <a:lnSpc>
+                <a:spcPct val="135000"/>
+              </a:lnSpc>
+            </a:pPr>
+            <a:r>
+              <a:rPr sz="1250" b="0" i="0">
+                <a:solidFill>
+                  <a:srgbClr val="9B978D"/>
+                </a:solidFill>
+                <a:latin typeface="Calibri"/>
+              </a:rPr>
+              <a:t>когерентность, поляриметрическая декомпозиция</a:t>
+            </a:r>
+          </a:p>
+          <a:p>
+            <a:pPr algn="l">
+              <a:lnSpc>
+                <a:spcPct val="135000"/>
+              </a:lnSpc>
+            </a:pPr>
+            <a:r>
+              <a:rPr sz="600" b="0" i="0">
+                <a:solidFill>
+                  <a:srgbClr val="E8E6DF"/>
+                </a:solidFill>
+                <a:latin typeface="Calibri"/>
+              </a:rPr>
+              <a:t/>
+            </a:r>
+          </a:p>
+          <a:p>
+            <a:pPr algn="l">
+              <a:lnSpc>
+                <a:spcPct val="135000"/>
+              </a:lnSpc>
+            </a:pPr>
+            <a:r>
+              <a:rPr sz="1350" b="0" i="0">
+                <a:solidFill>
+                  <a:srgbClr val="E8E6DF"/>
+                </a:solidFill>
+                <a:latin typeface="Calibri"/>
+              </a:rPr>
+              <a:t>Раскрыли подповерхностное напластование и</a:t>
+            </a:r>
+          </a:p>
+          <a:p>
+            <a:pPr algn="l">
+              <a:lnSpc>
+                <a:spcPct val="135000"/>
+              </a:lnSpc>
+            </a:pPr>
+            <a:r>
+              <a:rPr sz="1350" b="0" i="0">
+                <a:solidFill>
+                  <a:srgbClr val="E8E6DF"/>
+                </a:solidFill>
+                <a:latin typeface="Calibri"/>
+              </a:rPr>
+              <a:t>палеорусло реки — размытые/невидимые на Landsat</a:t>
+            </a:r>
+          </a:p>
+        </p:txBody>
+      </p:sp>
+      <p:sp>
+        <p:nvSpPr>
+          <p:cNvPr id="12" name="Rounded Rectangle 11"/>
           <p:cNvSpPr/>
           <p:nvPr/>
         </p:nvSpPr>
         <p:spPr>
           <a:xfrm>
-            <a:off x="457200" y="3648456"/>
-            <a:ext cx="502920" cy="502920"/>
-          </a:xfrm>
-          <a:prstGeom prst="ellipse">
-            <a:avLst/>
+            <a:off x="457200" y="5577840"/>
+            <a:ext cx="11277295" cy="960120"/>
+          </a:xfrm>
+          <a:prstGeom prst="roundRect">
+            <a:avLst>
+              <a:gd name="adj" fmla="val 4000"/>
+            </a:avLst>
           </a:prstGeom>
           <a:solidFill>
-            <a:srgbClr val="5B8A72"/>
+            <a:srgbClr val="1C2E4A"/>
           </a:solidFill>
           <a:ln>
             <a:noFill/>
@@ -3799,32 +4579,23 @@
           </a:fontRef>
         </p:style>
         <p:txBody>
-          <a:bodyPr rtlCol="0" anchor="ctr" lIns="0" rIns="0" tIns="0" bIns="0"/>
+          <a:bodyPr rtlCol="0" anchor="ctr"/>
           <a:lstStyle/>
           <a:p>
             <a:pPr algn="ctr"/>
-            <a:r>
-              <a:rPr sz="2000" b="1">
-                <a:solidFill>
-                  <a:srgbClr val="0B0D13"/>
-                </a:solidFill>
-                <a:latin typeface="Cambria"/>
-              </a:rPr>
-              <a:t>3</a:t>
-            </a:r>
-          </a:p>
-        </p:txBody>
-      </p:sp>
-      <p:sp>
-        <p:nvSpPr>
-          <p:cNvPr id="8" name="TextBox 7"/>
+          </a:p>
+        </p:txBody>
+      </p:sp>
+      <p:sp>
+        <p:nvSpPr>
+          <p:cNvPr id="13" name="TextBox 12"/>
           <p:cNvSpPr txBox="1"/>
           <p:nvPr/>
         </p:nvSpPr>
         <p:spPr>
           <a:xfrm>
-            <a:off x="1234440" y="3630168"/>
-            <a:ext cx="9966960" cy="822960"/>
+            <a:off x="777240" y="5705856"/>
+            <a:ext cx="10637215" cy="731520"/>
           </a:xfrm>
           <a:prstGeom prst="rect">
             <a:avLst/>
@@ -3837,132 +4608,27 @@
           <a:p>
             <a:pPr algn="l">
               <a:lnSpc>
-                <a:spcPct val="120000"/>
-              </a:lnSpc>
-            </a:pPr>
-            <a:r>
-              <a:rPr sz="1550" b="1" i="0">
-                <a:solidFill>
-                  <a:srgbClr val="5B8A72"/>
-                </a:solidFill>
-                <a:latin typeface="Calibri"/>
-              </a:rPr>
-              <a:t>Точность справочника координат — </a:t>
-            </a:r>
-            <a:r>
-              <a:rPr sz="1400" b="0" i="0">
+                <a:spcPct val="122000"/>
+              </a:lnSpc>
+              <a:spcAft>
+                <a:spcPts val="0"/>
+              </a:spcAft>
+            </a:pPr>
+            <a:r>
+              <a:rPr sz="1150" b="0" i="1">
                 <a:solidFill>
                   <a:srgbClr val="E8E6DF"/>
                 </a:solidFill>
                 <a:latin typeface="Calibri"/>
               </a:rPr>
-              <a:t>каталожные координаты ориентировочные — нужна ручная проверка (реализовано: клик по центру на снимке)</a:t>
-            </a:r>
-          </a:p>
-        </p:txBody>
-      </p:sp>
-      <p:sp>
-        <p:nvSpPr>
-          <p:cNvPr id="9" name="Oval 8"/>
-          <p:cNvSpPr/>
-          <p:nvPr/>
-        </p:nvSpPr>
-        <p:spPr>
-          <a:xfrm>
-            <a:off x="457200" y="4672584"/>
-            <a:ext cx="502920" cy="502920"/>
-          </a:xfrm>
-          <a:prstGeom prst="ellipse">
-            <a:avLst/>
-          </a:prstGeom>
-          <a:solidFill>
-            <a:srgbClr val="E07A5F"/>
-          </a:solidFill>
-          <a:ln>
-            <a:noFill/>
-          </a:ln>
-          <a:effectLst/>
-        </p:spPr>
-        <p:style>
-          <a:lnRef idx="1">
-            <a:schemeClr val="accent1"/>
-          </a:lnRef>
-          <a:fillRef idx="3">
-            <a:schemeClr val="accent1"/>
-          </a:fillRef>
-          <a:effectRef idx="2">
-            <a:schemeClr val="accent1"/>
-          </a:effectRef>
-          <a:fontRef idx="minor">
-            <a:schemeClr val="lt1"/>
-          </a:fontRef>
-        </p:style>
-        <p:txBody>
-          <a:bodyPr rtlCol="0" anchor="ctr" lIns="0" rIns="0" tIns="0" bIns="0"/>
-          <a:lstStyle/>
-          <a:p>
-            <a:pPr algn="ctr"/>
-            <a:r>
-              <a:rPr sz="2000" b="1">
-                <a:solidFill>
-                  <a:srgbClr val="0B0D13"/>
-                </a:solidFill>
-                <a:latin typeface="Cambria"/>
-              </a:rPr>
-              <a:t>4</a:t>
-            </a:r>
-          </a:p>
-        </p:txBody>
-      </p:sp>
-      <p:sp>
-        <p:nvSpPr>
-          <p:cNvPr id="10" name="TextBox 9"/>
-          <p:cNvSpPr txBox="1"/>
-          <p:nvPr/>
-        </p:nvSpPr>
-        <p:spPr>
-          <a:xfrm>
-            <a:off x="1234440" y="4654296"/>
-            <a:ext cx="9966960" cy="822960"/>
-          </a:xfrm>
-          <a:prstGeom prst="rect">
-            <a:avLst/>
-          </a:prstGeom>
-          <a:noFill/>
-        </p:spPr>
-        <p:txBody>
-          <a:bodyPr wrap="square" anchor="t" lIns="0" rIns="0" tIns="0" bIns="0"/>
-          <a:lstStyle/>
-          <a:p>
-            <a:pPr algn="l">
-              <a:lnSpc>
-                <a:spcPct val="120000"/>
-              </a:lnSpc>
-            </a:pPr>
-            <a:r>
-              <a:rPr sz="1550" b="1" i="0">
-                <a:solidFill>
-                  <a:srgbClr val="E07A5F"/>
-                </a:solidFill>
-                <a:latin typeface="Calibri"/>
-              </a:rPr>
-              <a:t>Озёра и осадочные заполнения — </a:t>
-            </a:r>
-            <a:r>
-              <a:rPr sz="1400" b="0" i="0">
-                <a:solidFill>
-                  <a:srgbClr val="E8E6DF"/>
-                </a:solidFill>
-                <a:latin typeface="Calibri"/>
-              </a:rPr>
-              <a:t>искажают измеренную глубину относительно исходной формы кратера — нужна геологическая интерпретация отклонений, а не только цифра</a:t>
-            </a:r>
-          </a:p>
-        </p:txBody>
-      </p:sp>
-      <p:sp>
-        <p:nvSpPr>
-          <p:cNvPr id="11" name="TextBox 10"/>
+              <a:t>Общий вывод этой литературы: длинноволновый (L-диапазон) радар проникает сквозь сухой песок и вскрывает погребённые структуры, невидимые в оптике. Наш анализ (C-диапазон Sentinel-1, медиана VV/VH) проще и не видит сквозь грунт — это базовый поверхностный сигнал шероховатости вала; следующий шаг — поляриметрия и L-диапазон (ALOS-2, NISAR).</a:t>
+            </a:r>
+          </a:p>
+        </p:txBody>
+      </p:sp>
+      <p:sp>
+        <p:nvSpPr>
+          <p:cNvPr id="14" name="TextBox 13"/>
           <p:cNvSpPr txBox="1"/>
           <p:nvPr/>
         </p:nvSpPr>
@@ -4014,7 +4680,7 @@
     <p:bg>
       <p:bgPr>
         <a:solidFill>
-          <a:srgbClr val="0B0D13"/>
+          <a:srgbClr val="10203C"/>
         </a:solidFill>
         <a:effectLst/>
       </p:bgPr>
@@ -4061,472 +4727,38 @@
                 </a:solidFill>
                 <a:latin typeface="Cambria"/>
               </a:rPr>
-              <a:t>Выводы и практическая ценность</a:t>
-            </a:r>
-          </a:p>
-        </p:txBody>
-      </p:sp>
-      <p:sp>
-        <p:nvSpPr>
-          <p:cNvPr id="3" name="Oval 2"/>
-          <p:cNvSpPr/>
-          <p:nvPr/>
-        </p:nvSpPr>
-        <p:spPr>
-          <a:xfrm>
-            <a:off x="457200" y="1600200"/>
-            <a:ext cx="457200" cy="457200"/>
-          </a:xfrm>
-          <a:prstGeom prst="ellipse">
-            <a:avLst/>
-          </a:prstGeom>
-          <a:solidFill>
-            <a:srgbClr val="C1440E"/>
-          </a:solidFill>
-          <a:ln>
-            <a:noFill/>
-          </a:ln>
-          <a:effectLst/>
-        </p:spPr>
-        <p:style>
-          <a:lnRef idx="1">
-            <a:schemeClr val="accent1"/>
-          </a:lnRef>
-          <a:fillRef idx="3">
-            <a:schemeClr val="accent1"/>
-          </a:fillRef>
-          <a:effectRef idx="2">
-            <a:schemeClr val="accent1"/>
-          </a:effectRef>
-          <a:fontRef idx="minor">
-            <a:schemeClr val="lt1"/>
-          </a:fontRef>
-        </p:style>
-        <p:txBody>
-          <a:bodyPr rtlCol="0" anchor="ctr" lIns="0" rIns="0" tIns="0" bIns="0"/>
-          <a:lstStyle/>
-          <a:p>
-            <a:pPr algn="ctr"/>
-            <a:r>
-              <a:rPr sz="2000" b="1">
-                <a:solidFill>
-                  <a:srgbClr val="0B0D13"/>
-                </a:solidFill>
-                <a:latin typeface="Cambria"/>
-              </a:rPr>
-              <a:t>1</a:t>
-            </a:r>
-          </a:p>
-        </p:txBody>
-      </p:sp>
+              <a:t>Наши измерения vs публикации vs эталон свежих кратеров</a:t>
+            </a:r>
+          </a:p>
+        </p:txBody>
+      </p:sp>
+      <p:pic>
+        <p:nvPicPr>
+          <p:cNvPr id="3" name="Picture 2" descr="crater_geology_comparison.png"/>
+          <p:cNvPicPr>
+            <a:picLocks noChangeAspect="1"/>
+          </p:cNvPicPr>
+          <p:nvPr/>
+        </p:nvPicPr>
+        <p:blipFill>
+          <a:blip r:embed="rId2"/>
+          <a:stretch>
+            <a:fillRect/>
+          </a:stretch>
+        </p:blipFill>
+        <p:spPr>
+          <a:xfrm>
+            <a:off x="2841659" y="1417320"/>
+            <a:ext cx="6508376" cy="5029200"/>
+          </a:xfrm>
+          <a:prstGeom prst="rect">
+            <a:avLst/>
+          </a:prstGeom>
+        </p:spPr>
+      </p:pic>
       <p:sp>
         <p:nvSpPr>
           <p:cNvPr id="4" name="TextBox 3"/>
-          <p:cNvSpPr txBox="1"/>
-          <p:nvPr/>
-        </p:nvSpPr>
-        <p:spPr>
-          <a:xfrm>
-            <a:off x="1188720" y="1572768"/>
-            <a:ext cx="10058400" cy="777240"/>
-          </a:xfrm>
-          <a:prstGeom prst="rect">
-            <a:avLst/>
-          </a:prstGeom>
-          <a:noFill/>
-        </p:spPr>
-        <p:txBody>
-          <a:bodyPr wrap="square" anchor="t" lIns="0" rIns="0" tIns="0" bIns="0"/>
-          <a:lstStyle/>
-          <a:p>
-            <a:pPr algn="l">
-              <a:lnSpc>
-                <a:spcPct val="120000"/>
-              </a:lnSpc>
-              <a:spcAft>
-                <a:spcPts val="0"/>
-              </a:spcAft>
-            </a:pPr>
-            <a:r>
-              <a:rPr sz="1400" b="0" i="0">
-                <a:solidFill>
-                  <a:srgbClr val="E8E6DF"/>
-                </a:solidFill>
-                <a:latin typeface="Calibri"/>
-              </a:rPr>
-              <a:t>Единый воспроизводимый скрипт применён без изменений к трём кратерам разного возраста и типа мишени (осадочные породы, базальт, песчаник)</a:t>
-            </a:r>
-          </a:p>
-        </p:txBody>
-      </p:sp>
-      <p:sp>
-        <p:nvSpPr>
-          <p:cNvPr id="5" name="Oval 4"/>
-          <p:cNvSpPr/>
-          <p:nvPr/>
-        </p:nvSpPr>
-        <p:spPr>
-          <a:xfrm>
-            <a:off x="457200" y="2532888"/>
-            <a:ext cx="457200" cy="457200"/>
-          </a:xfrm>
-          <a:prstGeom prst="ellipse">
-            <a:avLst/>
-          </a:prstGeom>
-          <a:solidFill>
-            <a:srgbClr val="E0A458"/>
-          </a:solidFill>
-          <a:ln>
-            <a:noFill/>
-          </a:ln>
-          <a:effectLst/>
-        </p:spPr>
-        <p:style>
-          <a:lnRef idx="1">
-            <a:schemeClr val="accent1"/>
-          </a:lnRef>
-          <a:fillRef idx="3">
-            <a:schemeClr val="accent1"/>
-          </a:fillRef>
-          <a:effectRef idx="2">
-            <a:schemeClr val="accent1"/>
-          </a:effectRef>
-          <a:fontRef idx="minor">
-            <a:schemeClr val="lt1"/>
-          </a:fontRef>
-        </p:style>
-        <p:txBody>
-          <a:bodyPr rtlCol="0" anchor="ctr" lIns="0" rIns="0" tIns="0" bIns="0"/>
-          <a:lstStyle/>
-          <a:p>
-            <a:pPr algn="ctr"/>
-            <a:r>
-              <a:rPr sz="2000" b="1">
-                <a:solidFill>
-                  <a:srgbClr val="0B0D13"/>
-                </a:solidFill>
-                <a:latin typeface="Cambria"/>
-              </a:rPr>
-              <a:t>2</a:t>
-            </a:r>
-          </a:p>
-        </p:txBody>
-      </p:sp>
-      <p:sp>
-        <p:nvSpPr>
-          <p:cNvPr id="6" name="TextBox 5"/>
-          <p:cNvSpPr txBox="1"/>
-          <p:nvPr/>
-        </p:nvSpPr>
-        <p:spPr>
-          <a:xfrm>
-            <a:off x="1188720" y="2505456"/>
-            <a:ext cx="10058400" cy="777240"/>
-          </a:xfrm>
-          <a:prstGeom prst="rect">
-            <a:avLst/>
-          </a:prstGeom>
-          <a:noFill/>
-        </p:spPr>
-        <p:txBody>
-          <a:bodyPr wrap="square" anchor="t" lIns="0" rIns="0" tIns="0" bIns="0"/>
-          <a:lstStyle/>
-          <a:p>
-            <a:pPr algn="l">
-              <a:lnSpc>
-                <a:spcPct val="120000"/>
-              </a:lnSpc>
-              <a:spcAft>
-                <a:spcPts val="0"/>
-              </a:spcAft>
-            </a:pPr>
-            <a:r>
-              <a:rPr sz="1400" b="0" i="0">
-                <a:solidFill>
-                  <a:srgbClr val="E8E6DF"/>
-                </a:solidFill>
-                <a:latin typeface="Calibri"/>
-              </a:rPr>
-              <a:t>Метод валидирован на Барринджере (расхождение с публикацией &lt; 5%); интерпретируемые расхождения на Lonar и Wolfe Creek объясняются геологией (озеро, занесение осадком)</a:t>
-            </a:r>
-          </a:p>
-        </p:txBody>
-      </p:sp>
-      <p:sp>
-        <p:nvSpPr>
-          <p:cNvPr id="7" name="Oval 6"/>
-          <p:cNvSpPr/>
-          <p:nvPr/>
-        </p:nvSpPr>
-        <p:spPr>
-          <a:xfrm>
-            <a:off x="457200" y="3465576"/>
-            <a:ext cx="457200" cy="457200"/>
-          </a:xfrm>
-          <a:prstGeom prst="ellipse">
-            <a:avLst/>
-          </a:prstGeom>
-          <a:solidFill>
-            <a:srgbClr val="C1440E"/>
-          </a:solidFill>
-          <a:ln>
-            <a:noFill/>
-          </a:ln>
-          <a:effectLst/>
-        </p:spPr>
-        <p:style>
-          <a:lnRef idx="1">
-            <a:schemeClr val="accent1"/>
-          </a:lnRef>
-          <a:fillRef idx="3">
-            <a:schemeClr val="accent1"/>
-          </a:fillRef>
-          <a:effectRef idx="2">
-            <a:schemeClr val="accent1"/>
-          </a:effectRef>
-          <a:fontRef idx="minor">
-            <a:schemeClr val="lt1"/>
-          </a:fontRef>
-        </p:style>
-        <p:txBody>
-          <a:bodyPr rtlCol="0" anchor="ctr" lIns="0" rIns="0" tIns="0" bIns="0"/>
-          <a:lstStyle/>
-          <a:p>
-            <a:pPr algn="ctr"/>
-            <a:r>
-              <a:rPr sz="2000" b="1">
-                <a:solidFill>
-                  <a:srgbClr val="0B0D13"/>
-                </a:solidFill>
-                <a:latin typeface="Cambria"/>
-              </a:rPr>
-              <a:t>3</a:t>
-            </a:r>
-          </a:p>
-        </p:txBody>
-      </p:sp>
-      <p:sp>
-        <p:nvSpPr>
-          <p:cNvPr id="8" name="TextBox 7"/>
-          <p:cNvSpPr txBox="1"/>
-          <p:nvPr/>
-        </p:nvSpPr>
-        <p:spPr>
-          <a:xfrm>
-            <a:off x="1188720" y="3438144"/>
-            <a:ext cx="10058400" cy="777240"/>
-          </a:xfrm>
-          <a:prstGeom prst="rect">
-            <a:avLst/>
-          </a:prstGeom>
-          <a:noFill/>
-        </p:spPr>
-        <p:txBody>
-          <a:bodyPr wrap="square" anchor="t" lIns="0" rIns="0" tIns="0" bIns="0"/>
-          <a:lstStyle/>
-          <a:p>
-            <a:pPr algn="l">
-              <a:lnSpc>
-                <a:spcPct val="120000"/>
-              </a:lnSpc>
-              <a:spcAft>
-                <a:spcPts val="0"/>
-              </a:spcAft>
-            </a:pPr>
-            <a:r>
-              <a:rPr sz="1400" b="0" i="0">
-                <a:solidFill>
-                  <a:srgbClr val="E8E6DF"/>
-                </a:solidFill>
-                <a:latin typeface="Calibri"/>
-              </a:rPr>
-              <a:t>Радар (Sentinel-1) количественно подтверждает морфологический сигнал вала независимо от освещения, облачности и типа породы</a:t>
-            </a:r>
-          </a:p>
-        </p:txBody>
-      </p:sp>
-      <p:sp>
-        <p:nvSpPr>
-          <p:cNvPr id="9" name="Oval 8"/>
-          <p:cNvSpPr/>
-          <p:nvPr/>
-        </p:nvSpPr>
-        <p:spPr>
-          <a:xfrm>
-            <a:off x="457200" y="4398264"/>
-            <a:ext cx="457200" cy="457200"/>
-          </a:xfrm>
-          <a:prstGeom prst="ellipse">
-            <a:avLst/>
-          </a:prstGeom>
-          <a:solidFill>
-            <a:srgbClr val="E0A458"/>
-          </a:solidFill>
-          <a:ln>
-            <a:noFill/>
-          </a:ln>
-          <a:effectLst/>
-        </p:spPr>
-        <p:style>
-          <a:lnRef idx="1">
-            <a:schemeClr val="accent1"/>
-          </a:lnRef>
-          <a:fillRef idx="3">
-            <a:schemeClr val="accent1"/>
-          </a:fillRef>
-          <a:effectRef idx="2">
-            <a:schemeClr val="accent1"/>
-          </a:effectRef>
-          <a:fontRef idx="minor">
-            <a:schemeClr val="lt1"/>
-          </a:fontRef>
-        </p:style>
-        <p:txBody>
-          <a:bodyPr rtlCol="0" anchor="ctr" lIns="0" rIns="0" tIns="0" bIns="0"/>
-          <a:lstStyle/>
-          <a:p>
-            <a:pPr algn="ctr"/>
-            <a:r>
-              <a:rPr sz="2000" b="1">
-                <a:solidFill>
-                  <a:srgbClr val="0B0D13"/>
-                </a:solidFill>
-                <a:latin typeface="Cambria"/>
-              </a:rPr>
-              <a:t>4</a:t>
-            </a:r>
-          </a:p>
-        </p:txBody>
-      </p:sp>
-      <p:sp>
-        <p:nvSpPr>
-          <p:cNvPr id="10" name="TextBox 9"/>
-          <p:cNvSpPr txBox="1"/>
-          <p:nvPr/>
-        </p:nvSpPr>
-        <p:spPr>
-          <a:xfrm>
-            <a:off x="1188720" y="4370832"/>
-            <a:ext cx="10058400" cy="777240"/>
-          </a:xfrm>
-          <a:prstGeom prst="rect">
-            <a:avLst/>
-          </a:prstGeom>
-          <a:noFill/>
-        </p:spPr>
-        <p:txBody>
-          <a:bodyPr wrap="square" anchor="t" lIns="0" rIns="0" tIns="0" bIns="0"/>
-          <a:lstStyle/>
-          <a:p>
-            <a:pPr algn="l">
-              <a:lnSpc>
-                <a:spcPct val="120000"/>
-              </a:lnSpc>
-              <a:spcAft>
-                <a:spcPts val="0"/>
-              </a:spcAft>
-            </a:pPr>
-            <a:r>
-              <a:rPr sz="1400" b="0" i="0">
-                <a:solidFill>
-                  <a:srgbClr val="E8E6DF"/>
-                </a:solidFill>
-                <a:latin typeface="Calibri"/>
-              </a:rPr>
-              <a:t>ДЗЗ — инструмент обнаружения, картографирования и дистанционной проверки согласованности признаков, но не замена полевой и лабораторной верификации</a:t>
-            </a:r>
-          </a:p>
-        </p:txBody>
-      </p:sp>
-      <p:sp>
-        <p:nvSpPr>
-          <p:cNvPr id="11" name="Rounded Rectangle 10"/>
-          <p:cNvSpPr/>
-          <p:nvPr/>
-        </p:nvSpPr>
-        <p:spPr>
-          <a:xfrm>
-            <a:off x="457200" y="5440680"/>
-            <a:ext cx="11277295" cy="1005840"/>
-          </a:xfrm>
-          <a:prstGeom prst="roundRect">
-            <a:avLst>
-              <a:gd name="adj" fmla="val 4000"/>
-            </a:avLst>
-          </a:prstGeom>
-          <a:solidFill>
-            <a:srgbClr val="15181F"/>
-          </a:solidFill>
-          <a:ln>
-            <a:noFill/>
-          </a:ln>
-          <a:effectLst/>
-        </p:spPr>
-        <p:style>
-          <a:lnRef idx="1">
-            <a:schemeClr val="accent1"/>
-          </a:lnRef>
-          <a:fillRef idx="3">
-            <a:schemeClr val="accent1"/>
-          </a:fillRef>
-          <a:effectRef idx="2">
-            <a:schemeClr val="accent1"/>
-          </a:effectRef>
-          <a:fontRef idx="minor">
-            <a:schemeClr val="lt1"/>
-          </a:fontRef>
-        </p:style>
-        <p:txBody>
-          <a:bodyPr rtlCol="0" anchor="ctr"/>
-          <a:lstStyle/>
-          <a:p>
-            <a:pPr algn="ctr"/>
-          </a:p>
-        </p:txBody>
-      </p:sp>
-      <p:sp>
-        <p:nvSpPr>
-          <p:cNvPr id="12" name="TextBox 11"/>
-          <p:cNvSpPr txBox="1"/>
-          <p:nvPr/>
-        </p:nvSpPr>
-        <p:spPr>
-          <a:xfrm>
-            <a:off x="777240" y="5577840"/>
-            <a:ext cx="10637215" cy="777240"/>
-          </a:xfrm>
-          <a:prstGeom prst="rect">
-            <a:avLst/>
-          </a:prstGeom>
-          <a:noFill/>
-        </p:spPr>
-        <p:txBody>
-          <a:bodyPr wrap="square" anchor="ctr" lIns="0" rIns="0" tIns="0" bIns="0"/>
-          <a:lstStyle/>
-          <a:p>
-            <a:pPr algn="l">
-              <a:lnSpc>
-                <a:spcPct val="120000"/>
-              </a:lnSpc>
-              <a:spcAft>
-                <a:spcPts val="0"/>
-              </a:spcAft>
-            </a:pPr>
-            <a:r>
-              <a:rPr sz="1250" b="0" i="1">
-                <a:solidFill>
-                  <a:srgbClr val="E0A458"/>
-                </a:solidFill>
-                <a:latin typeface="Calibri"/>
-              </a:rPr>
-              <a:t>Дальше: добавить кратеры с неопределённым происхождением, расширить географию, автоматизировать первичное детектирование кандидатов.</a:t>
-            </a:r>
-          </a:p>
-        </p:txBody>
-      </p:sp>
-      <p:sp>
-        <p:nvSpPr>
-          <p:cNvPr id="13" name="TextBox 12"/>
           <p:cNvSpPr txBox="1"/>
           <p:nvPr/>
         </p:nvSpPr>
@@ -4578,7 +4810,7 @@
     <p:bg>
       <p:bgPr>
         <a:solidFill>
-          <a:srgbClr val="0B0D13"/>
+          <a:srgbClr val="10203C"/>
         </a:solidFill>
         <a:effectLst/>
       </p:bgPr>
@@ -4625,21 +4857,74 @@
                 </a:solidFill>
                 <a:latin typeface="Cambria"/>
               </a:rPr>
-              <a:t>Литература</a:t>
-            </a:r>
-          </a:p>
-        </p:txBody>
-      </p:sp>
-      <p:sp>
-        <p:nvSpPr>
-          <p:cNvPr id="3" name="TextBox 2"/>
+              <a:t>Что метод пока не может</a:t>
+            </a:r>
+          </a:p>
+        </p:txBody>
+      </p:sp>
+      <p:sp>
+        <p:nvSpPr>
+          <p:cNvPr id="3" name="Oval 2"/>
+          <p:cNvSpPr/>
+          <p:nvPr/>
+        </p:nvSpPr>
+        <p:spPr>
+          <a:xfrm>
+            <a:off x="457200" y="1600200"/>
+            <a:ext cx="502920" cy="502920"/>
+          </a:xfrm>
+          <a:prstGeom prst="ellipse">
+            <a:avLst/>
+          </a:prstGeom>
+          <a:solidFill>
+            <a:srgbClr val="C1440E"/>
+          </a:solidFill>
+          <a:ln>
+            <a:noFill/>
+          </a:ln>
+          <a:effectLst/>
+        </p:spPr>
+        <p:style>
+          <a:lnRef idx="1">
+            <a:schemeClr val="accent1"/>
+          </a:lnRef>
+          <a:fillRef idx="3">
+            <a:schemeClr val="accent1"/>
+          </a:fillRef>
+          <a:effectRef idx="2">
+            <a:schemeClr val="accent1"/>
+          </a:effectRef>
+          <a:fontRef idx="minor">
+            <a:schemeClr val="lt1"/>
+          </a:fontRef>
+        </p:style>
+        <p:txBody>
+          <a:bodyPr rtlCol="0" anchor="ctr" lIns="0" rIns="0" tIns="0" bIns="0"/>
+          <a:lstStyle/>
+          <a:p>
+            <a:pPr algn="ctr"/>
+            <a:r>
+              <a:rPr sz="2000" b="1">
+                <a:solidFill>
+                  <a:srgbClr val="10203C"/>
+                </a:solidFill>
+                <a:latin typeface="Cambria"/>
+              </a:rPr>
+              <a:t>1</a:t>
+            </a:r>
+          </a:p>
+        </p:txBody>
+      </p:sp>
+      <p:sp>
+        <p:nvSpPr>
+          <p:cNvPr id="4" name="TextBox 3"/>
           <p:cNvSpPr txBox="1"/>
           <p:nvPr/>
         </p:nvSpPr>
         <p:spPr>
           <a:xfrm>
-            <a:off x="457200" y="1737360"/>
-            <a:ext cx="11277295" cy="2377440"/>
+            <a:off x="1234440" y="1581912"/>
+            <a:ext cx="9966960" cy="822960"/>
           </a:xfrm>
           <a:prstGeom prst="rect">
             <a:avLst/>
@@ -4652,148 +4937,901 @@
           <a:p>
             <a:pPr algn="l">
               <a:lnSpc>
-                <a:spcPct val="130000"/>
+                <a:spcPct val="120000"/>
+              </a:lnSpc>
+            </a:pPr>
+            <a:r>
+              <a:rPr sz="1550" b="1" i="0">
+                <a:solidFill>
+                  <a:srgbClr val="C1440E"/>
+                </a:solidFill>
+                <a:latin typeface="Calibri"/>
+              </a:rPr>
+              <a:t>Разрешение DEM — </a:t>
+            </a:r>
+            <a:r>
+              <a:rPr sz="1400" b="0" i="0">
+                <a:solidFill>
+                  <a:srgbClr val="E8E6DF"/>
+                </a:solidFill>
+                <a:latin typeface="Calibri"/>
+              </a:rPr>
+              <a:t>30 м/пиксель не резолвит кратеры мельче ~500 м (Kaali, 110 м — использованы только опубликованные данные)</a:t>
+            </a:r>
+          </a:p>
+        </p:txBody>
+      </p:sp>
+      <p:sp>
+        <p:nvSpPr>
+          <p:cNvPr id="5" name="Oval 4"/>
+          <p:cNvSpPr/>
+          <p:nvPr/>
+        </p:nvSpPr>
+        <p:spPr>
+          <a:xfrm>
+            <a:off x="457200" y="2624328"/>
+            <a:ext cx="502920" cy="502920"/>
+          </a:xfrm>
+          <a:prstGeom prst="ellipse">
+            <a:avLst/>
+          </a:prstGeom>
+          <a:solidFill>
+            <a:srgbClr val="E0A458"/>
+          </a:solidFill>
+          <a:ln>
+            <a:noFill/>
+          </a:ln>
+          <a:effectLst/>
+        </p:spPr>
+        <p:style>
+          <a:lnRef idx="1">
+            <a:schemeClr val="accent1"/>
+          </a:lnRef>
+          <a:fillRef idx="3">
+            <a:schemeClr val="accent1"/>
+          </a:fillRef>
+          <a:effectRef idx="2">
+            <a:schemeClr val="accent1"/>
+          </a:effectRef>
+          <a:fontRef idx="minor">
+            <a:schemeClr val="lt1"/>
+          </a:fontRef>
+        </p:style>
+        <p:txBody>
+          <a:bodyPr rtlCol="0" anchor="ctr" lIns="0" rIns="0" tIns="0" bIns="0"/>
+          <a:lstStyle/>
+          <a:p>
+            <a:pPr algn="ctr"/>
+            <a:r>
+              <a:rPr sz="2000" b="1">
+                <a:solidFill>
+                  <a:srgbClr val="10203C"/>
+                </a:solidFill>
+                <a:latin typeface="Cambria"/>
+              </a:rPr>
+              <a:t>2</a:t>
+            </a:r>
+          </a:p>
+        </p:txBody>
+      </p:sp>
+      <p:sp>
+        <p:nvSpPr>
+          <p:cNvPr id="6" name="TextBox 5"/>
+          <p:cNvSpPr txBox="1"/>
+          <p:nvPr/>
+        </p:nvSpPr>
+        <p:spPr>
+          <a:xfrm>
+            <a:off x="1234440" y="2606040"/>
+            <a:ext cx="9966960" cy="822960"/>
+          </a:xfrm>
+          <a:prstGeom prst="rect">
+            <a:avLst/>
+          </a:prstGeom>
+          <a:noFill/>
+        </p:spPr>
+        <p:txBody>
+          <a:bodyPr wrap="square" anchor="t" lIns="0" rIns="0" tIns="0" bIns="0"/>
+          <a:lstStyle/>
+          <a:p>
+            <a:pPr algn="l">
+              <a:lnSpc>
+                <a:spcPct val="120000"/>
+              </a:lnSpc>
+            </a:pPr>
+            <a:r>
+              <a:rPr sz="1550" b="1" i="0">
+                <a:solidFill>
+                  <a:srgbClr val="E0A458"/>
+                </a:solidFill>
+                <a:latin typeface="Calibri"/>
+              </a:rPr>
+              <a:t>Не заменяет полевую геологию — </a:t>
+            </a:r>
+            <a:r>
+              <a:rPr sz="1400" b="0" i="0">
+                <a:solidFill>
+                  <a:srgbClr val="E8E6DF"/>
+                </a:solidFill>
+                <a:latin typeface="Calibri"/>
+              </a:rPr>
+              <a:t>определяет морфологию и радарный/рельефный сигнал, но не шоковый метаморфизм, брекчии, состав пород</a:t>
+            </a:r>
+          </a:p>
+        </p:txBody>
+      </p:sp>
+      <p:sp>
+        <p:nvSpPr>
+          <p:cNvPr id="7" name="Oval 6"/>
+          <p:cNvSpPr/>
+          <p:nvPr/>
+        </p:nvSpPr>
+        <p:spPr>
+          <a:xfrm>
+            <a:off x="457200" y="3648456"/>
+            <a:ext cx="502920" cy="502920"/>
+          </a:xfrm>
+          <a:prstGeom prst="ellipse">
+            <a:avLst/>
+          </a:prstGeom>
+          <a:solidFill>
+            <a:srgbClr val="5B8A72"/>
+          </a:solidFill>
+          <a:ln>
+            <a:noFill/>
+          </a:ln>
+          <a:effectLst/>
+        </p:spPr>
+        <p:style>
+          <a:lnRef idx="1">
+            <a:schemeClr val="accent1"/>
+          </a:lnRef>
+          <a:fillRef idx="3">
+            <a:schemeClr val="accent1"/>
+          </a:fillRef>
+          <a:effectRef idx="2">
+            <a:schemeClr val="accent1"/>
+          </a:effectRef>
+          <a:fontRef idx="minor">
+            <a:schemeClr val="lt1"/>
+          </a:fontRef>
+        </p:style>
+        <p:txBody>
+          <a:bodyPr rtlCol="0" anchor="ctr" lIns="0" rIns="0" tIns="0" bIns="0"/>
+          <a:lstStyle/>
+          <a:p>
+            <a:pPr algn="ctr"/>
+            <a:r>
+              <a:rPr sz="2000" b="1">
+                <a:solidFill>
+                  <a:srgbClr val="10203C"/>
+                </a:solidFill>
+                <a:latin typeface="Cambria"/>
+              </a:rPr>
+              <a:t>3</a:t>
+            </a:r>
+          </a:p>
+        </p:txBody>
+      </p:sp>
+      <p:sp>
+        <p:nvSpPr>
+          <p:cNvPr id="8" name="TextBox 7"/>
+          <p:cNvSpPr txBox="1"/>
+          <p:nvPr/>
+        </p:nvSpPr>
+        <p:spPr>
+          <a:xfrm>
+            <a:off x="1234440" y="3630168"/>
+            <a:ext cx="9966960" cy="822960"/>
+          </a:xfrm>
+          <a:prstGeom prst="rect">
+            <a:avLst/>
+          </a:prstGeom>
+          <a:noFill/>
+        </p:spPr>
+        <p:txBody>
+          <a:bodyPr wrap="square" anchor="t" lIns="0" rIns="0" tIns="0" bIns="0"/>
+          <a:lstStyle/>
+          <a:p>
+            <a:pPr algn="l">
+              <a:lnSpc>
+                <a:spcPct val="120000"/>
+              </a:lnSpc>
+            </a:pPr>
+            <a:r>
+              <a:rPr sz="1550" b="1" i="0">
+                <a:solidFill>
+                  <a:srgbClr val="5B8A72"/>
+                </a:solidFill>
+                <a:latin typeface="Calibri"/>
+              </a:rPr>
+              <a:t>Точность справочника координат — </a:t>
+            </a:r>
+            <a:r>
+              <a:rPr sz="1400" b="0" i="0">
+                <a:solidFill>
+                  <a:srgbClr val="E8E6DF"/>
+                </a:solidFill>
+                <a:latin typeface="Calibri"/>
+              </a:rPr>
+              <a:t>каталожные координаты ориентировочные — нужна ручная проверка (реализовано: клик по центру на снимке)</a:t>
+            </a:r>
+          </a:p>
+        </p:txBody>
+      </p:sp>
+      <p:sp>
+        <p:nvSpPr>
+          <p:cNvPr id="9" name="Oval 8"/>
+          <p:cNvSpPr/>
+          <p:nvPr/>
+        </p:nvSpPr>
+        <p:spPr>
+          <a:xfrm>
+            <a:off x="457200" y="4672584"/>
+            <a:ext cx="502920" cy="502920"/>
+          </a:xfrm>
+          <a:prstGeom prst="ellipse">
+            <a:avLst/>
+          </a:prstGeom>
+          <a:solidFill>
+            <a:srgbClr val="E07A5F"/>
+          </a:solidFill>
+          <a:ln>
+            <a:noFill/>
+          </a:ln>
+          <a:effectLst/>
+        </p:spPr>
+        <p:style>
+          <a:lnRef idx="1">
+            <a:schemeClr val="accent1"/>
+          </a:lnRef>
+          <a:fillRef idx="3">
+            <a:schemeClr val="accent1"/>
+          </a:fillRef>
+          <a:effectRef idx="2">
+            <a:schemeClr val="accent1"/>
+          </a:effectRef>
+          <a:fontRef idx="minor">
+            <a:schemeClr val="lt1"/>
+          </a:fontRef>
+        </p:style>
+        <p:txBody>
+          <a:bodyPr rtlCol="0" anchor="ctr" lIns="0" rIns="0" tIns="0" bIns="0"/>
+          <a:lstStyle/>
+          <a:p>
+            <a:pPr algn="ctr"/>
+            <a:r>
+              <a:rPr sz="2000" b="1">
+                <a:solidFill>
+                  <a:srgbClr val="10203C"/>
+                </a:solidFill>
+                <a:latin typeface="Cambria"/>
+              </a:rPr>
+              <a:t>4</a:t>
+            </a:r>
+          </a:p>
+        </p:txBody>
+      </p:sp>
+      <p:sp>
+        <p:nvSpPr>
+          <p:cNvPr id="10" name="TextBox 9"/>
+          <p:cNvSpPr txBox="1"/>
+          <p:nvPr/>
+        </p:nvSpPr>
+        <p:spPr>
+          <a:xfrm>
+            <a:off x="1234440" y="4654296"/>
+            <a:ext cx="9966960" cy="822960"/>
+          </a:xfrm>
+          <a:prstGeom prst="rect">
+            <a:avLst/>
+          </a:prstGeom>
+          <a:noFill/>
+        </p:spPr>
+        <p:txBody>
+          <a:bodyPr wrap="square" anchor="t" lIns="0" rIns="0" tIns="0" bIns="0"/>
+          <a:lstStyle/>
+          <a:p>
+            <a:pPr algn="l">
+              <a:lnSpc>
+                <a:spcPct val="120000"/>
+              </a:lnSpc>
+            </a:pPr>
+            <a:r>
+              <a:rPr sz="1550" b="1" i="0">
+                <a:solidFill>
+                  <a:srgbClr val="E07A5F"/>
+                </a:solidFill>
+                <a:latin typeface="Calibri"/>
+              </a:rPr>
+              <a:t>Озёра и осадочные заполнения — </a:t>
+            </a:r>
+            <a:r>
+              <a:rPr sz="1400" b="0" i="0">
+                <a:solidFill>
+                  <a:srgbClr val="E8E6DF"/>
+                </a:solidFill>
+                <a:latin typeface="Calibri"/>
+              </a:rPr>
+              <a:t>искажают измеренную глубину относительно исходной формы кратера — нужна геологическая интерпретация отклонений, а не только цифра</a:t>
+            </a:r>
+          </a:p>
+        </p:txBody>
+      </p:sp>
+      <p:sp>
+        <p:nvSpPr>
+          <p:cNvPr id="11" name="TextBox 10"/>
+          <p:cNvSpPr txBox="1"/>
+          <p:nvPr/>
+        </p:nvSpPr>
+        <p:spPr>
+          <a:xfrm>
+            <a:off x="11368735" y="6492240"/>
+            <a:ext cx="457200" cy="274320"/>
+          </a:xfrm>
+          <a:prstGeom prst="rect">
+            <a:avLst/>
+          </a:prstGeom>
+          <a:noFill/>
+        </p:spPr>
+        <p:txBody>
+          <a:bodyPr wrap="square" anchor="t" lIns="0" rIns="0" tIns="0" bIns="0"/>
+          <a:lstStyle/>
+          <a:p>
+            <a:pPr algn="r">
+              <a:lnSpc>
+                <a:spcPct val="100000"/>
               </a:lnSpc>
               <a:spcAft>
                 <a:spcPts val="0"/>
               </a:spcAft>
             </a:pPr>
             <a:r>
-              <a:rPr sz="1300" b="0" i="0">
-                <a:solidFill>
-                  <a:srgbClr val="E8E6DF"/>
-                </a:solidFill>
-                <a:latin typeface="Calibri"/>
-              </a:rPr>
-              <a:t>1. Koeberl C. Remote sensing studies of impact craters: how to be sure? // Comptes Rendus Geoscience. 2004.</a:t>
-            </a:r>
-          </a:p>
+              <a:rPr sz="1000" b="0" i="0">
+                <a:solidFill>
+                  <a:srgbClr val="9B978D"/>
+                </a:solidFill>
+                <a:latin typeface="Calibri"/>
+              </a:rPr>
+              <a:t>13</a:t>
+            </a:r>
+          </a:p>
+        </p:txBody>
+      </p:sp>
+    </p:spTree>
+  </p:cSld>
+  <p:clrMapOvr>
+    <a:masterClrMapping/>
+  </p:clrMapOvr>
+</p:sld>
+</file>
+
+<file path=ppt/slides/slide14.xml><?xml version="1.0" encoding="utf-8"?>
+<p:sld xmlns:a="http://schemas.openxmlformats.org/drawingml/2006/main" xmlns:p="http://schemas.openxmlformats.org/presentationml/2006/main" xmlns:r="http://schemas.openxmlformats.org/officeDocument/2006/relationships">
+  <p:cSld>
+    <p:bg>
+      <p:bgPr>
+        <a:solidFill>
+          <a:srgbClr val="10203C"/>
+        </a:solidFill>
+        <a:effectLst/>
+      </p:bgPr>
+    </p:bg>
+    <p:spTree>
+      <p:nvGrpSpPr>
+        <p:cNvPr id="1" name=""/>
+        <p:cNvGrpSpPr/>
+        <p:nvPr/>
+      </p:nvGrpSpPr>
+      <p:grpSpPr/>
+      <p:sp>
+        <p:nvSpPr>
+          <p:cNvPr id="2" name="TextBox 1"/>
+          <p:cNvSpPr txBox="1"/>
+          <p:nvPr/>
+        </p:nvSpPr>
+        <p:spPr>
+          <a:xfrm>
+            <a:off x="457200" y="384048"/>
+            <a:ext cx="11277295" cy="640080"/>
+          </a:xfrm>
+          <a:prstGeom prst="rect">
+            <a:avLst/>
+          </a:prstGeom>
+          <a:noFill/>
+        </p:spPr>
+        <p:txBody>
+          <a:bodyPr wrap="square" anchor="t" lIns="0" rIns="0" tIns="0" bIns="0"/>
+          <a:lstStyle/>
           <a:p>
             <a:pPr algn="l">
               <a:lnSpc>
-                <a:spcPct val="130000"/>
+                <a:spcPct val="100000"/>
               </a:lnSpc>
               <a:spcAft>
                 <a:spcPts val="0"/>
               </a:spcAft>
             </a:pPr>
             <a:r>
-              <a:rPr sz="1300" b="0" i="0">
+              <a:rPr sz="2800" b="1" i="0">
                 <a:solidFill>
                   <a:srgbClr val="E8E6DF"/>
                 </a:solidFill>
-                <a:latin typeface="Calibri"/>
-              </a:rPr>
-              <a:t/>
-            </a:r>
-          </a:p>
+                <a:latin typeface="Cambria"/>
+              </a:rPr>
+              <a:t>Выводы и практическая ценность</a:t>
+            </a:r>
+          </a:p>
+        </p:txBody>
+      </p:sp>
+      <p:sp>
+        <p:nvSpPr>
+          <p:cNvPr id="3" name="Oval 2"/>
+          <p:cNvSpPr/>
+          <p:nvPr/>
+        </p:nvSpPr>
+        <p:spPr>
+          <a:xfrm>
+            <a:off x="457200" y="1600200"/>
+            <a:ext cx="457200" cy="457200"/>
+          </a:xfrm>
+          <a:prstGeom prst="ellipse">
+            <a:avLst/>
+          </a:prstGeom>
+          <a:solidFill>
+            <a:srgbClr val="C1440E"/>
+          </a:solidFill>
+          <a:ln>
+            <a:noFill/>
+          </a:ln>
+          <a:effectLst/>
+        </p:spPr>
+        <p:style>
+          <a:lnRef idx="1">
+            <a:schemeClr val="accent1"/>
+          </a:lnRef>
+          <a:fillRef idx="3">
+            <a:schemeClr val="accent1"/>
+          </a:fillRef>
+          <a:effectRef idx="2">
+            <a:schemeClr val="accent1"/>
+          </a:effectRef>
+          <a:fontRef idx="minor">
+            <a:schemeClr val="lt1"/>
+          </a:fontRef>
+        </p:style>
+        <p:txBody>
+          <a:bodyPr rtlCol="0" anchor="ctr" lIns="0" rIns="0" tIns="0" bIns="0"/>
+          <a:lstStyle/>
+          <a:p>
+            <a:pPr algn="ctr"/>
+            <a:r>
+              <a:rPr sz="2000" b="1">
+                <a:solidFill>
+                  <a:srgbClr val="10203C"/>
+                </a:solidFill>
+                <a:latin typeface="Cambria"/>
+              </a:rPr>
+              <a:t>1</a:t>
+            </a:r>
+          </a:p>
+        </p:txBody>
+      </p:sp>
+      <p:sp>
+        <p:nvSpPr>
+          <p:cNvPr id="4" name="TextBox 3"/>
+          <p:cNvSpPr txBox="1"/>
+          <p:nvPr/>
+        </p:nvSpPr>
+        <p:spPr>
+          <a:xfrm>
+            <a:off x="1188720" y="1572768"/>
+            <a:ext cx="10058400" cy="777240"/>
+          </a:xfrm>
+          <a:prstGeom prst="rect">
+            <a:avLst/>
+          </a:prstGeom>
+          <a:noFill/>
+        </p:spPr>
+        <p:txBody>
+          <a:bodyPr wrap="square" anchor="t" lIns="0" rIns="0" tIns="0" bIns="0"/>
+          <a:lstStyle/>
           <a:p>
             <a:pPr algn="l">
               <a:lnSpc>
-                <a:spcPct val="130000"/>
+                <a:spcPct val="120000"/>
               </a:lnSpc>
               <a:spcAft>
                 <a:spcPts val="0"/>
               </a:spcAft>
             </a:pPr>
             <a:r>
-              <a:rPr sz="1300" b="0" i="0">
+              <a:rPr sz="1400" b="0" i="0">
                 <a:solidFill>
                   <a:srgbClr val="E8E6DF"/>
                 </a:solidFill>
                 <a:latin typeface="Calibri"/>
               </a:rPr>
-              <a:t>2. Gottwald M., et al. Remote sensing of terrestrial impact craters: The TanDEM-X digital elevation model // Meteoritics &amp; Planetary Science. 2017.</a:t>
-            </a:r>
-          </a:p>
+              <a:t>Единый воспроизводимый скрипт применён без изменений к трём кратерам разного возраста и типа мишени (осадочные породы, базальт, песчаник)</a:t>
+            </a:r>
+          </a:p>
+        </p:txBody>
+      </p:sp>
+      <p:sp>
+        <p:nvSpPr>
+          <p:cNvPr id="5" name="Oval 4"/>
+          <p:cNvSpPr/>
+          <p:nvPr/>
+        </p:nvSpPr>
+        <p:spPr>
+          <a:xfrm>
+            <a:off x="457200" y="2532888"/>
+            <a:ext cx="457200" cy="457200"/>
+          </a:xfrm>
+          <a:prstGeom prst="ellipse">
+            <a:avLst/>
+          </a:prstGeom>
+          <a:solidFill>
+            <a:srgbClr val="E0A458"/>
+          </a:solidFill>
+          <a:ln>
+            <a:noFill/>
+          </a:ln>
+          <a:effectLst/>
+        </p:spPr>
+        <p:style>
+          <a:lnRef idx="1">
+            <a:schemeClr val="accent1"/>
+          </a:lnRef>
+          <a:fillRef idx="3">
+            <a:schemeClr val="accent1"/>
+          </a:fillRef>
+          <a:effectRef idx="2">
+            <a:schemeClr val="accent1"/>
+          </a:effectRef>
+          <a:fontRef idx="minor">
+            <a:schemeClr val="lt1"/>
+          </a:fontRef>
+        </p:style>
+        <p:txBody>
+          <a:bodyPr rtlCol="0" anchor="ctr" lIns="0" rIns="0" tIns="0" bIns="0"/>
+          <a:lstStyle/>
+          <a:p>
+            <a:pPr algn="ctr"/>
+            <a:r>
+              <a:rPr sz="2000" b="1">
+                <a:solidFill>
+                  <a:srgbClr val="10203C"/>
+                </a:solidFill>
+                <a:latin typeface="Cambria"/>
+              </a:rPr>
+              <a:t>2</a:t>
+            </a:r>
+          </a:p>
+        </p:txBody>
+      </p:sp>
+      <p:sp>
+        <p:nvSpPr>
+          <p:cNvPr id="6" name="TextBox 5"/>
+          <p:cNvSpPr txBox="1"/>
+          <p:nvPr/>
+        </p:nvSpPr>
+        <p:spPr>
+          <a:xfrm>
+            <a:off x="1188720" y="2505456"/>
+            <a:ext cx="10058400" cy="777240"/>
+          </a:xfrm>
+          <a:prstGeom prst="rect">
+            <a:avLst/>
+          </a:prstGeom>
+          <a:noFill/>
+        </p:spPr>
+        <p:txBody>
+          <a:bodyPr wrap="square" anchor="t" lIns="0" rIns="0" tIns="0" bIns="0"/>
+          <a:lstStyle/>
           <a:p>
             <a:pPr algn="l">
               <a:lnSpc>
-                <a:spcPct val="130000"/>
+                <a:spcPct val="120000"/>
               </a:lnSpc>
               <a:spcAft>
                 <a:spcPts val="0"/>
               </a:spcAft>
             </a:pPr>
             <a:r>
-              <a:rPr sz="1300" b="0" i="0">
+              <a:rPr sz="1400" b="0" i="0">
                 <a:solidFill>
                   <a:srgbClr val="E8E6DF"/>
                 </a:solidFill>
                 <a:latin typeface="Calibri"/>
               </a:rPr>
-              <a:t/>
-            </a:r>
-          </a:p>
+              <a:t>Метод валидирован на Барринджере (расхождение с публикацией &lt; 5%); интерпретируемые расхождения на Lonar и Wolfe Creek объясняются геологией (озеро, занесение осадком)</a:t>
+            </a:r>
+          </a:p>
+        </p:txBody>
+      </p:sp>
+      <p:sp>
+        <p:nvSpPr>
+          <p:cNvPr id="7" name="Oval 6"/>
+          <p:cNvSpPr/>
+          <p:nvPr/>
+        </p:nvSpPr>
+        <p:spPr>
+          <a:xfrm>
+            <a:off x="457200" y="3465576"/>
+            <a:ext cx="457200" cy="457200"/>
+          </a:xfrm>
+          <a:prstGeom prst="ellipse">
+            <a:avLst/>
+          </a:prstGeom>
+          <a:solidFill>
+            <a:srgbClr val="C1440E"/>
+          </a:solidFill>
+          <a:ln>
+            <a:noFill/>
+          </a:ln>
+          <a:effectLst/>
+        </p:spPr>
+        <p:style>
+          <a:lnRef idx="1">
+            <a:schemeClr val="accent1"/>
+          </a:lnRef>
+          <a:fillRef idx="3">
+            <a:schemeClr val="accent1"/>
+          </a:fillRef>
+          <a:effectRef idx="2">
+            <a:schemeClr val="accent1"/>
+          </a:effectRef>
+          <a:fontRef idx="minor">
+            <a:schemeClr val="lt1"/>
+          </a:fontRef>
+        </p:style>
+        <p:txBody>
+          <a:bodyPr rtlCol="0" anchor="ctr" lIns="0" rIns="0" tIns="0" bIns="0"/>
+          <a:lstStyle/>
+          <a:p>
+            <a:pPr algn="ctr"/>
+            <a:r>
+              <a:rPr sz="2000" b="1">
+                <a:solidFill>
+                  <a:srgbClr val="10203C"/>
+                </a:solidFill>
+                <a:latin typeface="Cambria"/>
+              </a:rPr>
+              <a:t>3</a:t>
+            </a:r>
+          </a:p>
+        </p:txBody>
+      </p:sp>
+      <p:sp>
+        <p:nvSpPr>
+          <p:cNvPr id="8" name="TextBox 7"/>
+          <p:cNvSpPr txBox="1"/>
+          <p:nvPr/>
+        </p:nvSpPr>
+        <p:spPr>
+          <a:xfrm>
+            <a:off x="1188720" y="3438144"/>
+            <a:ext cx="10058400" cy="777240"/>
+          </a:xfrm>
+          <a:prstGeom prst="rect">
+            <a:avLst/>
+          </a:prstGeom>
+          <a:noFill/>
+        </p:spPr>
+        <p:txBody>
+          <a:bodyPr wrap="square" anchor="t" lIns="0" rIns="0" tIns="0" bIns="0"/>
+          <a:lstStyle/>
           <a:p>
             <a:pPr algn="l">
               <a:lnSpc>
-                <a:spcPct val="130000"/>
+                <a:spcPct val="120000"/>
               </a:lnSpc>
               <a:spcAft>
                 <a:spcPts val="0"/>
               </a:spcAft>
             </a:pPr>
             <a:r>
-              <a:rPr sz="1300" b="0" i="0">
+              <a:rPr sz="1400" b="0" i="0">
                 <a:solidFill>
                   <a:srgbClr val="E8E6DF"/>
                 </a:solidFill>
                 <a:latin typeface="Calibri"/>
               </a:rPr>
-              <a:t>3. Kring D. A. Guidebook to the Geology of Barringer Meteorite Crater, Arizona. 2nd ed. Houston: Lunar and Planetary Institute, 2017.</a:t>
-            </a:r>
-          </a:p>
+              <a:t>Радар (Sentinel-1) количественно подтверждает морфологический сигнал вала независимо от освещения, облачности и типа породы</a:t>
+            </a:r>
+          </a:p>
+        </p:txBody>
+      </p:sp>
+      <p:sp>
+        <p:nvSpPr>
+          <p:cNvPr id="9" name="Oval 8"/>
+          <p:cNvSpPr/>
+          <p:nvPr/>
+        </p:nvSpPr>
+        <p:spPr>
+          <a:xfrm>
+            <a:off x="457200" y="4398264"/>
+            <a:ext cx="457200" cy="457200"/>
+          </a:xfrm>
+          <a:prstGeom prst="ellipse">
+            <a:avLst/>
+          </a:prstGeom>
+          <a:solidFill>
+            <a:srgbClr val="E0A458"/>
+          </a:solidFill>
+          <a:ln>
+            <a:noFill/>
+          </a:ln>
+          <a:effectLst/>
+        </p:spPr>
+        <p:style>
+          <a:lnRef idx="1">
+            <a:schemeClr val="accent1"/>
+          </a:lnRef>
+          <a:fillRef idx="3">
+            <a:schemeClr val="accent1"/>
+          </a:fillRef>
+          <a:effectRef idx="2">
+            <a:schemeClr val="accent1"/>
+          </a:effectRef>
+          <a:fontRef idx="minor">
+            <a:schemeClr val="lt1"/>
+          </a:fontRef>
+        </p:style>
+        <p:txBody>
+          <a:bodyPr rtlCol="0" anchor="ctr" lIns="0" rIns="0" tIns="0" bIns="0"/>
+          <a:lstStyle/>
+          <a:p>
+            <a:pPr algn="ctr"/>
+            <a:r>
+              <a:rPr sz="2000" b="1">
+                <a:solidFill>
+                  <a:srgbClr val="10203C"/>
+                </a:solidFill>
+                <a:latin typeface="Cambria"/>
+              </a:rPr>
+              <a:t>4</a:t>
+            </a:r>
+          </a:p>
+        </p:txBody>
+      </p:sp>
+      <p:sp>
+        <p:nvSpPr>
+          <p:cNvPr id="10" name="TextBox 9"/>
+          <p:cNvSpPr txBox="1"/>
+          <p:nvPr/>
+        </p:nvSpPr>
+        <p:spPr>
+          <a:xfrm>
+            <a:off x="1188720" y="4370832"/>
+            <a:ext cx="10058400" cy="777240"/>
+          </a:xfrm>
+          <a:prstGeom prst="rect">
+            <a:avLst/>
+          </a:prstGeom>
+          <a:noFill/>
+        </p:spPr>
+        <p:txBody>
+          <a:bodyPr wrap="square" anchor="t" lIns="0" rIns="0" tIns="0" bIns="0"/>
+          <a:lstStyle/>
           <a:p>
             <a:pPr algn="l">
               <a:lnSpc>
-                <a:spcPct val="130000"/>
+                <a:spcPct val="120000"/>
               </a:lnSpc>
               <a:spcAft>
                 <a:spcPts val="0"/>
               </a:spcAft>
             </a:pPr>
             <a:r>
-              <a:rPr sz="1300" b="0" i="0">
+              <a:rPr sz="1400" b="0" i="0">
                 <a:solidFill>
                   <a:srgbClr val="E8E6DF"/>
                 </a:solidFill>
                 <a:latin typeface="Calibri"/>
               </a:rPr>
-              <a:t/>
-            </a:r>
-          </a:p>
+              <a:t>ДЗЗ — инструмент обнаружения, картографирования и дистанционной проверки согласованности признаков, но не замена полевой и лабораторной верификации</a:t>
+            </a:r>
+          </a:p>
+        </p:txBody>
+      </p:sp>
+      <p:sp>
+        <p:nvSpPr>
+          <p:cNvPr id="11" name="Rounded Rectangle 10"/>
+          <p:cNvSpPr/>
+          <p:nvPr/>
+        </p:nvSpPr>
+        <p:spPr>
+          <a:xfrm>
+            <a:off x="457200" y="5440680"/>
+            <a:ext cx="11277295" cy="1005840"/>
+          </a:xfrm>
+          <a:prstGeom prst="roundRect">
+            <a:avLst>
+              <a:gd name="adj" fmla="val 4000"/>
+            </a:avLst>
+          </a:prstGeom>
+          <a:solidFill>
+            <a:srgbClr val="1C2E4A"/>
+          </a:solidFill>
+          <a:ln>
+            <a:noFill/>
+          </a:ln>
+          <a:effectLst/>
+        </p:spPr>
+        <p:style>
+          <a:lnRef idx="1">
+            <a:schemeClr val="accent1"/>
+          </a:lnRef>
+          <a:fillRef idx="3">
+            <a:schemeClr val="accent1"/>
+          </a:fillRef>
+          <a:effectRef idx="2">
+            <a:schemeClr val="accent1"/>
+          </a:effectRef>
+          <a:fontRef idx="minor">
+            <a:schemeClr val="lt1"/>
+          </a:fontRef>
+        </p:style>
+        <p:txBody>
+          <a:bodyPr rtlCol="0" anchor="ctr"/>
+          <a:lstStyle/>
+          <a:p>
+            <a:pPr algn="ctr"/>
+          </a:p>
+        </p:txBody>
+      </p:sp>
+      <p:sp>
+        <p:nvSpPr>
+          <p:cNvPr id="12" name="TextBox 11"/>
+          <p:cNvSpPr txBox="1"/>
+          <p:nvPr/>
+        </p:nvSpPr>
+        <p:spPr>
+          <a:xfrm>
+            <a:off x="777240" y="5577840"/>
+            <a:ext cx="10637215" cy="777240"/>
+          </a:xfrm>
+          <a:prstGeom prst="rect">
+            <a:avLst/>
+          </a:prstGeom>
+          <a:noFill/>
+        </p:spPr>
+        <p:txBody>
+          <a:bodyPr wrap="square" anchor="ctr" lIns="0" rIns="0" tIns="0" bIns="0"/>
+          <a:lstStyle/>
           <a:p>
             <a:pPr algn="l">
               <a:lnSpc>
-                <a:spcPct val="130000"/>
+                <a:spcPct val="120000"/>
               </a:lnSpc>
               <a:spcAft>
                 <a:spcPts val="0"/>
               </a:spcAft>
             </a:pPr>
             <a:r>
-              <a:rPr sz="1300" b="0" i="0">
-                <a:solidFill>
-                  <a:srgbClr val="E8E6DF"/>
-                </a:solidFill>
-                <a:latin typeface="Calibri"/>
-              </a:rPr>
-              <a:t>4. Creation of High Resolution Terrain Models of Barringer Meteorite Crater (Meteor Crater) Using Photogrammetry and Terrestrial Laser Scanning Methods. NASA NTRS, 2009.</a:t>
-            </a:r>
-          </a:p>
-        </p:txBody>
-      </p:sp>
-      <p:sp>
-        <p:nvSpPr>
-          <p:cNvPr id="4" name="TextBox 3"/>
+              <a:rPr sz="1250" b="0" i="1">
+                <a:solidFill>
+                  <a:srgbClr val="E0A458"/>
+                </a:solidFill>
+                <a:latin typeface="Calibri"/>
+              </a:rPr>
+              <a:t>Дальше: добавить кратеры с неопределённым происхождением, расширить географию, автоматизировать первичное детектирование кандидатов.</a:t>
+            </a:r>
+          </a:p>
+        </p:txBody>
+      </p:sp>
+      <p:sp>
+        <p:nvSpPr>
+          <p:cNvPr id="13" name="TextBox 12"/>
           <p:cNvSpPr txBox="1"/>
           <p:nvPr/>
         </p:nvSpPr>
         <p:spPr>
           <a:xfrm>
-            <a:off x="457200" y="5029200"/>
-            <a:ext cx="11277295" cy="457200"/>
+            <a:off x="11368735" y="6492240"/>
+            <a:ext cx="457200" cy="274320"/>
           </a:xfrm>
           <a:prstGeom prst="rect">
             <a:avLst/>
@@ -4804,35 +5842,61 @@
           <a:bodyPr wrap="square" anchor="t" lIns="0" rIns="0" tIns="0" bIns="0"/>
           <a:lstStyle/>
           <a:p>
-            <a:pPr algn="l">
-              <a:lnSpc>
-                <a:spcPct val="125000"/>
+            <a:pPr algn="r">
+              <a:lnSpc>
+                <a:spcPct val="100000"/>
               </a:lnSpc>
               <a:spcAft>
                 <a:spcPts val="0"/>
               </a:spcAft>
             </a:pPr>
             <a:r>
-              <a:rPr sz="1050" b="0" i="1">
+              <a:rPr sz="1000" b="0" i="0">
                 <a:solidFill>
                   <a:srgbClr val="9B978D"/>
                 </a:solidFill>
                 <a:latin typeface="Calibri"/>
               </a:rPr>
-              <a:t>Ключевые слова: дистанционное зондирование Земли, импактные структуры, ударные кратеры, кратер Бэрринджера, Sentinel-1, Sentinel-2, цифровая модель рельефа, радиолокационные данные.</a:t>
-            </a:r>
-          </a:p>
-        </p:txBody>
-      </p:sp>
-      <p:sp>
-        <p:nvSpPr>
-          <p:cNvPr id="5" name="TextBox 4"/>
+              <a:t>14</a:t>
+            </a:r>
+          </a:p>
+        </p:txBody>
+      </p:sp>
+    </p:spTree>
+  </p:cSld>
+  <p:clrMapOvr>
+    <a:masterClrMapping/>
+  </p:clrMapOvr>
+</p:sld>
+</file>
+
+<file path=ppt/slides/slide15.xml><?xml version="1.0" encoding="utf-8"?>
+<p:sld xmlns:a="http://schemas.openxmlformats.org/drawingml/2006/main" xmlns:p="http://schemas.openxmlformats.org/presentationml/2006/main" xmlns:r="http://schemas.openxmlformats.org/officeDocument/2006/relationships">
+  <p:cSld>
+    <p:bg>
+      <p:bgPr>
+        <a:solidFill>
+          <a:srgbClr val="10203C"/>
+        </a:solidFill>
+        <a:effectLst/>
+      </p:bgPr>
+    </p:bg>
+    <p:spTree>
+      <p:nvGrpSpPr>
+        <p:cNvPr id="1" name=""/>
+        <p:cNvGrpSpPr/>
+        <p:nvPr/>
+      </p:nvGrpSpPr>
+      <p:grpSpPr/>
+      <p:sp>
+        <p:nvSpPr>
+          <p:cNvPr id="2" name="TextBox 1"/>
           <p:cNvSpPr txBox="1"/>
           <p:nvPr/>
         </p:nvSpPr>
         <p:spPr>
           <a:xfrm>
-            <a:off x="457200" y="5943600"/>
+            <a:off x="457200" y="384048"/>
             <a:ext cx="11277295" cy="640080"/>
           </a:xfrm>
           <a:prstGeom prst="rect">
@@ -4844,7 +5908,7 @@
           <a:bodyPr wrap="square" anchor="t" lIns="0" rIns="0" tIns="0" bIns="0"/>
           <a:lstStyle/>
           <a:p>
-            <a:pPr algn="ctr">
+            <a:pPr algn="l">
               <a:lnSpc>
                 <a:spcPct val="100000"/>
               </a:lnSpc>
@@ -4853,27 +5917,27 @@
               </a:spcAft>
             </a:pPr>
             <a:r>
-              <a:rPr sz="2200" b="1" i="0">
-                <a:solidFill>
-                  <a:srgbClr val="C1440E"/>
+              <a:rPr sz="2800" b="1" i="0">
+                <a:solidFill>
+                  <a:srgbClr val="E8E6DF"/>
                 </a:solidFill>
                 <a:latin typeface="Cambria"/>
               </a:rPr>
-              <a:t>Спасибо за внимание</a:t>
-            </a:r>
-          </a:p>
-        </p:txBody>
-      </p:sp>
-      <p:sp>
-        <p:nvSpPr>
-          <p:cNvPr id="6" name="TextBox 5"/>
+              <a:t>Литература</a:t>
+            </a:r>
+          </a:p>
+        </p:txBody>
+      </p:sp>
+      <p:sp>
+        <p:nvSpPr>
+          <p:cNvPr id="3" name="TextBox 2"/>
           <p:cNvSpPr txBox="1"/>
           <p:nvPr/>
         </p:nvSpPr>
         <p:spPr>
           <a:xfrm>
-            <a:off x="11368735" y="6492240"/>
-            <a:ext cx="457200" cy="274320"/>
+            <a:off x="457200" y="1600200"/>
+            <a:ext cx="5455767" cy="2743200"/>
           </a:xfrm>
           <a:prstGeom prst="rect">
             <a:avLst/>
@@ -4884,22 +5948,334 @@
           <a:bodyPr wrap="square" anchor="t" lIns="0" rIns="0" tIns="0" bIns="0"/>
           <a:lstStyle/>
           <a:p>
-            <a:pPr algn="r">
-              <a:lnSpc>
-                <a:spcPct val="100000"/>
+            <a:pPr algn="l">
+              <a:lnSpc>
+                <a:spcPct val="128000"/>
               </a:lnSpc>
               <a:spcAft>
                 <a:spcPts val="0"/>
               </a:spcAft>
             </a:pPr>
             <a:r>
+              <a:rPr sz="1200" b="0" i="0">
+                <a:solidFill>
+                  <a:srgbClr val="E8E6DF"/>
+                </a:solidFill>
+                <a:latin typeface="Calibri"/>
+              </a:rPr>
+              <a:t>1. Koeberl C. Remote sensing studies of impact craters: how to be sure? // Comptes Rendus Geoscience. 2004.</a:t>
+            </a:r>
+          </a:p>
+          <a:p>
+            <a:pPr algn="l">
+              <a:lnSpc>
+                <a:spcPct val="128000"/>
+              </a:lnSpc>
+              <a:spcAft>
+                <a:spcPts val="0"/>
+              </a:spcAft>
+            </a:pPr>
+            <a:r>
+              <a:rPr sz="1200" b="0" i="0">
+                <a:solidFill>
+                  <a:srgbClr val="E8E6DF"/>
+                </a:solidFill>
+                <a:latin typeface="Calibri"/>
+              </a:rPr>
+              <a:t/>
+            </a:r>
+          </a:p>
+          <a:p>
+            <a:pPr algn="l">
+              <a:lnSpc>
+                <a:spcPct val="128000"/>
+              </a:lnSpc>
+              <a:spcAft>
+                <a:spcPts val="0"/>
+              </a:spcAft>
+            </a:pPr>
+            <a:r>
+              <a:rPr sz="1200" b="0" i="0">
+                <a:solidFill>
+                  <a:srgbClr val="E8E6DF"/>
+                </a:solidFill>
+                <a:latin typeface="Calibri"/>
+              </a:rPr>
+              <a:t>2. Gottwald M., et al. Remote sensing of terrestrial impact craters: The TanDEM-X digital elevation model // Meteoritics &amp; Planetary Science. 2017.</a:t>
+            </a:r>
+          </a:p>
+          <a:p>
+            <a:pPr algn="l">
+              <a:lnSpc>
+                <a:spcPct val="128000"/>
+              </a:lnSpc>
+              <a:spcAft>
+                <a:spcPts val="0"/>
+              </a:spcAft>
+            </a:pPr>
+            <a:r>
+              <a:rPr sz="1200" b="0" i="0">
+                <a:solidFill>
+                  <a:srgbClr val="E8E6DF"/>
+                </a:solidFill>
+                <a:latin typeface="Calibri"/>
+              </a:rPr>
+              <a:t/>
+            </a:r>
+          </a:p>
+          <a:p>
+            <a:pPr algn="l">
+              <a:lnSpc>
+                <a:spcPct val="128000"/>
+              </a:lnSpc>
+              <a:spcAft>
+                <a:spcPts val="0"/>
+              </a:spcAft>
+            </a:pPr>
+            <a:r>
+              <a:rPr sz="1200" b="0" i="0">
+                <a:solidFill>
+                  <a:srgbClr val="E8E6DF"/>
+                </a:solidFill>
+                <a:latin typeface="Calibri"/>
+              </a:rPr>
+              <a:t>3. Kring D. A. Guidebook to the Geology of Barringer Meteorite Crater, Arizona. 2nd ed. Houston: Lunar and Planetary Institute, 2017.</a:t>
+            </a:r>
+          </a:p>
+        </p:txBody>
+      </p:sp>
+      <p:sp>
+        <p:nvSpPr>
+          <p:cNvPr id="4" name="TextBox 3"/>
+          <p:cNvSpPr txBox="1"/>
+          <p:nvPr/>
+        </p:nvSpPr>
+        <p:spPr>
+          <a:xfrm>
+            <a:off x="6278727" y="1600200"/>
+            <a:ext cx="5455767" cy="2743200"/>
+          </a:xfrm>
+          <a:prstGeom prst="rect">
+            <a:avLst/>
+          </a:prstGeom>
+          <a:noFill/>
+        </p:spPr>
+        <p:txBody>
+          <a:bodyPr wrap="square" anchor="t" lIns="0" rIns="0" tIns="0" bIns="0"/>
+          <a:lstStyle/>
+          <a:p>
+            <a:pPr algn="l">
+              <a:lnSpc>
+                <a:spcPct val="128000"/>
+              </a:lnSpc>
+              <a:spcAft>
+                <a:spcPts val="0"/>
+              </a:spcAft>
+            </a:pPr>
+            <a:r>
+              <a:rPr sz="1200" b="0" i="0">
+                <a:solidFill>
+                  <a:srgbClr val="E8E6DF"/>
+                </a:solidFill>
+                <a:latin typeface="Calibri"/>
+              </a:rPr>
+              <a:t>4. Creation of High Resolution Terrain Models of Barringer Meteorite Crater (Meteor Crater) Using Photogrammetry and Terrestrial Laser Scanning Methods. NASA NTRS, 2009.</a:t>
+            </a:r>
+          </a:p>
+          <a:p>
+            <a:pPr algn="l">
+              <a:lnSpc>
+                <a:spcPct val="128000"/>
+              </a:lnSpc>
+              <a:spcAft>
+                <a:spcPts val="0"/>
+              </a:spcAft>
+            </a:pPr>
+            <a:r>
+              <a:rPr sz="1200" b="0" i="0">
+                <a:solidFill>
+                  <a:srgbClr val="E8E6DF"/>
+                </a:solidFill>
+                <a:latin typeface="Calibri"/>
+              </a:rPr>
+              <a:t/>
+            </a:r>
+          </a:p>
+          <a:p>
+            <a:pPr algn="l">
+              <a:lnSpc>
+                <a:spcPct val="128000"/>
+              </a:lnSpc>
+              <a:spcAft>
+                <a:spcPts val="0"/>
+              </a:spcAft>
+            </a:pPr>
+            <a:r>
+              <a:rPr sz="1200" b="0" i="0">
+                <a:solidFill>
+                  <a:srgbClr val="E8E6DF"/>
+                </a:solidFill>
+                <a:latin typeface="Calibri"/>
+              </a:rPr>
+              <a:t>5. McHone J. F., et al. Space shuttle observations of terrestrial impact structures using SIR-C and X-SAR radars // Meteoritics &amp; Planetary Science. 2002.</a:t>
+            </a:r>
+          </a:p>
+          <a:p>
+            <a:pPr algn="l">
+              <a:lnSpc>
+                <a:spcPct val="128000"/>
+              </a:lnSpc>
+              <a:spcAft>
+                <a:spcPts val="0"/>
+              </a:spcAft>
+            </a:pPr>
+            <a:r>
+              <a:rPr sz="1200" b="0" i="0">
+                <a:solidFill>
+                  <a:srgbClr val="E8E6DF"/>
+                </a:solidFill>
+                <a:latin typeface="Calibri"/>
+              </a:rPr>
+              <a:t/>
+            </a:r>
+          </a:p>
+          <a:p>
+            <a:pPr algn="l">
+              <a:lnSpc>
+                <a:spcPct val="128000"/>
+              </a:lnSpc>
+              <a:spcAft>
+                <a:spcPts val="0"/>
+              </a:spcAft>
+            </a:pPr>
+            <a:r>
+              <a:rPr sz="1200" b="0" i="0">
+                <a:solidFill>
+                  <a:srgbClr val="E8E6DF"/>
+                </a:solidFill>
+                <a:latin typeface="Calibri"/>
+              </a:rPr>
+              <a:t>6. van Gasselt S., et al. The Oasis impact structure, Libya: geological characteristics from ALOS PALSAR-2 data interpretation // Earth, Planets and Space. 2017.</a:t>
+            </a:r>
+          </a:p>
+        </p:txBody>
+      </p:sp>
+      <p:sp>
+        <p:nvSpPr>
+          <p:cNvPr id="5" name="TextBox 4"/>
+          <p:cNvSpPr txBox="1"/>
+          <p:nvPr/>
+        </p:nvSpPr>
+        <p:spPr>
+          <a:xfrm>
+            <a:off x="457200" y="5029200"/>
+            <a:ext cx="11277295" cy="457200"/>
+          </a:xfrm>
+          <a:prstGeom prst="rect">
+            <a:avLst/>
+          </a:prstGeom>
+          <a:noFill/>
+        </p:spPr>
+        <p:txBody>
+          <a:bodyPr wrap="square" anchor="t" lIns="0" rIns="0" tIns="0" bIns="0"/>
+          <a:lstStyle/>
+          <a:p>
+            <a:pPr algn="l">
+              <a:lnSpc>
+                <a:spcPct val="125000"/>
+              </a:lnSpc>
+              <a:spcAft>
+                <a:spcPts val="0"/>
+              </a:spcAft>
+            </a:pPr>
+            <a:r>
+              <a:rPr sz="1050" b="0" i="1">
+                <a:solidFill>
+                  <a:srgbClr val="9B978D"/>
+                </a:solidFill>
+                <a:latin typeface="Calibri"/>
+              </a:rPr>
+              <a:t>Ключевые слова: дистанционное зондирование Земли, импактные структуры, ударные кратеры, кратер Бэрринджера, Sentinel-1, Sentinel-2, цифровая модель рельефа, радиолокационные данные.</a:t>
+            </a:r>
+          </a:p>
+        </p:txBody>
+      </p:sp>
+      <p:sp>
+        <p:nvSpPr>
+          <p:cNvPr id="6" name="TextBox 5"/>
+          <p:cNvSpPr txBox="1"/>
+          <p:nvPr/>
+        </p:nvSpPr>
+        <p:spPr>
+          <a:xfrm>
+            <a:off x="457200" y="5943600"/>
+            <a:ext cx="11277295" cy="640080"/>
+          </a:xfrm>
+          <a:prstGeom prst="rect">
+            <a:avLst/>
+          </a:prstGeom>
+          <a:noFill/>
+        </p:spPr>
+        <p:txBody>
+          <a:bodyPr wrap="square" anchor="t" lIns="0" rIns="0" tIns="0" bIns="0"/>
+          <a:lstStyle/>
+          <a:p>
+            <a:pPr algn="ctr">
+              <a:lnSpc>
+                <a:spcPct val="100000"/>
+              </a:lnSpc>
+              <a:spcAft>
+                <a:spcPts val="0"/>
+              </a:spcAft>
+            </a:pPr>
+            <a:r>
+              <a:rPr sz="2200" b="1" i="0">
+                <a:solidFill>
+                  <a:srgbClr val="C1440E"/>
+                </a:solidFill>
+                <a:latin typeface="Cambria"/>
+              </a:rPr>
+              <a:t>Спасибо за внимание</a:t>
+            </a:r>
+          </a:p>
+        </p:txBody>
+      </p:sp>
+      <p:sp>
+        <p:nvSpPr>
+          <p:cNvPr id="7" name="TextBox 6"/>
+          <p:cNvSpPr txBox="1"/>
+          <p:nvPr/>
+        </p:nvSpPr>
+        <p:spPr>
+          <a:xfrm>
+            <a:off x="11368735" y="6492240"/>
+            <a:ext cx="457200" cy="274320"/>
+          </a:xfrm>
+          <a:prstGeom prst="rect">
+            <a:avLst/>
+          </a:prstGeom>
+          <a:noFill/>
+        </p:spPr>
+        <p:txBody>
+          <a:bodyPr wrap="square" anchor="t" lIns="0" rIns="0" tIns="0" bIns="0"/>
+          <a:lstStyle/>
+          <a:p>
+            <a:pPr algn="r">
+              <a:lnSpc>
+                <a:spcPct val="100000"/>
+              </a:lnSpc>
+              <a:spcAft>
+                <a:spcPts val="0"/>
+              </a:spcAft>
+            </a:pPr>
+            <a:r>
               <a:rPr sz="1000" b="0" i="0">
                 <a:solidFill>
                   <a:srgbClr val="9B978D"/>
                 </a:solidFill>
                 <a:latin typeface="Calibri"/>
               </a:rPr>
-              <a:t>13</a:t>
+              <a:t>15</a:t>
             </a:r>
           </a:p>
         </p:txBody>
@@ -4918,7 +6294,7 @@
     <p:bg>
       <p:bgPr>
         <a:solidFill>
-          <a:srgbClr val="0B0D13"/>
+          <a:srgbClr val="10203C"/>
         </a:solidFill>
         <a:effectLst/>
       </p:bgPr>
@@ -5014,7 +6390,7 @@
             <a:r>
               <a:rPr sz="2000" b="1">
                 <a:solidFill>
-                  <a:srgbClr val="0B0D13"/>
+                  <a:srgbClr val="10203C"/>
                 </a:solidFill>
                 <a:latin typeface="Cambria"/>
               </a:rPr>
@@ -5107,7 +6483,7 @@
             <a:r>
               <a:rPr sz="2000" b="1">
                 <a:solidFill>
-                  <a:srgbClr val="0B0D13"/>
+                  <a:srgbClr val="10203C"/>
                 </a:solidFill>
                 <a:latin typeface="Cambria"/>
               </a:rPr>
@@ -5200,7 +6576,7 @@
             <a:r>
               <a:rPr sz="2000" b="1">
                 <a:solidFill>
-                  <a:srgbClr val="0B0D13"/>
+                  <a:srgbClr val="10203C"/>
                 </a:solidFill>
                 <a:latin typeface="Cambria"/>
               </a:rPr>
@@ -5293,7 +6669,7 @@
             <a:r>
               <a:rPr sz="2000" b="1">
                 <a:solidFill>
-                  <a:srgbClr val="0B0D13"/>
+                  <a:srgbClr val="10203C"/>
                 </a:solidFill>
                 <a:latin typeface="Cambria"/>
               </a:rPr>
@@ -5359,7 +6735,7 @@
             </a:avLst>
           </a:prstGeom>
           <a:solidFill>
-            <a:srgbClr val="15181F"/>
+            <a:srgbClr val="1C2E4A"/>
           </a:solidFill>
           <a:ln>
             <a:noFill/>
@@ -5482,7 +6858,7 @@
     <p:bg>
       <p:bgPr>
         <a:solidFill>
-          <a:srgbClr val="0B0D13"/>
+          <a:srgbClr val="10203C"/>
         </a:solidFill>
         <a:effectLst/>
       </p:bgPr>
@@ -5551,7 +6927,7 @@
             </a:avLst>
           </a:prstGeom>
           <a:solidFill>
-            <a:srgbClr val="15181F"/>
+            <a:srgbClr val="1C2E4A"/>
           </a:solidFill>
           <a:ln>
             <a:noFill/>
@@ -5624,7 +7000,7 @@
             <a:r>
               <a:rPr sz="2000" b="1">
                 <a:solidFill>
-                  <a:srgbClr val="0B0D13"/>
+                  <a:srgbClr val="10203C"/>
                 </a:solidFill>
                 <a:latin typeface="Cambria"/>
               </a:rPr>
@@ -5836,7 +7212,7 @@
             </a:avLst>
           </a:prstGeom>
           <a:solidFill>
-            <a:srgbClr val="15181F"/>
+            <a:srgbClr val="1C2E4A"/>
           </a:solidFill>
           <a:ln>
             <a:noFill/>
@@ -5909,7 +7285,7 @@
             <a:r>
               <a:rPr sz="2000" b="1">
                 <a:solidFill>
-                  <a:srgbClr val="0B0D13"/>
+                  <a:srgbClr val="10203C"/>
                 </a:solidFill>
                 <a:latin typeface="Cambria"/>
               </a:rPr>
@@ -6198,7 +7574,7 @@
     <p:bg>
       <p:bgPr>
         <a:solidFill>
-          <a:srgbClr val="0B0D13"/>
+          <a:srgbClr val="10203C"/>
         </a:solidFill>
         <a:effectLst/>
       </p:bgPr>
@@ -6245,21 +7621,61 @@
                 </a:solidFill>
                 <a:latin typeface="Cambria"/>
               </a:rPr>
-              <a:t>Три источника данных ДЗЗ, три роли</a:t>
-            </a:r>
-          </a:p>
-        </p:txBody>
-      </p:sp>
-      <p:sp>
-        <p:nvSpPr>
-          <p:cNvPr id="3" name="Rounded Rectangle 2"/>
+              <a:t>Почему одной морфологии недостаточно</a:t>
+            </a:r>
+          </a:p>
+        </p:txBody>
+      </p:sp>
+      <p:sp>
+        <p:nvSpPr>
+          <p:cNvPr id="3" name="TextBox 2"/>
+          <p:cNvSpPr txBox="1"/>
+          <p:nvPr/>
+        </p:nvSpPr>
+        <p:spPr>
+          <a:xfrm>
+            <a:off x="457200" y="932688"/>
+            <a:ext cx="11277295" cy="320040"/>
+          </a:xfrm>
+          <a:prstGeom prst="rect">
+            <a:avLst/>
+          </a:prstGeom>
+          <a:noFill/>
+        </p:spPr>
+        <p:txBody>
+          <a:bodyPr wrap="square" anchor="t" lIns="0" rIns="0" tIns="0" bIns="0"/>
+          <a:lstStyle/>
+          <a:p>
+            <a:pPr algn="l">
+              <a:lnSpc>
+                <a:spcPct val="100000"/>
+              </a:lnSpc>
+              <a:spcAft>
+                <a:spcPts val="0"/>
+              </a:spcAft>
+            </a:pPr>
+            <a:r>
+              <a:rPr sz="1300" b="0" i="1">
+                <a:solidFill>
+                  <a:srgbClr val="9B978D"/>
+                </a:solidFill>
+                <a:latin typeface="Calibri"/>
+              </a:rPr>
+              <a:t>И зачем тогда вообще нужен дистанционный этап</a:t>
+            </a:r>
+          </a:p>
+        </p:txBody>
+      </p:sp>
+      <p:sp>
+        <p:nvSpPr>
+          <p:cNvPr id="4" name="Rounded Rectangle 3"/>
           <p:cNvSpPr/>
           <p:nvPr/>
         </p:nvSpPr>
         <p:spPr>
           <a:xfrm>
-            <a:off x="457200" y="1645920"/>
-            <a:ext cx="3520440" cy="3246120"/>
+            <a:off x="700887" y="1508760"/>
+            <a:ext cx="10789920" cy="1097280"/>
           </a:xfrm>
           <a:prstGeom prst="roundRect">
             <a:avLst>
@@ -6267,7 +7683,7 @@
             </a:avLst>
           </a:prstGeom>
           <a:solidFill>
-            <a:srgbClr val="15181F"/>
+            <a:srgbClr val="1C2E4A"/>
           </a:solidFill>
           <a:ln>
             <a:noFill/>
@@ -6298,14 +7714,14 @@
       </p:sp>
       <p:sp>
         <p:nvSpPr>
-          <p:cNvPr id="4" name="Oval 3"/>
+          <p:cNvPr id="5" name="Oval 4"/>
           <p:cNvSpPr/>
           <p:nvPr/>
         </p:nvSpPr>
         <p:spPr>
           <a:xfrm>
-            <a:off x="731520" y="1920240"/>
-            <a:ext cx="457200" cy="457200"/>
+            <a:off x="929487" y="1783080"/>
+            <a:ext cx="502920" cy="502920"/>
           </a:xfrm>
           <a:prstGeom prst="ellipse">
             <a:avLst/>
@@ -6340,7 +7756,7 @@
             <a:r>
               <a:rPr sz="2000" b="1">
                 <a:solidFill>
-                  <a:srgbClr val="0B0D13"/>
+                  <a:srgbClr val="10203C"/>
                 </a:solidFill>
                 <a:latin typeface="Cambria"/>
               </a:rPr>
@@ -6351,14 +7767,14 @@
       </p:sp>
       <p:sp>
         <p:nvSpPr>
-          <p:cNvPr id="5" name="TextBox 4"/>
+          <p:cNvPr id="6" name="TextBox 5"/>
           <p:cNvSpPr txBox="1"/>
           <p:nvPr/>
         </p:nvSpPr>
         <p:spPr>
           <a:xfrm>
-            <a:off x="731520" y="2560320"/>
-            <a:ext cx="2971800" cy="457200"/>
+            <a:off x="1615287" y="1636776"/>
+            <a:ext cx="9601200" cy="320040"/>
           </a:xfrm>
           <a:prstGeom prst="rect">
             <a:avLst/>
@@ -6378,53 +7794,13 @@
               </a:spcAft>
             </a:pPr>
             <a:r>
-              <a:rPr sz="1650" b="1" i="0">
+              <a:rPr sz="1500" b="1" i="0">
                 <a:solidFill>
                   <a:srgbClr val="C1440E"/>
                 </a:solidFill>
                 <a:latin typeface="Cambria"/>
               </a:rPr>
-              <a:t>Оптика / ИК</a:t>
-            </a:r>
-          </a:p>
-        </p:txBody>
-      </p:sp>
-      <p:sp>
-        <p:nvSpPr>
-          <p:cNvPr id="6" name="TextBox 5"/>
-          <p:cNvSpPr txBox="1"/>
-          <p:nvPr/>
-        </p:nvSpPr>
-        <p:spPr>
-          <a:xfrm>
-            <a:off x="731520" y="2999232"/>
-            <a:ext cx="2971800" cy="320040"/>
-          </a:xfrm>
-          <a:prstGeom prst="rect">
-            <a:avLst/>
-          </a:prstGeom>
-          <a:noFill/>
-        </p:spPr>
-        <p:txBody>
-          <a:bodyPr wrap="square" anchor="t" lIns="0" rIns="0" tIns="0" bIns="0"/>
-          <a:lstStyle/>
-          <a:p>
-            <a:pPr algn="l">
-              <a:lnSpc>
-                <a:spcPct val="100000"/>
-              </a:lnSpc>
-              <a:spcAft>
-                <a:spcPts val="0"/>
-              </a:spcAft>
-            </a:pPr>
-            <a:r>
-              <a:rPr sz="1150" b="0" i="1">
-                <a:solidFill>
-                  <a:srgbClr val="9B978D"/>
-                </a:solidFill>
-                <a:latin typeface="Calibri"/>
-              </a:rPr>
-              <a:t>Sentinel-2</a:t>
+              <a:t>Морфология и ДЗЗ (наш этап)</a:t>
             </a:r>
           </a:p>
         </p:txBody>
@@ -6437,8 +7813,8 @@
         </p:nvSpPr>
         <p:spPr>
           <a:xfrm>
-            <a:off x="731520" y="3474720"/>
-            <a:ext cx="2971800" cy="1280160"/>
+            <a:off x="1615287" y="2020824"/>
+            <a:ext cx="9601200" cy="530352"/>
           </a:xfrm>
           <a:prstGeom prst="rect">
             <a:avLst/>
@@ -6451,20 +7827,51 @@
           <a:p>
             <a:pPr algn="l">
               <a:lnSpc>
-                <a:spcPct val="130000"/>
-              </a:lnSpc>
-              <a:spcAft>
-                <a:spcPts val="0"/>
-              </a:spcAft>
-            </a:pPr>
-            <a:r>
-              <a:rPr sz="1300" b="0" i="0">
+                <a:spcPct val="115000"/>
+              </a:lnSpc>
+            </a:pPr>
+            <a:r>
+              <a:rPr sz="1400" b="1" i="0">
+                <a:solidFill>
+                  <a:srgbClr val="5B8A72"/>
+                </a:solidFill>
+                <a:latin typeface="Calibri"/>
+              </a:rPr>
+              <a:t>+  </a:t>
+            </a:r>
+            <a:r>
+              <a:rPr sz="1100" b="0" i="0">
                 <a:solidFill>
                   <a:srgbClr val="E8E6DF"/>
                 </a:solidFill>
                 <a:latin typeface="Calibri"/>
               </a:rPr>
-              <a:t>состав и степень выветрелости пород, зоны выбросов, нарушенный грунт</a:t>
+              <a:t>весь земной шар, часы, бесплатно</a:t>
+            </a:r>
+          </a:p>
+          <a:p>
+            <a:pPr algn="l">
+              <a:lnSpc>
+                <a:spcPct val="115000"/>
+              </a:lnSpc>
+            </a:pPr>
+            <a:r>
+              <a:rPr sz="1400" b="1" i="0">
+                <a:solidFill>
+                  <a:srgbClr val="E07A5F"/>
+                </a:solidFill>
+                <a:latin typeface="Calibri"/>
+              </a:rPr>
+              <a:t>−  </a:t>
+            </a:r>
+            <a:r>
+              <a:rPr sz="1050" b="0" i="1">
+                <a:solidFill>
+                  <a:srgbClr val="9B978D"/>
+                </a:solidFill>
+                <a:latin typeface="Calibri"/>
+              </a:rPr>
+              <a:t>не доказательство: похожую форму даёт вулканизм и эрозия</a:t>
             </a:r>
           </a:p>
         </p:txBody>
@@ -6477,8 +7884,8 @@
         </p:nvSpPr>
         <p:spPr>
           <a:xfrm>
-            <a:off x="4242816" y="1645920"/>
-            <a:ext cx="3520440" cy="3246120"/>
+            <a:off x="1843887" y="2743200"/>
+            <a:ext cx="8503920" cy="1097280"/>
           </a:xfrm>
           <a:prstGeom prst="roundRect">
             <a:avLst>
@@ -6486,7 +7893,7 @@
             </a:avLst>
           </a:prstGeom>
           <a:solidFill>
-            <a:srgbClr val="15181F"/>
+            <a:srgbClr val="1C2E4A"/>
           </a:solidFill>
           <a:ln>
             <a:noFill/>
@@ -6523,8 +7930,8 @@
         </p:nvSpPr>
         <p:spPr>
           <a:xfrm>
-            <a:off x="4517136" y="1920240"/>
-            <a:ext cx="457200" cy="457200"/>
+            <a:off x="2072487" y="3017520"/>
+            <a:ext cx="502920" cy="502920"/>
           </a:xfrm>
           <a:prstGeom prst="ellipse">
             <a:avLst/>
@@ -6559,7 +7966,7 @@
             <a:r>
               <a:rPr sz="2000" b="1">
                 <a:solidFill>
-                  <a:srgbClr val="0B0D13"/>
+                  <a:srgbClr val="10203C"/>
                 </a:solidFill>
                 <a:latin typeface="Cambria"/>
               </a:rPr>
@@ -6576,8 +7983,8 @@
         </p:nvSpPr>
         <p:spPr>
           <a:xfrm>
-            <a:off x="4517136" y="2560320"/>
-            <a:ext cx="2971800" cy="457200"/>
+            <a:off x="2758287" y="2871216"/>
+            <a:ext cx="7315200" cy="320040"/>
           </a:xfrm>
           <a:prstGeom prst="rect">
             <a:avLst/>
@@ -6597,13 +8004,13 @@
               </a:spcAft>
             </a:pPr>
             <a:r>
-              <a:rPr sz="1650" b="1" i="0">
+              <a:rPr sz="1500" b="1" i="0">
                 <a:solidFill>
                   <a:srgbClr val="E0A458"/>
                 </a:solidFill>
                 <a:latin typeface="Cambria"/>
               </a:rPr>
-              <a:t>Цифровая модель рельефа</a:t>
+              <a:t>Геофизика</a:t>
             </a:r>
           </a:p>
         </p:txBody>
@@ -6616,8 +8023,8 @@
         </p:nvSpPr>
         <p:spPr>
           <a:xfrm>
-            <a:off x="4517136" y="2999232"/>
-            <a:ext cx="2971800" cy="320040"/>
+            <a:off x="2758287" y="3255264"/>
+            <a:ext cx="7315200" cy="530352"/>
           </a:xfrm>
           <a:prstGeom prst="rect">
             <a:avLst/>
@@ -6630,74 +8037,65 @@
           <a:p>
             <a:pPr algn="l">
               <a:lnSpc>
-                <a:spcPct val="100000"/>
-              </a:lnSpc>
-              <a:spcAft>
-                <a:spcPts val="0"/>
-              </a:spcAft>
-            </a:pPr>
-            <a:r>
-              <a:rPr sz="1150" b="0" i="1">
+                <a:spcPct val="115000"/>
+              </a:lnSpc>
+            </a:pPr>
+            <a:r>
+              <a:rPr sz="1400" b="1" i="0">
+                <a:solidFill>
+                  <a:srgbClr val="5B8A72"/>
+                </a:solidFill>
+                <a:latin typeface="Calibri"/>
+              </a:rPr>
+              <a:t>+  </a:t>
+            </a:r>
+            <a:r>
+              <a:rPr sz="1100" b="0" i="0">
+                <a:solidFill>
+                  <a:srgbClr val="E8E6DF"/>
+                </a:solidFill>
+                <a:latin typeface="Calibri"/>
+              </a:rPr>
+              <a:t>сужает круг кандидатов</a:t>
+            </a:r>
+          </a:p>
+          <a:p>
+            <a:pPr algn="l">
+              <a:lnSpc>
+                <a:spcPct val="115000"/>
+              </a:lnSpc>
+            </a:pPr>
+            <a:r>
+              <a:rPr sz="1400" b="1" i="0">
+                <a:solidFill>
+                  <a:srgbClr val="E07A5F"/>
+                </a:solidFill>
+                <a:latin typeface="Calibri"/>
+              </a:rPr>
+              <a:t>−  </a:t>
+            </a:r>
+            <a:r>
+              <a:rPr sz="1050" b="0" i="1">
                 <a:solidFill>
                   <a:srgbClr val="9B978D"/>
                 </a:solidFill>
                 <a:latin typeface="Calibri"/>
               </a:rPr>
-              <a:t>SRTM / GLO-30 / 3DEP</a:t>
-            </a:r>
-          </a:p>
-        </p:txBody>
-      </p:sp>
-      <p:sp>
-        <p:nvSpPr>
-          <p:cNvPr id="12" name="TextBox 11"/>
-          <p:cNvSpPr txBox="1"/>
-          <p:nvPr/>
-        </p:nvSpPr>
-        <p:spPr>
-          <a:xfrm>
-            <a:off x="4517136" y="3474720"/>
-            <a:ext cx="2971800" cy="1280160"/>
-          </a:xfrm>
-          <a:prstGeom prst="rect">
-            <a:avLst/>
-          </a:prstGeom>
-          <a:noFill/>
-        </p:spPr>
-        <p:txBody>
-          <a:bodyPr wrap="square" anchor="t" lIns="0" rIns="0" tIns="0" bIns="0"/>
-          <a:lstStyle/>
-          <a:p>
-            <a:pPr algn="l">
-              <a:lnSpc>
-                <a:spcPct val="130000"/>
-              </a:lnSpc>
-              <a:spcAft>
-                <a:spcPts val="0"/>
-              </a:spcAft>
-            </a:pPr>
-            <a:r>
-              <a:rPr sz="1300" b="0" i="0">
-                <a:solidFill>
-                  <a:srgbClr val="E8E6DF"/>
-                </a:solidFill>
-                <a:latin typeface="Calibri"/>
-              </a:rPr>
-              <a:t>форма вала, глубина чаши, крутизна склонов, террасы, степень деградации</a:t>
-            </a:r>
-          </a:p>
-        </p:txBody>
-      </p:sp>
-      <p:sp>
-        <p:nvSpPr>
-          <p:cNvPr id="13" name="Rounded Rectangle 12"/>
+              <a:t>тоже не доказательство: аномалию дают и другие тела</a:t>
+            </a:r>
+          </a:p>
+        </p:txBody>
+      </p:sp>
+      <p:sp>
+        <p:nvSpPr>
+          <p:cNvPr id="12" name="Rounded Rectangle 11"/>
           <p:cNvSpPr/>
           <p:nvPr/>
         </p:nvSpPr>
         <p:spPr>
           <a:xfrm>
-            <a:off x="8028432" y="1645920"/>
-            <a:ext cx="3520440" cy="3246120"/>
+            <a:off x="2986887" y="3977640"/>
+            <a:ext cx="6217920" cy="1097280"/>
           </a:xfrm>
           <a:prstGeom prst="roundRect">
             <a:avLst>
@@ -6705,7 +8103,7 @@
             </a:avLst>
           </a:prstGeom>
           <a:solidFill>
-            <a:srgbClr val="15181F"/>
+            <a:srgbClr val="1C2E4A"/>
           </a:solidFill>
           <a:ln>
             <a:noFill/>
@@ -6736,14 +8134,14 @@
       </p:sp>
       <p:sp>
         <p:nvSpPr>
-          <p:cNvPr id="14" name="Oval 13"/>
+          <p:cNvPr id="13" name="Oval 12"/>
           <p:cNvSpPr/>
           <p:nvPr/>
         </p:nvSpPr>
         <p:spPr>
           <a:xfrm>
-            <a:off x="8302752" y="1920240"/>
-            <a:ext cx="457200" cy="457200"/>
+            <a:off x="3215487" y="4251960"/>
+            <a:ext cx="502920" cy="502920"/>
           </a:xfrm>
           <a:prstGeom prst="ellipse">
             <a:avLst/>
@@ -6778,7 +8176,7 @@
             <a:r>
               <a:rPr sz="2000" b="1">
                 <a:solidFill>
-                  <a:srgbClr val="0B0D13"/>
+                  <a:srgbClr val="10203C"/>
                 </a:solidFill>
                 <a:latin typeface="Cambria"/>
               </a:rPr>
@@ -6789,14 +8187,14 @@
       </p:sp>
       <p:sp>
         <p:nvSpPr>
-          <p:cNvPr id="15" name="TextBox 14"/>
+          <p:cNvPr id="14" name="TextBox 13"/>
           <p:cNvSpPr txBox="1"/>
           <p:nvPr/>
         </p:nvSpPr>
         <p:spPr>
           <a:xfrm>
-            <a:off x="8302752" y="2560320"/>
-            <a:ext cx="2971800" cy="457200"/>
+            <a:off x="3901287" y="4105656"/>
+            <a:ext cx="5029200" cy="320040"/>
           </a:xfrm>
           <a:prstGeom prst="rect">
             <a:avLst/>
@@ -6816,27 +8214,27 @@
               </a:spcAft>
             </a:pPr>
             <a:r>
-              <a:rPr sz="1650" b="1" i="0">
+              <a:rPr sz="1500" b="1" i="0">
                 <a:solidFill>
                   <a:srgbClr val="5B8A72"/>
                 </a:solidFill>
                 <a:latin typeface="Cambria"/>
               </a:rPr>
-              <a:t>Радар</a:t>
-            </a:r>
-          </a:p>
-        </p:txBody>
-      </p:sp>
-      <p:sp>
-        <p:nvSpPr>
-          <p:cNvPr id="16" name="TextBox 15"/>
+              <a:t>Лаборатория (петрография + геохимия)</a:t>
+            </a:r>
+          </a:p>
+        </p:txBody>
+      </p:sp>
+      <p:sp>
+        <p:nvSpPr>
+          <p:cNvPr id="15" name="TextBox 14"/>
           <p:cNvSpPr txBox="1"/>
           <p:nvPr/>
         </p:nvSpPr>
         <p:spPr>
           <a:xfrm>
-            <a:off x="8302752" y="2999232"/>
-            <a:ext cx="2971800" cy="320040"/>
+            <a:off x="3901287" y="4489704"/>
+            <a:ext cx="5029200" cy="530352"/>
           </a:xfrm>
           <a:prstGeom prst="rect">
             <a:avLst/>
@@ -6849,21 +8247,98 @@
           <a:p>
             <a:pPr algn="l">
               <a:lnSpc>
-                <a:spcPct val="100000"/>
-              </a:lnSpc>
-              <a:spcAft>
-                <a:spcPts val="0"/>
-              </a:spcAft>
-            </a:pPr>
-            <a:r>
-              <a:rPr sz="1150" b="0" i="1">
+                <a:spcPct val="115000"/>
+              </a:lnSpc>
+            </a:pPr>
+            <a:r>
+              <a:rPr sz="1400" b="1" i="0">
+                <a:solidFill>
+                  <a:srgbClr val="5B8A72"/>
+                </a:solidFill>
+                <a:latin typeface="Calibri"/>
+              </a:rPr>
+              <a:t>+  </a:t>
+            </a:r>
+            <a:r>
+              <a:rPr sz="1100" b="0" i="0">
+                <a:solidFill>
+                  <a:srgbClr val="E8E6DF"/>
+                </a:solidFill>
+                <a:latin typeface="Calibri"/>
+              </a:rPr>
+              <a:t>шлифы под микроскопом, месяцы работы</a:t>
+            </a:r>
+          </a:p>
+          <a:p>
+            <a:pPr algn="l">
+              <a:lnSpc>
+                <a:spcPct val="115000"/>
+              </a:lnSpc>
+            </a:pPr>
+            <a:r>
+              <a:rPr sz="1400" b="1" i="0">
+                <a:solidFill>
+                  <a:srgbClr val="E07A5F"/>
+                </a:solidFill>
+                <a:latin typeface="Calibri"/>
+              </a:rPr>
+              <a:t>−  </a:t>
+            </a:r>
+            <a:r>
+              <a:rPr sz="1050" b="0" i="1">
                 <a:solidFill>
                   <a:srgbClr val="9B978D"/>
                 </a:solidFill>
                 <a:latin typeface="Calibri"/>
               </a:rPr>
-              <a:t>Sentinel-1</a:t>
-            </a:r>
+              <a:t>PDF, шаттер-конусы, коэсит — доказательство (Koeberl, 2004)</a:t>
+            </a:r>
+          </a:p>
+        </p:txBody>
+      </p:sp>
+      <p:sp>
+        <p:nvSpPr>
+          <p:cNvPr id="16" name="Rounded Rectangle 15"/>
+          <p:cNvSpPr/>
+          <p:nvPr/>
+        </p:nvSpPr>
+        <p:spPr>
+          <a:xfrm>
+            <a:off x="457200" y="5257800"/>
+            <a:ext cx="11277295" cy="1143000"/>
+          </a:xfrm>
+          <a:prstGeom prst="roundRect">
+            <a:avLst>
+              <a:gd name="adj" fmla="val 4000"/>
+            </a:avLst>
+          </a:prstGeom>
+          <a:solidFill>
+            <a:srgbClr val="1C2E4A"/>
+          </a:solidFill>
+          <a:ln>
+            <a:noFill/>
+          </a:ln>
+          <a:effectLst/>
+        </p:spPr>
+        <p:style>
+          <a:lnRef idx="1">
+            <a:schemeClr val="accent1"/>
+          </a:lnRef>
+          <a:fillRef idx="3">
+            <a:schemeClr val="accent1"/>
+          </a:fillRef>
+          <a:effectRef idx="2">
+            <a:schemeClr val="accent1"/>
+          </a:effectRef>
+          <a:fontRef idx="minor">
+            <a:schemeClr val="lt1"/>
+          </a:fontRef>
+        </p:style>
+        <p:txBody>
+          <a:bodyPr rtlCol="0" anchor="ctr"/>
+          <a:lstStyle/>
+          <a:p>
+            <a:pPr algn="ctr"/>
           </a:p>
         </p:txBody>
       </p:sp>
@@ -6875,8 +8350,8 @@
         </p:nvSpPr>
         <p:spPr>
           <a:xfrm>
-            <a:off x="8302752" y="3474720"/>
-            <a:ext cx="2971800" cy="1280160"/>
+            <a:off x="777240" y="5431536"/>
+            <a:ext cx="10637215" cy="914400"/>
           </a:xfrm>
           <a:prstGeom prst="rect">
             <a:avLst/>
@@ -6889,20 +8364,26 @@
           <a:p>
             <a:pPr algn="l">
               <a:lnSpc>
-                <a:spcPct val="130000"/>
-              </a:lnSpc>
-              <a:spcAft>
-                <a:spcPts val="0"/>
-              </a:spcAft>
-            </a:pPr>
-            <a:r>
-              <a:rPr sz="1300" b="0" i="0">
+                <a:spcPct val="128000"/>
+              </a:lnSpc>
+            </a:pPr>
+            <a:r>
+              <a:rPr sz="1350" b="1" i="0">
+                <a:solidFill>
+                  <a:srgbClr val="E0A458"/>
+                </a:solidFill>
+                <a:latin typeface="Calibri"/>
+              </a:rPr>
+              <a:t>Стоит ли тогда заниматься дистанционным этапом? </a:t>
+            </a:r>
+            <a:r>
+              <a:rPr sz="1350" b="0" i="1">
                 <a:solidFill>
                   <a:srgbClr val="E8E6DF"/>
                 </a:solidFill>
                 <a:latin typeface="Calibri"/>
               </a:rPr>
-              <a:t>шероховатость и текстура поверхности; работает при облачности и без солнечного освещения</a:t>
+              <a:t>Да — лабораторная проверка дорога и медленна и не может применяться подряд ко всем потенциальным структурам. Наш метод — быстрый воспроизводимый фильтр, который сужает круг кандидатов для дорогой проверки, а не заменяет её.</a:t>
             </a:r>
           </a:p>
         </p:txBody>
@@ -6910,46 +8391,6 @@
       <p:sp>
         <p:nvSpPr>
           <p:cNvPr id="18" name="TextBox 17"/>
-          <p:cNvSpPr txBox="1"/>
-          <p:nvPr/>
-        </p:nvSpPr>
-        <p:spPr>
-          <a:xfrm>
-            <a:off x="457200" y="5166360"/>
-            <a:ext cx="11277295" cy="1051560"/>
-          </a:xfrm>
-          <a:prstGeom prst="rect">
-            <a:avLst/>
-          </a:prstGeom>
-          <a:noFill/>
-        </p:spPr>
-        <p:txBody>
-          <a:bodyPr wrap="square" anchor="t" lIns="0" rIns="0" tIns="0" bIns="0"/>
-          <a:lstStyle/>
-          <a:p>
-            <a:pPr algn="l">
-              <a:lnSpc>
-                <a:spcPct val="125000"/>
-              </a:lnSpc>
-              <a:spcAft>
-                <a:spcPts val="0"/>
-              </a:spcAft>
-            </a:pPr>
-            <a:r>
-              <a:rPr sz="1250" b="0" i="1">
-                <a:solidFill>
-                  <a:srgbClr val="9B978D"/>
-                </a:solidFill>
-                <a:latin typeface="Calibri"/>
-              </a:rPr>
-              <a:t>Развитие глобальных радарных моделей рельефа (включая TanDEM-X) создало возможности для систематического морфометрического анализа известных структур и поиска новых кандидатов (Gottwald et al., 2017).</a:t>
-            </a:r>
-          </a:p>
-        </p:txBody>
-      </p:sp>
-      <p:sp>
-        <p:nvSpPr>
-          <p:cNvPr id="19" name="TextBox 18"/>
           <p:cNvSpPr txBox="1"/>
           <p:nvPr/>
         </p:nvSpPr>
@@ -7001,7 +8442,7 @@
     <p:bg>
       <p:bgPr>
         <a:solidFill>
-          <a:srgbClr val="0B0D13"/>
+          <a:srgbClr val="10203C"/>
         </a:solidFill>
         <a:effectLst/>
       </p:bgPr>
@@ -7048,48 +8489,54 @@
                 </a:solidFill>
                 <a:latin typeface="Cambria"/>
               </a:rPr>
-              <a:t>Наш воспроизводимый конвейер</a:t>
-            </a:r>
-          </a:p>
-        </p:txBody>
-      </p:sp>
-      <p:sp>
-        <p:nvSpPr>
-          <p:cNvPr id="3" name="TextBox 2"/>
-          <p:cNvSpPr txBox="1"/>
-          <p:nvPr/>
-        </p:nvSpPr>
-        <p:spPr>
-          <a:xfrm>
-            <a:off x="457200" y="932688"/>
-            <a:ext cx="11277295" cy="320040"/>
-          </a:xfrm>
-          <a:prstGeom prst="rect">
-            <a:avLst/>
-          </a:prstGeom>
-          <a:noFill/>
-        </p:spPr>
-        <p:txBody>
-          <a:bodyPr wrap="square" anchor="t" lIns="0" rIns="0" tIns="0" bIns="0"/>
-          <a:lstStyle/>
-          <a:p>
-            <a:pPr algn="l">
-              <a:lnSpc>
-                <a:spcPct val="100000"/>
-              </a:lnSpc>
-              <a:spcAft>
-                <a:spcPts val="0"/>
-              </a:spcAft>
-            </a:pPr>
-            <a:r>
-              <a:rPr sz="1300" b="0" i="1">
-                <a:solidFill>
-                  <a:srgbClr val="9B978D"/>
-                </a:solidFill>
-                <a:latin typeface="Calibri"/>
-              </a:rPr>
-              <a:t>Один и тот же скрипт, применённый без изменений к трём разным кратерам</a:t>
-            </a:r>
+              <a:t>Три источника данных ДЗЗ, три роли</a:t>
+            </a:r>
+          </a:p>
+        </p:txBody>
+      </p:sp>
+      <p:sp>
+        <p:nvSpPr>
+          <p:cNvPr id="3" name="Rounded Rectangle 2"/>
+          <p:cNvSpPr/>
+          <p:nvPr/>
+        </p:nvSpPr>
+        <p:spPr>
+          <a:xfrm>
+            <a:off x="457200" y="1645920"/>
+            <a:ext cx="3520440" cy="3246120"/>
+          </a:xfrm>
+          <a:prstGeom prst="roundRect">
+            <a:avLst>
+              <a:gd name="adj" fmla="val 4000"/>
+            </a:avLst>
+          </a:prstGeom>
+          <a:solidFill>
+            <a:srgbClr val="1C2E4A"/>
+          </a:solidFill>
+          <a:ln>
+            <a:noFill/>
+          </a:ln>
+          <a:effectLst/>
+        </p:spPr>
+        <p:style>
+          <a:lnRef idx="1">
+            <a:schemeClr val="accent1"/>
+          </a:lnRef>
+          <a:fillRef idx="3">
+            <a:schemeClr val="accent1"/>
+          </a:fillRef>
+          <a:effectRef idx="2">
+            <a:schemeClr val="accent1"/>
+          </a:effectRef>
+          <a:fontRef idx="minor">
+            <a:schemeClr val="lt1"/>
+          </a:fontRef>
+        </p:style>
+        <p:txBody>
+          <a:bodyPr rtlCol="0" anchor="ctr"/>
+          <a:lstStyle/>
+          <a:p>
+            <a:pPr algn="ctr"/>
           </a:p>
         </p:txBody>
       </p:sp>
@@ -7101,8 +8548,8 @@
         </p:nvSpPr>
         <p:spPr>
           <a:xfrm>
-            <a:off x="1114013" y="2011680"/>
-            <a:ext cx="685800" cy="685800"/>
+            <a:off x="731520" y="1920240"/>
+            <a:ext cx="457200" cy="457200"/>
           </a:xfrm>
           <a:prstGeom prst="ellipse">
             <a:avLst/>
@@ -7137,7 +8584,7 @@
             <a:r>
               <a:rPr sz="2000" b="1">
                 <a:solidFill>
-                  <a:srgbClr val="0B0D13"/>
+                  <a:srgbClr val="10203C"/>
                 </a:solidFill>
                 <a:latin typeface="Cambria"/>
               </a:rPr>
@@ -7148,20 +8595,142 @@
       </p:sp>
       <p:sp>
         <p:nvSpPr>
-          <p:cNvPr id="5" name="Right Arrow 4"/>
+          <p:cNvPr id="5" name="TextBox 4"/>
+          <p:cNvSpPr txBox="1"/>
+          <p:nvPr/>
+        </p:nvSpPr>
+        <p:spPr>
+          <a:xfrm>
+            <a:off x="731520" y="2560320"/>
+            <a:ext cx="2971800" cy="457200"/>
+          </a:xfrm>
+          <a:prstGeom prst="rect">
+            <a:avLst/>
+          </a:prstGeom>
+          <a:noFill/>
+        </p:spPr>
+        <p:txBody>
+          <a:bodyPr wrap="square" anchor="t" lIns="0" rIns="0" tIns="0" bIns="0"/>
+          <a:lstStyle/>
+          <a:p>
+            <a:pPr algn="l">
+              <a:lnSpc>
+                <a:spcPct val="100000"/>
+              </a:lnSpc>
+              <a:spcAft>
+                <a:spcPts val="0"/>
+              </a:spcAft>
+            </a:pPr>
+            <a:r>
+              <a:rPr sz="1650" b="1" i="0">
+                <a:solidFill>
+                  <a:srgbClr val="C1440E"/>
+                </a:solidFill>
+                <a:latin typeface="Cambria"/>
+              </a:rPr>
+              <a:t>Оптика / ИК</a:t>
+            </a:r>
+          </a:p>
+        </p:txBody>
+      </p:sp>
+      <p:sp>
+        <p:nvSpPr>
+          <p:cNvPr id="6" name="TextBox 5"/>
+          <p:cNvSpPr txBox="1"/>
+          <p:nvPr/>
+        </p:nvSpPr>
+        <p:spPr>
+          <a:xfrm>
+            <a:off x="731520" y="2999232"/>
+            <a:ext cx="2971800" cy="320040"/>
+          </a:xfrm>
+          <a:prstGeom prst="rect">
+            <a:avLst/>
+          </a:prstGeom>
+          <a:noFill/>
+        </p:spPr>
+        <p:txBody>
+          <a:bodyPr wrap="square" anchor="t" lIns="0" rIns="0" tIns="0" bIns="0"/>
+          <a:lstStyle/>
+          <a:p>
+            <a:pPr algn="l">
+              <a:lnSpc>
+                <a:spcPct val="100000"/>
+              </a:lnSpc>
+              <a:spcAft>
+                <a:spcPts val="0"/>
+              </a:spcAft>
+            </a:pPr>
+            <a:r>
+              <a:rPr sz="1150" b="0" i="1">
+                <a:solidFill>
+                  <a:srgbClr val="9B978D"/>
+                </a:solidFill>
+                <a:latin typeface="Calibri"/>
+              </a:rPr>
+              <a:t>Sentinel-2</a:t>
+            </a:r>
+          </a:p>
+        </p:txBody>
+      </p:sp>
+      <p:sp>
+        <p:nvSpPr>
+          <p:cNvPr id="7" name="TextBox 6"/>
+          <p:cNvSpPr txBox="1"/>
+          <p:nvPr/>
+        </p:nvSpPr>
+        <p:spPr>
+          <a:xfrm>
+            <a:off x="731520" y="3474720"/>
+            <a:ext cx="2971800" cy="1280160"/>
+          </a:xfrm>
+          <a:prstGeom prst="rect">
+            <a:avLst/>
+          </a:prstGeom>
+          <a:noFill/>
+        </p:spPr>
+        <p:txBody>
+          <a:bodyPr wrap="square" anchor="t" lIns="0" rIns="0" tIns="0" bIns="0"/>
+          <a:lstStyle/>
+          <a:p>
+            <a:pPr algn="l">
+              <a:lnSpc>
+                <a:spcPct val="130000"/>
+              </a:lnSpc>
+              <a:spcAft>
+                <a:spcPts val="0"/>
+              </a:spcAft>
+            </a:pPr>
+            <a:r>
+              <a:rPr sz="1300" b="0" i="0">
+                <a:solidFill>
+                  <a:srgbClr val="E8E6DF"/>
+                </a:solidFill>
+                <a:latin typeface="Calibri"/>
+              </a:rPr>
+              <a:t>состав и степень выветрелости пород, зоны выбросов, нарушенный грунт</a:t>
+            </a:r>
+          </a:p>
+        </p:txBody>
+      </p:sp>
+      <p:sp>
+        <p:nvSpPr>
+          <p:cNvPr id="8" name="Rounded Rectangle 7"/>
           <p:cNvSpPr/>
           <p:nvPr/>
         </p:nvSpPr>
         <p:spPr>
           <a:xfrm>
-            <a:off x="2410906" y="2258568"/>
-            <a:ext cx="411480" cy="201168"/>
-          </a:xfrm>
-          <a:prstGeom prst="rightArrow">
-            <a:avLst/>
+            <a:off x="4242816" y="1645920"/>
+            <a:ext cx="3520440" cy="3246120"/>
+          </a:xfrm>
+          <a:prstGeom prst="roundRect">
+            <a:avLst>
+              <a:gd name="adj" fmla="val 4000"/>
+            </a:avLst>
           </a:prstGeom>
           <a:solidFill>
-            <a:srgbClr val="9B978D"/>
+            <a:srgbClr val="1C2E4A"/>
           </a:solidFill>
           <a:ln>
             <a:noFill/>
@@ -7192,271 +8761,14 @@
       </p:sp>
       <p:sp>
         <p:nvSpPr>
-          <p:cNvPr id="6" name="TextBox 5"/>
-          <p:cNvSpPr txBox="1"/>
-          <p:nvPr/>
-        </p:nvSpPr>
-        <p:spPr>
-          <a:xfrm>
-            <a:off x="457200" y="2971800"/>
-            <a:ext cx="1999426" cy="502920"/>
-          </a:xfrm>
-          <a:prstGeom prst="rect">
-            <a:avLst/>
-          </a:prstGeom>
-          <a:noFill/>
-        </p:spPr>
-        <p:txBody>
-          <a:bodyPr wrap="square" anchor="t" lIns="0" rIns="0" tIns="0" bIns="0"/>
-          <a:lstStyle/>
-          <a:p>
-            <a:pPr algn="ctr">
-              <a:lnSpc>
-                <a:spcPct val="105000"/>
-              </a:lnSpc>
-              <a:spcAft>
-                <a:spcPts val="0"/>
-              </a:spcAft>
-            </a:pPr>
-            <a:r>
-              <a:rPr sz="1450" b="1" i="0">
-                <a:solidFill>
-                  <a:srgbClr val="C1440E"/>
-                </a:solidFill>
-                <a:latin typeface="Cambria"/>
-              </a:rPr>
-              <a:t>Координаты</a:t>
-            </a:r>
-          </a:p>
-        </p:txBody>
-      </p:sp>
-      <p:sp>
-        <p:nvSpPr>
-          <p:cNvPr id="7" name="TextBox 6"/>
-          <p:cNvSpPr txBox="1"/>
-          <p:nvPr/>
-        </p:nvSpPr>
-        <p:spPr>
-          <a:xfrm>
-            <a:off x="457200" y="3520440"/>
-            <a:ext cx="1999426" cy="1463040"/>
-          </a:xfrm>
-          <a:prstGeom prst="rect">
-            <a:avLst/>
-          </a:prstGeom>
-          <a:noFill/>
-        </p:spPr>
-        <p:txBody>
-          <a:bodyPr wrap="square" anchor="t" lIns="0" rIns="0" tIns="0" bIns="0"/>
-          <a:lstStyle/>
-          <a:p>
-            <a:pPr algn="ctr">
-              <a:lnSpc>
-                <a:spcPct val="120000"/>
-              </a:lnSpc>
-              <a:spcAft>
-                <a:spcPts val="0"/>
-              </a:spcAft>
-            </a:pPr>
-            <a:r>
-              <a:rPr sz="1150" b="0" i="0">
-                <a:solidFill>
-                  <a:srgbClr val="E8E6DF"/>
-                </a:solidFill>
-                <a:latin typeface="Calibri"/>
-              </a:rPr>
-              <a:t>справочник кратеров или клик по центру на снимке</a:t>
-            </a:r>
-          </a:p>
-        </p:txBody>
-      </p:sp>
-      <p:sp>
-        <p:nvSpPr>
-          <p:cNvPr id="8" name="Oval 7"/>
+          <p:cNvPr id="9" name="Oval 8"/>
           <p:cNvSpPr/>
           <p:nvPr/>
         </p:nvSpPr>
         <p:spPr>
           <a:xfrm>
-            <a:off x="3433479" y="2011680"/>
-            <a:ext cx="685800" cy="685800"/>
-          </a:xfrm>
-          <a:prstGeom prst="ellipse">
-            <a:avLst/>
-          </a:prstGeom>
-          <a:solidFill>
-            <a:srgbClr val="E07A5F"/>
-          </a:solidFill>
-          <a:ln>
-            <a:noFill/>
-          </a:ln>
-          <a:effectLst/>
-        </p:spPr>
-        <p:style>
-          <a:lnRef idx="1">
-            <a:schemeClr val="accent1"/>
-          </a:lnRef>
-          <a:fillRef idx="3">
-            <a:schemeClr val="accent1"/>
-          </a:fillRef>
-          <a:effectRef idx="2">
-            <a:schemeClr val="accent1"/>
-          </a:effectRef>
-          <a:fontRef idx="minor">
-            <a:schemeClr val="lt1"/>
-          </a:fontRef>
-        </p:style>
-        <p:txBody>
-          <a:bodyPr rtlCol="0" anchor="ctr" lIns="0" rIns="0" tIns="0" bIns="0"/>
-          <a:lstStyle/>
-          <a:p>
-            <a:pPr algn="ctr"/>
-            <a:r>
-              <a:rPr sz="2000" b="1">
-                <a:solidFill>
-                  <a:srgbClr val="0B0D13"/>
-                </a:solidFill>
-                <a:latin typeface="Cambria"/>
-              </a:rPr>
-              <a:t>2</a:t>
-            </a:r>
-          </a:p>
-        </p:txBody>
-      </p:sp>
-      <p:sp>
-        <p:nvSpPr>
-          <p:cNvPr id="9" name="Right Arrow 8"/>
-          <p:cNvSpPr/>
-          <p:nvPr/>
-        </p:nvSpPr>
-        <p:spPr>
-          <a:xfrm>
-            <a:off x="4730372" y="2258568"/>
-            <a:ext cx="411480" cy="201168"/>
-          </a:xfrm>
-          <a:prstGeom prst="rightArrow">
-            <a:avLst/>
-          </a:prstGeom>
-          <a:solidFill>
-            <a:srgbClr val="9B978D"/>
-          </a:solidFill>
-          <a:ln>
-            <a:noFill/>
-          </a:ln>
-          <a:effectLst/>
-        </p:spPr>
-        <p:style>
-          <a:lnRef idx="1">
-            <a:schemeClr val="accent1"/>
-          </a:lnRef>
-          <a:fillRef idx="3">
-            <a:schemeClr val="accent1"/>
-          </a:fillRef>
-          <a:effectRef idx="2">
-            <a:schemeClr val="accent1"/>
-          </a:effectRef>
-          <a:fontRef idx="minor">
-            <a:schemeClr val="lt1"/>
-          </a:fontRef>
-        </p:style>
-        <p:txBody>
-          <a:bodyPr rtlCol="0" anchor="ctr"/>
-          <a:lstStyle/>
-          <a:p>
-            <a:pPr algn="ctr"/>
-          </a:p>
-        </p:txBody>
-      </p:sp>
-      <p:sp>
-        <p:nvSpPr>
-          <p:cNvPr id="10" name="TextBox 9"/>
-          <p:cNvSpPr txBox="1"/>
-          <p:nvPr/>
-        </p:nvSpPr>
-        <p:spPr>
-          <a:xfrm>
-            <a:off x="2776666" y="2971800"/>
-            <a:ext cx="1999426" cy="502920"/>
-          </a:xfrm>
-          <a:prstGeom prst="rect">
-            <a:avLst/>
-          </a:prstGeom>
-          <a:noFill/>
-        </p:spPr>
-        <p:txBody>
-          <a:bodyPr wrap="square" anchor="t" lIns="0" rIns="0" tIns="0" bIns="0"/>
-          <a:lstStyle/>
-          <a:p>
-            <a:pPr algn="ctr">
-              <a:lnSpc>
-                <a:spcPct val="105000"/>
-              </a:lnSpc>
-              <a:spcAft>
-                <a:spcPts val="0"/>
-              </a:spcAft>
-            </a:pPr>
-            <a:r>
-              <a:rPr sz="1450" b="1" i="0">
-                <a:solidFill>
-                  <a:srgbClr val="E07A5F"/>
-                </a:solidFill>
-                <a:latin typeface="Cambria"/>
-              </a:rPr>
-              <a:t>N азимутов</a:t>
-            </a:r>
-          </a:p>
-        </p:txBody>
-      </p:sp>
-      <p:sp>
-        <p:nvSpPr>
-          <p:cNvPr id="11" name="TextBox 10"/>
-          <p:cNvSpPr txBox="1"/>
-          <p:nvPr/>
-        </p:nvSpPr>
-        <p:spPr>
-          <a:xfrm>
-            <a:off x="2776666" y="3520440"/>
-            <a:ext cx="1999426" cy="1463040"/>
-          </a:xfrm>
-          <a:prstGeom prst="rect">
-            <a:avLst/>
-          </a:prstGeom>
-          <a:noFill/>
-        </p:spPr>
-        <p:txBody>
-          <a:bodyPr wrap="square" anchor="t" lIns="0" rIns="0" tIns="0" bIns="0"/>
-          <a:lstStyle/>
-          <a:p>
-            <a:pPr algn="ctr">
-              <a:lnSpc>
-                <a:spcPct val="120000"/>
-              </a:lnSpc>
-              <a:spcAft>
-                <a:spcPts val="0"/>
-              </a:spcAft>
-            </a:pPr>
-            <a:r>
-              <a:rPr sz="1150" b="0" i="0">
-                <a:solidFill>
-                  <a:srgbClr val="E8E6DF"/>
-                </a:solidFill>
-                <a:latin typeface="Calibri"/>
-              </a:rPr>
-              <a:t>радиальные лучи вокруг центра кратера</a:t>
-            </a:r>
-          </a:p>
-        </p:txBody>
-      </p:sp>
-      <p:sp>
-        <p:nvSpPr>
-          <p:cNvPr id="12" name="Oval 11"/>
-          <p:cNvSpPr/>
-          <p:nvPr/>
-        </p:nvSpPr>
-        <p:spPr>
-          <a:xfrm>
-            <a:off x="5752945" y="2011680"/>
-            <a:ext cx="685800" cy="685800"/>
+            <a:off x="4517136" y="1920240"/>
+            <a:ext cx="457200" cy="457200"/>
           </a:xfrm>
           <a:prstGeom prst="ellipse">
             <a:avLst/>
@@ -7491,31 +8803,153 @@
             <a:r>
               <a:rPr sz="2000" b="1">
                 <a:solidFill>
-                  <a:srgbClr val="0B0D13"/>
+                  <a:srgbClr val="10203C"/>
                 </a:solidFill>
                 <a:latin typeface="Cambria"/>
               </a:rPr>
-              <a:t>3</a:t>
-            </a:r>
-          </a:p>
-        </p:txBody>
-      </p:sp>
-      <p:sp>
-        <p:nvSpPr>
-          <p:cNvPr id="13" name="Right Arrow 12"/>
+              <a:t>2</a:t>
+            </a:r>
+          </a:p>
+        </p:txBody>
+      </p:sp>
+      <p:sp>
+        <p:nvSpPr>
+          <p:cNvPr id="10" name="TextBox 9"/>
+          <p:cNvSpPr txBox="1"/>
+          <p:nvPr/>
+        </p:nvSpPr>
+        <p:spPr>
+          <a:xfrm>
+            <a:off x="4517136" y="2560320"/>
+            <a:ext cx="2971800" cy="457200"/>
+          </a:xfrm>
+          <a:prstGeom prst="rect">
+            <a:avLst/>
+          </a:prstGeom>
+          <a:noFill/>
+        </p:spPr>
+        <p:txBody>
+          <a:bodyPr wrap="square" anchor="t" lIns="0" rIns="0" tIns="0" bIns="0"/>
+          <a:lstStyle/>
+          <a:p>
+            <a:pPr algn="l">
+              <a:lnSpc>
+                <a:spcPct val="100000"/>
+              </a:lnSpc>
+              <a:spcAft>
+                <a:spcPts val="0"/>
+              </a:spcAft>
+            </a:pPr>
+            <a:r>
+              <a:rPr sz="1650" b="1" i="0">
+                <a:solidFill>
+                  <a:srgbClr val="E0A458"/>
+                </a:solidFill>
+                <a:latin typeface="Cambria"/>
+              </a:rPr>
+              <a:t>Цифровая модель рельефа</a:t>
+            </a:r>
+          </a:p>
+        </p:txBody>
+      </p:sp>
+      <p:sp>
+        <p:nvSpPr>
+          <p:cNvPr id="11" name="TextBox 10"/>
+          <p:cNvSpPr txBox="1"/>
+          <p:nvPr/>
+        </p:nvSpPr>
+        <p:spPr>
+          <a:xfrm>
+            <a:off x="4517136" y="2999232"/>
+            <a:ext cx="2971800" cy="320040"/>
+          </a:xfrm>
+          <a:prstGeom prst="rect">
+            <a:avLst/>
+          </a:prstGeom>
+          <a:noFill/>
+        </p:spPr>
+        <p:txBody>
+          <a:bodyPr wrap="square" anchor="t" lIns="0" rIns="0" tIns="0" bIns="0"/>
+          <a:lstStyle/>
+          <a:p>
+            <a:pPr algn="l">
+              <a:lnSpc>
+                <a:spcPct val="100000"/>
+              </a:lnSpc>
+              <a:spcAft>
+                <a:spcPts val="0"/>
+              </a:spcAft>
+            </a:pPr>
+            <a:r>
+              <a:rPr sz="1150" b="0" i="1">
+                <a:solidFill>
+                  <a:srgbClr val="9B978D"/>
+                </a:solidFill>
+                <a:latin typeface="Calibri"/>
+              </a:rPr>
+              <a:t>SRTM / GLO-30 / 3DEP</a:t>
+            </a:r>
+          </a:p>
+        </p:txBody>
+      </p:sp>
+      <p:sp>
+        <p:nvSpPr>
+          <p:cNvPr id="12" name="TextBox 11"/>
+          <p:cNvSpPr txBox="1"/>
+          <p:nvPr/>
+        </p:nvSpPr>
+        <p:spPr>
+          <a:xfrm>
+            <a:off x="4517136" y="3474720"/>
+            <a:ext cx="2971800" cy="1280160"/>
+          </a:xfrm>
+          <a:prstGeom prst="rect">
+            <a:avLst/>
+          </a:prstGeom>
+          <a:noFill/>
+        </p:spPr>
+        <p:txBody>
+          <a:bodyPr wrap="square" anchor="t" lIns="0" rIns="0" tIns="0" bIns="0"/>
+          <a:lstStyle/>
+          <a:p>
+            <a:pPr algn="l">
+              <a:lnSpc>
+                <a:spcPct val="130000"/>
+              </a:lnSpc>
+              <a:spcAft>
+                <a:spcPts val="0"/>
+              </a:spcAft>
+            </a:pPr>
+            <a:r>
+              <a:rPr sz="1300" b="0" i="0">
+                <a:solidFill>
+                  <a:srgbClr val="E8E6DF"/>
+                </a:solidFill>
+                <a:latin typeface="Calibri"/>
+              </a:rPr>
+              <a:t>форма вала, глубина чаши, крутизна склонов, террасы, степень деградации</a:t>
+            </a:r>
+          </a:p>
+        </p:txBody>
+      </p:sp>
+      <p:sp>
+        <p:nvSpPr>
+          <p:cNvPr id="13" name="Rounded Rectangle 12"/>
           <p:cNvSpPr/>
           <p:nvPr/>
         </p:nvSpPr>
         <p:spPr>
           <a:xfrm>
-            <a:off x="7049838" y="2258568"/>
-            <a:ext cx="411480" cy="201168"/>
-          </a:xfrm>
-          <a:prstGeom prst="rightArrow">
-            <a:avLst/>
+            <a:off x="8028432" y="1645920"/>
+            <a:ext cx="3520440" cy="3246120"/>
+          </a:xfrm>
+          <a:prstGeom prst="roundRect">
+            <a:avLst>
+              <a:gd name="adj" fmla="val 4000"/>
+            </a:avLst>
           </a:prstGeom>
           <a:solidFill>
-            <a:srgbClr val="9B978D"/>
+            <a:srgbClr val="1C2E4A"/>
           </a:solidFill>
           <a:ln>
             <a:noFill/>
@@ -7546,113 +8980,14 @@
       </p:sp>
       <p:sp>
         <p:nvSpPr>
-          <p:cNvPr id="14" name="TextBox 13"/>
-          <p:cNvSpPr txBox="1"/>
-          <p:nvPr/>
-        </p:nvSpPr>
-        <p:spPr>
-          <a:xfrm>
-            <a:off x="5096132" y="2971800"/>
-            <a:ext cx="1999426" cy="502920"/>
-          </a:xfrm>
-          <a:prstGeom prst="rect">
-            <a:avLst/>
-          </a:prstGeom>
-          <a:noFill/>
-        </p:spPr>
-        <p:txBody>
-          <a:bodyPr wrap="square" anchor="t" lIns="0" rIns="0" tIns="0" bIns="0"/>
-          <a:lstStyle/>
-          <a:p>
-            <a:pPr algn="ctr">
-              <a:lnSpc>
-                <a:spcPct val="105000"/>
-              </a:lnSpc>
-              <a:spcAft>
-                <a:spcPts val="0"/>
-              </a:spcAft>
-            </a:pPr>
-            <a:r>
-              <a:rPr sz="1450" b="1" i="0">
-                <a:solidFill>
-                  <a:srgbClr val="E0A458"/>
-                </a:solidFill>
-                <a:latin typeface="Cambria"/>
-              </a:rPr>
-              <a:t>Выборка вдоль лучей</a:t>
-            </a:r>
-          </a:p>
-        </p:txBody>
-      </p:sp>
-      <p:sp>
-        <p:nvSpPr>
-          <p:cNvPr id="15" name="TextBox 14"/>
-          <p:cNvSpPr txBox="1"/>
-          <p:nvPr/>
-        </p:nvSpPr>
-        <p:spPr>
-          <a:xfrm>
-            <a:off x="5096132" y="3520440"/>
-            <a:ext cx="1999426" cy="1463040"/>
-          </a:xfrm>
-          <a:prstGeom prst="rect">
-            <a:avLst/>
-          </a:prstGeom>
-          <a:noFill/>
-        </p:spPr>
-        <p:txBody>
-          <a:bodyPr wrap="square" anchor="t" lIns="0" rIns="0" tIns="0" bIns="0"/>
-          <a:lstStyle/>
-          <a:p>
-            <a:pPr algn="ctr">
-              <a:lnSpc>
-                <a:spcPct val="120000"/>
-              </a:lnSpc>
-              <a:spcAft>
-                <a:spcPts val="0"/>
-              </a:spcAft>
-            </a:pPr>
-            <a:r>
-              <a:rPr sz="1150" b="0" i="0">
-                <a:solidFill>
-                  <a:srgbClr val="E8E6DF"/>
-                </a:solidFill>
-                <a:latin typeface="Calibri"/>
-              </a:rPr>
-              <a:t>DEM + VV/VH (Sentinel-1) + slope + hillshade</a:t>
-            </a:r>
-          </a:p>
-          <a:p>
-            <a:pPr algn="ctr">
-              <a:lnSpc>
-                <a:spcPct val="120000"/>
-              </a:lnSpc>
-              <a:spcAft>
-                <a:spcPts val="0"/>
-              </a:spcAft>
-            </a:pPr>
-            <a:r>
-              <a:rPr sz="1150" b="0" i="0">
-                <a:solidFill>
-                  <a:srgbClr val="E8E6DF"/>
-                </a:solidFill>
-                <a:latin typeface="Calibri"/>
-              </a:rPr>
-              <a:t>(Google Earth Engine)</a:t>
-            </a:r>
-          </a:p>
-        </p:txBody>
-      </p:sp>
-      <p:sp>
-        <p:nvSpPr>
-          <p:cNvPr id="16" name="Oval 15"/>
+          <p:cNvPr id="14" name="Oval 13"/>
           <p:cNvSpPr/>
           <p:nvPr/>
         </p:nvSpPr>
         <p:spPr>
           <a:xfrm>
-            <a:off x="8072411" y="2011680"/>
-            <a:ext cx="685800" cy="685800"/>
+            <a:off x="8302752" y="1920240"/>
+            <a:ext cx="457200" cy="457200"/>
           </a:xfrm>
           <a:prstGeom prst="ellipse">
             <a:avLst/>
@@ -7687,69 +9022,25 @@
             <a:r>
               <a:rPr sz="2000" b="1">
                 <a:solidFill>
-                  <a:srgbClr val="0B0D13"/>
+                  <a:srgbClr val="10203C"/>
                 </a:solidFill>
                 <a:latin typeface="Cambria"/>
               </a:rPr>
-              <a:t>4</a:t>
-            </a:r>
-          </a:p>
-        </p:txBody>
-      </p:sp>
-      <p:sp>
-        <p:nvSpPr>
-          <p:cNvPr id="17" name="Right Arrow 16"/>
-          <p:cNvSpPr/>
-          <p:nvPr/>
-        </p:nvSpPr>
-        <p:spPr>
-          <a:xfrm>
-            <a:off x="9369304" y="2258568"/>
-            <a:ext cx="411480" cy="201168"/>
-          </a:xfrm>
-          <a:prstGeom prst="rightArrow">
-            <a:avLst/>
-          </a:prstGeom>
-          <a:solidFill>
-            <a:srgbClr val="9B978D"/>
-          </a:solidFill>
-          <a:ln>
-            <a:noFill/>
-          </a:ln>
-          <a:effectLst/>
-        </p:spPr>
-        <p:style>
-          <a:lnRef idx="1">
-            <a:schemeClr val="accent1"/>
-          </a:lnRef>
-          <a:fillRef idx="3">
-            <a:schemeClr val="accent1"/>
-          </a:fillRef>
-          <a:effectRef idx="2">
-            <a:schemeClr val="accent1"/>
-          </a:effectRef>
-          <a:fontRef idx="minor">
-            <a:schemeClr val="lt1"/>
-          </a:fontRef>
-        </p:style>
-        <p:txBody>
-          <a:bodyPr rtlCol="0" anchor="ctr"/>
-          <a:lstStyle/>
-          <a:p>
-            <a:pPr algn="ctr"/>
-          </a:p>
-        </p:txBody>
-      </p:sp>
-      <p:sp>
-        <p:nvSpPr>
-          <p:cNvPr id="18" name="TextBox 17"/>
+              <a:t>3</a:t>
+            </a:r>
+          </a:p>
+        </p:txBody>
+      </p:sp>
+      <p:sp>
+        <p:nvSpPr>
+          <p:cNvPr id="15" name="TextBox 14"/>
           <p:cNvSpPr txBox="1"/>
           <p:nvPr/>
         </p:nvSpPr>
         <p:spPr>
           <a:xfrm>
-            <a:off x="7415598" y="2971800"/>
-            <a:ext cx="1999426" cy="502920"/>
+            <a:off x="8302752" y="2560320"/>
+            <a:ext cx="2971800" cy="457200"/>
           </a:xfrm>
           <a:prstGeom prst="rect">
             <a:avLst/>
@@ -7760,36 +9051,36 @@
           <a:bodyPr wrap="square" anchor="t" lIns="0" rIns="0" tIns="0" bIns="0"/>
           <a:lstStyle/>
           <a:p>
-            <a:pPr algn="ctr">
-              <a:lnSpc>
-                <a:spcPct val="105000"/>
+            <a:pPr algn="l">
+              <a:lnSpc>
+                <a:spcPct val="100000"/>
               </a:lnSpc>
               <a:spcAft>
                 <a:spcPts val="0"/>
               </a:spcAft>
             </a:pPr>
             <a:r>
-              <a:rPr sz="1450" b="1" i="0">
+              <a:rPr sz="1650" b="1" i="0">
                 <a:solidFill>
                   <a:srgbClr val="5B8A72"/>
                 </a:solidFill>
                 <a:latin typeface="Cambria"/>
               </a:rPr>
-              <a:t>CSV → Python</a:t>
-            </a:r>
-          </a:p>
-        </p:txBody>
-      </p:sp>
-      <p:sp>
-        <p:nvSpPr>
-          <p:cNvPr id="19" name="TextBox 18"/>
+              <a:t>Радар</a:t>
+            </a:r>
+          </a:p>
+        </p:txBody>
+      </p:sp>
+      <p:sp>
+        <p:nvSpPr>
+          <p:cNvPr id="16" name="TextBox 15"/>
           <p:cNvSpPr txBox="1"/>
           <p:nvPr/>
         </p:nvSpPr>
         <p:spPr>
           <a:xfrm>
-            <a:off x="7415598" y="3520440"/>
-            <a:ext cx="1999426" cy="1463040"/>
+            <a:off x="8302752" y="2999232"/>
+            <a:ext cx="2971800" cy="320040"/>
           </a:xfrm>
           <a:prstGeom prst="rect">
             <a:avLst/>
@@ -7800,108 +9091,76 @@
           <a:bodyPr wrap="square" anchor="t" lIns="0" rIns="0" tIns="0" bIns="0"/>
           <a:lstStyle/>
           <a:p>
-            <a:pPr algn="ctr">
-              <a:lnSpc>
-                <a:spcPct val="120000"/>
+            <a:pPr algn="l">
+              <a:lnSpc>
+                <a:spcPct val="100000"/>
               </a:lnSpc>
               <a:spcAft>
                 <a:spcPts val="0"/>
               </a:spcAft>
             </a:pPr>
             <a:r>
-              <a:rPr sz="1150" b="0" i="0">
-                <a:solidFill>
-                  <a:srgbClr val="E8E6DF"/>
-                </a:solidFill>
-                <a:latin typeface="Calibri"/>
-              </a:rPr>
-              <a:t>дно, гребень вала, диаметр, глубина,</a:t>
-            </a:r>
-          </a:p>
-          <a:p>
-            <a:pPr algn="ctr">
-              <a:lnSpc>
-                <a:spcPct val="120000"/>
+              <a:rPr sz="1150" b="0" i="1">
+                <a:solidFill>
+                  <a:srgbClr val="9B978D"/>
+                </a:solidFill>
+                <a:latin typeface="Calibri"/>
+              </a:rPr>
+              <a:t>Sentinel-1</a:t>
+            </a:r>
+          </a:p>
+        </p:txBody>
+      </p:sp>
+      <p:sp>
+        <p:nvSpPr>
+          <p:cNvPr id="17" name="TextBox 16"/>
+          <p:cNvSpPr txBox="1"/>
+          <p:nvPr/>
+        </p:nvSpPr>
+        <p:spPr>
+          <a:xfrm>
+            <a:off x="8302752" y="3474720"/>
+            <a:ext cx="2971800" cy="1280160"/>
+          </a:xfrm>
+          <a:prstGeom prst="rect">
+            <a:avLst/>
+          </a:prstGeom>
+          <a:noFill/>
+        </p:spPr>
+        <p:txBody>
+          <a:bodyPr wrap="square" anchor="t" lIns="0" rIns="0" tIns="0" bIns="0"/>
+          <a:lstStyle/>
+          <a:p>
+            <a:pPr algn="l">
+              <a:lnSpc>
+                <a:spcPct val="130000"/>
               </a:lnSpc>
               <a:spcAft>
                 <a:spcPts val="0"/>
               </a:spcAft>
             </a:pPr>
             <a:r>
-              <a:rPr sz="1150" b="0" i="0">
+              <a:rPr sz="1300" b="0" i="0">
                 <a:solidFill>
                   <a:srgbClr val="E8E6DF"/>
                 </a:solidFill>
                 <a:latin typeface="Calibri"/>
               </a:rPr>
-              <a:t>индекс округлости</a:t>
-            </a:r>
-          </a:p>
-        </p:txBody>
-      </p:sp>
-      <p:sp>
-        <p:nvSpPr>
-          <p:cNvPr id="20" name="Oval 19"/>
-          <p:cNvSpPr/>
-          <p:nvPr/>
-        </p:nvSpPr>
-        <p:spPr>
-          <a:xfrm>
-            <a:off x="10391877" y="2011680"/>
-            <a:ext cx="685800" cy="685800"/>
-          </a:xfrm>
-          <a:prstGeom prst="ellipse">
-            <a:avLst/>
-          </a:prstGeom>
-          <a:solidFill>
-            <a:srgbClr val="8A6BB0"/>
-          </a:solidFill>
-          <a:ln>
-            <a:noFill/>
-          </a:ln>
-          <a:effectLst/>
-        </p:spPr>
-        <p:style>
-          <a:lnRef idx="1">
-            <a:schemeClr val="accent1"/>
-          </a:lnRef>
-          <a:fillRef idx="3">
-            <a:schemeClr val="accent1"/>
-          </a:fillRef>
-          <a:effectRef idx="2">
-            <a:schemeClr val="accent1"/>
-          </a:effectRef>
-          <a:fontRef idx="minor">
-            <a:schemeClr val="lt1"/>
-          </a:fontRef>
-        </p:style>
-        <p:txBody>
-          <a:bodyPr rtlCol="0" anchor="ctr" lIns="0" rIns="0" tIns="0" bIns="0"/>
-          <a:lstStyle/>
-          <a:p>
-            <a:pPr algn="ctr"/>
-            <a:r>
-              <a:rPr sz="2000" b="1">
-                <a:solidFill>
-                  <a:srgbClr val="0B0D13"/>
-                </a:solidFill>
-                <a:latin typeface="Cambria"/>
-              </a:rPr>
-              <a:t>5</a:t>
-            </a:r>
-          </a:p>
-        </p:txBody>
-      </p:sp>
-      <p:sp>
-        <p:nvSpPr>
-          <p:cNvPr id="21" name="TextBox 20"/>
+              <a:t>шероховатость и текстура поверхности; работает при облачности и без солнечного освещения</a:t>
+            </a:r>
+          </a:p>
+        </p:txBody>
+      </p:sp>
+      <p:sp>
+        <p:nvSpPr>
+          <p:cNvPr id="18" name="TextBox 17"/>
           <p:cNvSpPr txBox="1"/>
           <p:nvPr/>
         </p:nvSpPr>
         <p:spPr>
           <a:xfrm>
-            <a:off x="9735064" y="2971800"/>
-            <a:ext cx="1999426" cy="502920"/>
+            <a:off x="457200" y="5166360"/>
+            <a:ext cx="11277295" cy="1051560"/>
           </a:xfrm>
           <a:prstGeom prst="rect">
             <a:avLst/>
@@ -7912,174 +9171,29 @@
           <a:bodyPr wrap="square" anchor="t" lIns="0" rIns="0" tIns="0" bIns="0"/>
           <a:lstStyle/>
           <a:p>
-            <a:pPr algn="ctr">
-              <a:lnSpc>
-                <a:spcPct val="105000"/>
+            <a:pPr algn="l">
+              <a:lnSpc>
+                <a:spcPct val="125000"/>
               </a:lnSpc>
               <a:spcAft>
                 <a:spcPts val="0"/>
               </a:spcAft>
             </a:pPr>
             <a:r>
-              <a:rPr sz="1450" b="1" i="0">
-                <a:solidFill>
-                  <a:srgbClr val="8A6BB0"/>
-                </a:solidFill>
-                <a:latin typeface="Cambria"/>
-              </a:rPr>
-              <a:t>Сопоставление</a:t>
-            </a:r>
-          </a:p>
-        </p:txBody>
-      </p:sp>
-      <p:sp>
-        <p:nvSpPr>
-          <p:cNvPr id="22" name="TextBox 21"/>
-          <p:cNvSpPr txBox="1"/>
-          <p:nvPr/>
-        </p:nvSpPr>
-        <p:spPr>
-          <a:xfrm>
-            <a:off x="9735064" y="3520440"/>
-            <a:ext cx="1999426" cy="1463040"/>
-          </a:xfrm>
-          <a:prstGeom prst="rect">
-            <a:avLst/>
-          </a:prstGeom>
-          <a:noFill/>
-        </p:spPr>
-        <p:txBody>
-          <a:bodyPr wrap="square" anchor="t" lIns="0" rIns="0" tIns="0" bIns="0"/>
-          <a:lstStyle/>
-          <a:p>
-            <a:pPr algn="ctr">
-              <a:lnSpc>
-                <a:spcPct val="120000"/>
-              </a:lnSpc>
-              <a:spcAft>
-                <a:spcPts val="0"/>
-              </a:spcAft>
-            </a:pPr>
-            <a:r>
-              <a:rPr sz="1150" b="0" i="0">
-                <a:solidFill>
-                  <a:srgbClr val="E8E6DF"/>
-                </a:solidFill>
-                <a:latin typeface="Calibri"/>
-              </a:rPr>
-              <a:t>с публикациями и эталонной кривой</a:t>
-            </a:r>
-          </a:p>
-          <a:p>
-            <a:pPr algn="ctr">
-              <a:lnSpc>
-                <a:spcPct val="120000"/>
-              </a:lnSpc>
-              <a:spcAft>
-                <a:spcPts val="0"/>
-              </a:spcAft>
-            </a:pPr>
-            <a:r>
-              <a:rPr sz="1150" b="0" i="0">
-                <a:solidFill>
-                  <a:srgbClr val="E8E6DF"/>
-                </a:solidFill>
-                <a:latin typeface="Calibri"/>
-              </a:rPr>
-              <a:t>глубина/диаметр</a:t>
-            </a:r>
-          </a:p>
-        </p:txBody>
-      </p:sp>
-      <p:sp>
-        <p:nvSpPr>
-          <p:cNvPr id="23" name="Rounded Rectangle 22"/>
-          <p:cNvSpPr/>
-          <p:nvPr/>
-        </p:nvSpPr>
-        <p:spPr>
-          <a:xfrm>
-            <a:off x="457200" y="5394960"/>
-            <a:ext cx="11277295" cy="1051560"/>
-          </a:xfrm>
-          <a:prstGeom prst="roundRect">
-            <a:avLst>
-              <a:gd name="adj" fmla="val 4000"/>
-            </a:avLst>
-          </a:prstGeom>
-          <a:solidFill>
-            <a:srgbClr val="15181F"/>
-          </a:solidFill>
-          <a:ln>
-            <a:noFill/>
-          </a:ln>
-          <a:effectLst/>
-        </p:spPr>
-        <p:style>
-          <a:lnRef idx="1">
-            <a:schemeClr val="accent1"/>
-          </a:lnRef>
-          <a:fillRef idx="3">
-            <a:schemeClr val="accent1"/>
-          </a:fillRef>
-          <a:effectRef idx="2">
-            <a:schemeClr val="accent1"/>
-          </a:effectRef>
-          <a:fontRef idx="minor">
-            <a:schemeClr val="lt1"/>
-          </a:fontRef>
-        </p:style>
-        <p:txBody>
-          <a:bodyPr rtlCol="0" anchor="ctr"/>
-          <a:lstStyle/>
-          <a:p>
-            <a:pPr algn="ctr"/>
-          </a:p>
-        </p:txBody>
-      </p:sp>
-      <p:sp>
-        <p:nvSpPr>
-          <p:cNvPr id="24" name="TextBox 23"/>
-          <p:cNvSpPr txBox="1"/>
-          <p:nvPr/>
-        </p:nvSpPr>
-        <p:spPr>
-          <a:xfrm>
-            <a:off x="777240" y="5559552"/>
-            <a:ext cx="10637215" cy="777240"/>
-          </a:xfrm>
-          <a:prstGeom prst="rect">
-            <a:avLst/>
-          </a:prstGeom>
-          <a:noFill/>
-        </p:spPr>
-        <p:txBody>
-          <a:bodyPr wrap="square" anchor="ctr" lIns="0" rIns="0" tIns="0" bIns="0"/>
-          <a:lstStyle/>
-          <a:p>
-            <a:pPr algn="l">
-              <a:lnSpc>
-                <a:spcPct val="120000"/>
-              </a:lnSpc>
-              <a:spcAft>
-                <a:spcPts val="0"/>
-              </a:spcAft>
-            </a:pPr>
-            <a:r>
               <a:rPr sz="1250" b="0" i="1">
                 <a:solidFill>
-                  <a:srgbClr val="E8E6DF"/>
-                </a:solidFill>
-                <a:latin typeface="Calibri"/>
-              </a:rPr>
-              <a:t>Источник рельефа выбирается автоматически по приоритету: лидар USGS 3DEP (1 м, США) → Copernicus GLO-30 (~30 м, глобально) → SRTM (запасной вариант).</a:t>
-            </a:r>
-          </a:p>
-        </p:txBody>
-      </p:sp>
-      <p:sp>
-        <p:nvSpPr>
-          <p:cNvPr id="25" name="TextBox 24"/>
+                  <a:srgbClr val="9B978D"/>
+                </a:solidFill>
+                <a:latin typeface="Calibri"/>
+              </a:rPr>
+              <a:t>Развитие глобальных радарных моделей рельефа (включая TanDEM-X) создало возможности для систематического морфометрического анализа известных структур и поиска новых кандидатов (Gottwald et al., 2017).</a:t>
+            </a:r>
+          </a:p>
+        </p:txBody>
+      </p:sp>
+      <p:sp>
+        <p:nvSpPr>
+          <p:cNvPr id="19" name="TextBox 18"/>
           <p:cNvSpPr txBox="1"/>
           <p:nvPr/>
         </p:nvSpPr>
@@ -8131,7 +9245,7 @@
     <p:bg>
       <p:bgPr>
         <a:solidFill>
-          <a:srgbClr val="0B0D13"/>
+          <a:srgbClr val="10203C"/>
         </a:solidFill>
         <a:effectLst/>
       </p:bgPr>
@@ -8178,77 +9292,67 @@
                 </a:solidFill>
                 <a:latin typeface="Cambria"/>
               </a:rPr>
-              <a:t>Кейс 1 — Барринджер (Meteor Crater)</a:t>
-            </a:r>
-          </a:p>
-        </p:txBody>
-      </p:sp>
-      <p:pic>
-        <p:nvPicPr>
-          <p:cNvPr id="3" name="Picture 2" descr="case_Barringer.png"/>
-          <p:cNvPicPr>
-            <a:picLocks noChangeAspect="1"/>
-          </p:cNvPicPr>
-          <p:nvPr/>
-        </p:nvPicPr>
-        <p:blipFill>
-          <a:blip r:embed="rId2"/>
-          <a:stretch>
-            <a:fillRect/>
-          </a:stretch>
-        </p:blipFill>
-        <p:spPr>
-          <a:xfrm>
-            <a:off x="457200" y="1417320"/>
-            <a:ext cx="7178040" cy="3974643"/>
-          </a:xfrm>
-          <a:prstGeom prst="rect">
-            <a:avLst/>
-          </a:prstGeom>
-        </p:spPr>
-      </p:pic>
-      <p:pic>
-        <p:nvPicPr>
-          <p:cNvPr id="4" name="Picture 3" descr="S2_RGB_Barringer__Meteor_Crater______.png"/>
-          <p:cNvPicPr>
-            <a:picLocks noChangeAspect="1"/>
-          </p:cNvPicPr>
-          <p:nvPr/>
-        </p:nvPicPr>
-        <p:blipFill>
-          <a:blip r:embed="rId3"/>
-          <a:stretch>
-            <a:fillRect/>
-          </a:stretch>
-        </p:blipFill>
-        <p:spPr>
-          <a:xfrm>
-            <a:off x="8518522" y="1417320"/>
-            <a:ext cx="2607009" cy="2148840"/>
-          </a:xfrm>
-          <a:prstGeom prst="rect">
-            <a:avLst/>
-          </a:prstGeom>
-        </p:spPr>
-      </p:pic>
-      <p:sp>
-        <p:nvSpPr>
-          <p:cNvPr id="5" name="Rounded Rectangle 4"/>
+              <a:t>Наш воспроизводимый конвейер</a:t>
+            </a:r>
+          </a:p>
+        </p:txBody>
+      </p:sp>
+      <p:sp>
+        <p:nvSpPr>
+          <p:cNvPr id="3" name="TextBox 2"/>
+          <p:cNvSpPr txBox="1"/>
+          <p:nvPr/>
+        </p:nvSpPr>
+        <p:spPr>
+          <a:xfrm>
+            <a:off x="457200" y="932688"/>
+            <a:ext cx="11277295" cy="320040"/>
+          </a:xfrm>
+          <a:prstGeom prst="rect">
+            <a:avLst/>
+          </a:prstGeom>
+          <a:noFill/>
+        </p:spPr>
+        <p:txBody>
+          <a:bodyPr wrap="square" anchor="t" lIns="0" rIns="0" tIns="0" bIns="0"/>
+          <a:lstStyle/>
+          <a:p>
+            <a:pPr algn="l">
+              <a:lnSpc>
+                <a:spcPct val="100000"/>
+              </a:lnSpc>
+              <a:spcAft>
+                <a:spcPts val="0"/>
+              </a:spcAft>
+            </a:pPr>
+            <a:r>
+              <a:rPr sz="1300" b="0" i="1">
+                <a:solidFill>
+                  <a:srgbClr val="9B978D"/>
+                </a:solidFill>
+                <a:latin typeface="Calibri"/>
+              </a:rPr>
+              <a:t>Один и тот же скрипт, применённый без изменений к трём разным кратерам</a:t>
+            </a:r>
+          </a:p>
+        </p:txBody>
+      </p:sp>
+      <p:sp>
+        <p:nvSpPr>
+          <p:cNvPr id="4" name="Oval 3"/>
           <p:cNvSpPr/>
           <p:nvPr/>
         </p:nvSpPr>
         <p:spPr>
           <a:xfrm>
-            <a:off x="7909560" y="3703320"/>
-            <a:ext cx="3824935" cy="2569464"/>
-          </a:xfrm>
-          <a:prstGeom prst="roundRect">
-            <a:avLst>
-              <a:gd name="adj" fmla="val 4000"/>
-            </a:avLst>
+            <a:off x="1114013" y="2011680"/>
+            <a:ext cx="685800" cy="685800"/>
+          </a:xfrm>
+          <a:prstGeom prst="ellipse">
+            <a:avLst/>
           </a:prstGeom>
           <a:solidFill>
-            <a:srgbClr val="15181F"/>
+            <a:srgbClr val="C1440E"/>
           </a:solidFill>
           <a:ln>
             <a:noFill/>
@@ -8270,6 +9374,59 @@
           </a:fontRef>
         </p:style>
         <p:txBody>
+          <a:bodyPr rtlCol="0" anchor="ctr" lIns="0" rIns="0" tIns="0" bIns="0"/>
+          <a:lstStyle/>
+          <a:p>
+            <a:pPr algn="ctr"/>
+            <a:r>
+              <a:rPr sz="2000" b="1">
+                <a:solidFill>
+                  <a:srgbClr val="10203C"/>
+                </a:solidFill>
+                <a:latin typeface="Cambria"/>
+              </a:rPr>
+              <a:t>1</a:t>
+            </a:r>
+          </a:p>
+        </p:txBody>
+      </p:sp>
+      <p:sp>
+        <p:nvSpPr>
+          <p:cNvPr id="5" name="Right Arrow 4"/>
+          <p:cNvSpPr/>
+          <p:nvPr/>
+        </p:nvSpPr>
+        <p:spPr>
+          <a:xfrm>
+            <a:off x="2410906" y="2258568"/>
+            <a:ext cx="411480" cy="201168"/>
+          </a:xfrm>
+          <a:prstGeom prst="rightArrow">
+            <a:avLst/>
+          </a:prstGeom>
+          <a:solidFill>
+            <a:srgbClr val="9B978D"/>
+          </a:solidFill>
+          <a:ln>
+            <a:noFill/>
+          </a:ln>
+          <a:effectLst/>
+        </p:spPr>
+        <p:style>
+          <a:lnRef idx="1">
+            <a:schemeClr val="accent1"/>
+          </a:lnRef>
+          <a:fillRef idx="3">
+            <a:schemeClr val="accent1"/>
+          </a:fillRef>
+          <a:effectRef idx="2">
+            <a:schemeClr val="accent1"/>
+          </a:effectRef>
+          <a:fontRef idx="minor">
+            <a:schemeClr val="lt1"/>
+          </a:fontRef>
+        </p:style>
+        <p:txBody>
           <a:bodyPr rtlCol="0" anchor="ctr"/>
           <a:lstStyle/>
           <a:p>
@@ -8285,8 +9442,8 @@
         </p:nvSpPr>
         <p:spPr>
           <a:xfrm>
-            <a:off x="8183880" y="3931920"/>
-            <a:ext cx="3276295" cy="329184"/>
+            <a:off x="457200" y="2971800"/>
+            <a:ext cx="1999426" cy="502920"/>
           </a:xfrm>
           <a:prstGeom prst="rect">
             <a:avLst/>
@@ -8297,194 +9454,876 @@
           <a:bodyPr wrap="square" anchor="t" lIns="0" rIns="0" tIns="0" bIns="0"/>
           <a:lstStyle/>
           <a:p>
-            <a:pPr algn="l">
-              <a:lnSpc>
-                <a:spcPct val="100000"/>
-              </a:lnSpc>
-            </a:pPr>
-            <a:r>
-              <a:rPr sz="1200" b="0" i="0">
-                <a:solidFill>
-                  <a:srgbClr val="9B978D"/>
-                </a:solidFill>
-                <a:latin typeface="Calibri"/>
-              </a:rPr>
-              <a:t>Диаметр:  </a:t>
-            </a:r>
-            <a:r>
-              <a:rPr sz="1600" b="1" i="0">
-                <a:solidFill>
-                  <a:srgbClr val="C1440E"/>
-                </a:solidFill>
-                <a:latin typeface="Calibri"/>
-              </a:rPr>
-              <a:t>1200 м</a:t>
-            </a:r>
-            <a:r>
-              <a:rPr sz="1100" b="0" i="1">
-                <a:solidFill>
-                  <a:srgbClr val="9B978D"/>
-                </a:solidFill>
-                <a:latin typeface="Calibri"/>
-              </a:rPr>
-              <a:t>   публ. 1200 м</a:t>
-            </a:r>
-          </a:p>
-        </p:txBody>
-      </p:sp>
-      <p:sp>
-        <p:nvSpPr>
-          <p:cNvPr id="7" name="TextBox 6"/>
-          <p:cNvSpPr txBox="1"/>
-          <p:nvPr/>
-        </p:nvSpPr>
-        <p:spPr>
-          <a:xfrm>
-            <a:off x="8183880" y="4315968"/>
-            <a:ext cx="3276295" cy="329184"/>
-          </a:xfrm>
-          <a:prstGeom prst="rect">
-            <a:avLst/>
-          </a:prstGeom>
-          <a:noFill/>
-        </p:spPr>
-        <p:txBody>
-          <a:bodyPr wrap="square" anchor="t" lIns="0" rIns="0" tIns="0" bIns="0"/>
-          <a:lstStyle/>
-          <a:p>
-            <a:pPr algn="l">
-              <a:lnSpc>
-                <a:spcPct val="100000"/>
-              </a:lnSpc>
-            </a:pPr>
-            <a:r>
-              <a:rPr sz="1200" b="0" i="0">
-                <a:solidFill>
-                  <a:srgbClr val="9B978D"/>
-                </a:solidFill>
-                <a:latin typeface="Calibri"/>
-              </a:rPr>
-              <a:t>Глубина:  </a:t>
-            </a:r>
-            <a:r>
-              <a:rPr sz="1600" b="1" i="0">
-                <a:solidFill>
-                  <a:srgbClr val="C1440E"/>
-                </a:solidFill>
-                <a:latin typeface="Calibri"/>
-              </a:rPr>
-              <a:t>162 м</a:t>
-            </a:r>
-            <a:r>
-              <a:rPr sz="1100" b="0" i="1">
-                <a:solidFill>
-                  <a:srgbClr val="9B978D"/>
-                </a:solidFill>
-                <a:latin typeface="Calibri"/>
-              </a:rPr>
-              <a:t>   публ. 170 м</a:t>
-            </a:r>
-          </a:p>
-        </p:txBody>
-      </p:sp>
-      <p:sp>
-        <p:nvSpPr>
-          <p:cNvPr id="8" name="TextBox 7"/>
-          <p:cNvSpPr txBox="1"/>
-          <p:nvPr/>
-        </p:nvSpPr>
-        <p:spPr>
-          <a:xfrm>
-            <a:off x="8183880" y="4700016"/>
-            <a:ext cx="3276295" cy="329184"/>
-          </a:xfrm>
-          <a:prstGeom prst="rect">
-            <a:avLst/>
-          </a:prstGeom>
-          <a:noFill/>
-        </p:spPr>
-        <p:txBody>
-          <a:bodyPr wrap="square" anchor="t" lIns="0" rIns="0" tIns="0" bIns="0"/>
-          <a:lstStyle/>
-          <a:p>
-            <a:pPr algn="l">
-              <a:lnSpc>
-                <a:spcPct val="100000"/>
-              </a:lnSpc>
-            </a:pPr>
-            <a:r>
-              <a:rPr sz="1200" b="0" i="0">
-                <a:solidFill>
-                  <a:srgbClr val="9B978D"/>
-                </a:solidFill>
-                <a:latin typeface="Calibri"/>
-              </a:rPr>
-              <a:t>d/D:  </a:t>
-            </a:r>
-            <a:r>
-              <a:rPr sz="1600" b="1" i="0">
-                <a:solidFill>
-                  <a:srgbClr val="C1440E"/>
-                </a:solidFill>
-                <a:latin typeface="Calibri"/>
-              </a:rPr>
-              <a:t>0.135</a:t>
-            </a:r>
-            <a:r>
-              <a:rPr sz="1100" b="0" i="1">
-                <a:solidFill>
-                  <a:srgbClr val="9B978D"/>
-                </a:solidFill>
-                <a:latin typeface="Calibri"/>
-              </a:rPr>
-              <a:t>   публ. 0.142</a:t>
-            </a:r>
-          </a:p>
-        </p:txBody>
-      </p:sp>
-      <p:sp>
-        <p:nvSpPr>
-          <p:cNvPr id="9" name="TextBox 8"/>
-          <p:cNvSpPr txBox="1"/>
-          <p:nvPr/>
-        </p:nvSpPr>
-        <p:spPr>
-          <a:xfrm>
-            <a:off x="8183880" y="5175504"/>
-            <a:ext cx="3276295" cy="914400"/>
-          </a:xfrm>
-          <a:prstGeom prst="rect">
-            <a:avLst/>
-          </a:prstGeom>
-          <a:noFill/>
-        </p:spPr>
-        <p:txBody>
-          <a:bodyPr wrap="square" anchor="t" lIns="0" rIns="0" tIns="0" bIns="0"/>
-          <a:lstStyle/>
-          <a:p>
-            <a:pPr algn="l">
-              <a:lnSpc>
-                <a:spcPct val="122000"/>
+            <a:pPr algn="ctr">
+              <a:lnSpc>
+                <a:spcPct val="105000"/>
               </a:lnSpc>
               <a:spcAft>
                 <a:spcPts val="0"/>
               </a:spcAft>
             </a:pPr>
             <a:r>
-              <a:rPr sz="1100" b="0" i="1">
+              <a:rPr sz="1450" b="1" i="0">
+                <a:solidFill>
+                  <a:srgbClr val="C1440E"/>
+                </a:solidFill>
+                <a:latin typeface="Cambria"/>
+              </a:rPr>
+              <a:t>Координаты</a:t>
+            </a:r>
+          </a:p>
+        </p:txBody>
+      </p:sp>
+      <p:sp>
+        <p:nvSpPr>
+          <p:cNvPr id="7" name="TextBox 6"/>
+          <p:cNvSpPr txBox="1"/>
+          <p:nvPr/>
+        </p:nvSpPr>
+        <p:spPr>
+          <a:xfrm>
+            <a:off x="457200" y="3520440"/>
+            <a:ext cx="1999426" cy="1463040"/>
+          </a:xfrm>
+          <a:prstGeom prst="rect">
+            <a:avLst/>
+          </a:prstGeom>
+          <a:noFill/>
+        </p:spPr>
+        <p:txBody>
+          <a:bodyPr wrap="square" anchor="t" lIns="0" rIns="0" tIns="0" bIns="0"/>
+          <a:lstStyle/>
+          <a:p>
+            <a:pPr algn="ctr">
+              <a:lnSpc>
+                <a:spcPct val="120000"/>
+              </a:lnSpc>
+              <a:spcAft>
+                <a:spcPts val="0"/>
+              </a:spcAft>
+            </a:pPr>
+            <a:r>
+              <a:rPr sz="1150" b="0" i="0">
                 <a:solidFill>
                   <a:srgbClr val="E8E6DF"/>
                 </a:solidFill>
                 <a:latin typeface="Calibri"/>
               </a:rPr>
-              <a:t>Осадочные породы, ~50 тыс. лет. Наилучшее совпадение с публикацией — валидация метода на эталонном объекте.</a:t>
-            </a:r>
+              <a:t>справочник кратеров или клик по центру на снимке</a:t>
+            </a:r>
+          </a:p>
+        </p:txBody>
+      </p:sp>
+      <p:sp>
+        <p:nvSpPr>
+          <p:cNvPr id="8" name="Oval 7"/>
+          <p:cNvSpPr/>
+          <p:nvPr/>
+        </p:nvSpPr>
+        <p:spPr>
+          <a:xfrm>
+            <a:off x="3433479" y="2011680"/>
+            <a:ext cx="685800" cy="685800"/>
+          </a:xfrm>
+          <a:prstGeom prst="ellipse">
+            <a:avLst/>
+          </a:prstGeom>
+          <a:solidFill>
+            <a:srgbClr val="E07A5F"/>
+          </a:solidFill>
+          <a:ln>
+            <a:noFill/>
+          </a:ln>
+          <a:effectLst/>
+        </p:spPr>
+        <p:style>
+          <a:lnRef idx="1">
+            <a:schemeClr val="accent1"/>
+          </a:lnRef>
+          <a:fillRef idx="3">
+            <a:schemeClr val="accent1"/>
+          </a:fillRef>
+          <a:effectRef idx="2">
+            <a:schemeClr val="accent1"/>
+          </a:effectRef>
+          <a:fontRef idx="minor">
+            <a:schemeClr val="lt1"/>
+          </a:fontRef>
+        </p:style>
+        <p:txBody>
+          <a:bodyPr rtlCol="0" anchor="ctr" lIns="0" rIns="0" tIns="0" bIns="0"/>
+          <a:lstStyle/>
+          <a:p>
+            <a:pPr algn="ctr"/>
+            <a:r>
+              <a:rPr sz="2000" b="1">
+                <a:solidFill>
+                  <a:srgbClr val="10203C"/>
+                </a:solidFill>
+                <a:latin typeface="Cambria"/>
+              </a:rPr>
+              <a:t>2</a:t>
+            </a:r>
+          </a:p>
+        </p:txBody>
+      </p:sp>
+      <p:sp>
+        <p:nvSpPr>
+          <p:cNvPr id="9" name="Right Arrow 8"/>
+          <p:cNvSpPr/>
+          <p:nvPr/>
+        </p:nvSpPr>
+        <p:spPr>
+          <a:xfrm>
+            <a:off x="4730372" y="2258568"/>
+            <a:ext cx="411480" cy="201168"/>
+          </a:xfrm>
+          <a:prstGeom prst="rightArrow">
+            <a:avLst/>
+          </a:prstGeom>
+          <a:solidFill>
+            <a:srgbClr val="9B978D"/>
+          </a:solidFill>
+          <a:ln>
+            <a:noFill/>
+          </a:ln>
+          <a:effectLst/>
+        </p:spPr>
+        <p:style>
+          <a:lnRef idx="1">
+            <a:schemeClr val="accent1"/>
+          </a:lnRef>
+          <a:fillRef idx="3">
+            <a:schemeClr val="accent1"/>
+          </a:fillRef>
+          <a:effectRef idx="2">
+            <a:schemeClr val="accent1"/>
+          </a:effectRef>
+          <a:fontRef idx="minor">
+            <a:schemeClr val="lt1"/>
+          </a:fontRef>
+        </p:style>
+        <p:txBody>
+          <a:bodyPr rtlCol="0" anchor="ctr"/>
+          <a:lstStyle/>
+          <a:p>
+            <a:pPr algn="ctr"/>
           </a:p>
         </p:txBody>
       </p:sp>
       <p:sp>
         <p:nvSpPr>
           <p:cNvPr id="10" name="TextBox 9"/>
+          <p:cNvSpPr txBox="1"/>
+          <p:nvPr/>
+        </p:nvSpPr>
+        <p:spPr>
+          <a:xfrm>
+            <a:off x="2776666" y="2971800"/>
+            <a:ext cx="1999426" cy="502920"/>
+          </a:xfrm>
+          <a:prstGeom prst="rect">
+            <a:avLst/>
+          </a:prstGeom>
+          <a:noFill/>
+        </p:spPr>
+        <p:txBody>
+          <a:bodyPr wrap="square" anchor="t" lIns="0" rIns="0" tIns="0" bIns="0"/>
+          <a:lstStyle/>
+          <a:p>
+            <a:pPr algn="ctr">
+              <a:lnSpc>
+                <a:spcPct val="105000"/>
+              </a:lnSpc>
+              <a:spcAft>
+                <a:spcPts val="0"/>
+              </a:spcAft>
+            </a:pPr>
+            <a:r>
+              <a:rPr sz="1450" b="1" i="0">
+                <a:solidFill>
+                  <a:srgbClr val="E07A5F"/>
+                </a:solidFill>
+                <a:latin typeface="Cambria"/>
+              </a:rPr>
+              <a:t>N азимутов</a:t>
+            </a:r>
+          </a:p>
+        </p:txBody>
+      </p:sp>
+      <p:sp>
+        <p:nvSpPr>
+          <p:cNvPr id="11" name="TextBox 10"/>
+          <p:cNvSpPr txBox="1"/>
+          <p:nvPr/>
+        </p:nvSpPr>
+        <p:spPr>
+          <a:xfrm>
+            <a:off x="2776666" y="3520440"/>
+            <a:ext cx="1999426" cy="1463040"/>
+          </a:xfrm>
+          <a:prstGeom prst="rect">
+            <a:avLst/>
+          </a:prstGeom>
+          <a:noFill/>
+        </p:spPr>
+        <p:txBody>
+          <a:bodyPr wrap="square" anchor="t" lIns="0" rIns="0" tIns="0" bIns="0"/>
+          <a:lstStyle/>
+          <a:p>
+            <a:pPr algn="ctr">
+              <a:lnSpc>
+                <a:spcPct val="120000"/>
+              </a:lnSpc>
+              <a:spcAft>
+                <a:spcPts val="0"/>
+              </a:spcAft>
+            </a:pPr>
+            <a:r>
+              <a:rPr sz="1150" b="0" i="0">
+                <a:solidFill>
+                  <a:srgbClr val="E8E6DF"/>
+                </a:solidFill>
+                <a:latin typeface="Calibri"/>
+              </a:rPr>
+              <a:t>радиальные лучи вокруг центра кратера</a:t>
+            </a:r>
+          </a:p>
+        </p:txBody>
+      </p:sp>
+      <p:sp>
+        <p:nvSpPr>
+          <p:cNvPr id="12" name="Oval 11"/>
+          <p:cNvSpPr/>
+          <p:nvPr/>
+        </p:nvSpPr>
+        <p:spPr>
+          <a:xfrm>
+            <a:off x="5752945" y="2011680"/>
+            <a:ext cx="685800" cy="685800"/>
+          </a:xfrm>
+          <a:prstGeom prst="ellipse">
+            <a:avLst/>
+          </a:prstGeom>
+          <a:solidFill>
+            <a:srgbClr val="E0A458"/>
+          </a:solidFill>
+          <a:ln>
+            <a:noFill/>
+          </a:ln>
+          <a:effectLst/>
+        </p:spPr>
+        <p:style>
+          <a:lnRef idx="1">
+            <a:schemeClr val="accent1"/>
+          </a:lnRef>
+          <a:fillRef idx="3">
+            <a:schemeClr val="accent1"/>
+          </a:fillRef>
+          <a:effectRef idx="2">
+            <a:schemeClr val="accent1"/>
+          </a:effectRef>
+          <a:fontRef idx="minor">
+            <a:schemeClr val="lt1"/>
+          </a:fontRef>
+        </p:style>
+        <p:txBody>
+          <a:bodyPr rtlCol="0" anchor="ctr" lIns="0" rIns="0" tIns="0" bIns="0"/>
+          <a:lstStyle/>
+          <a:p>
+            <a:pPr algn="ctr"/>
+            <a:r>
+              <a:rPr sz="2000" b="1">
+                <a:solidFill>
+                  <a:srgbClr val="10203C"/>
+                </a:solidFill>
+                <a:latin typeface="Cambria"/>
+              </a:rPr>
+              <a:t>3</a:t>
+            </a:r>
+          </a:p>
+        </p:txBody>
+      </p:sp>
+      <p:sp>
+        <p:nvSpPr>
+          <p:cNvPr id="13" name="Right Arrow 12"/>
+          <p:cNvSpPr/>
+          <p:nvPr/>
+        </p:nvSpPr>
+        <p:spPr>
+          <a:xfrm>
+            <a:off x="7049838" y="2258568"/>
+            <a:ext cx="411480" cy="201168"/>
+          </a:xfrm>
+          <a:prstGeom prst="rightArrow">
+            <a:avLst/>
+          </a:prstGeom>
+          <a:solidFill>
+            <a:srgbClr val="9B978D"/>
+          </a:solidFill>
+          <a:ln>
+            <a:noFill/>
+          </a:ln>
+          <a:effectLst/>
+        </p:spPr>
+        <p:style>
+          <a:lnRef idx="1">
+            <a:schemeClr val="accent1"/>
+          </a:lnRef>
+          <a:fillRef idx="3">
+            <a:schemeClr val="accent1"/>
+          </a:fillRef>
+          <a:effectRef idx="2">
+            <a:schemeClr val="accent1"/>
+          </a:effectRef>
+          <a:fontRef idx="minor">
+            <a:schemeClr val="lt1"/>
+          </a:fontRef>
+        </p:style>
+        <p:txBody>
+          <a:bodyPr rtlCol="0" anchor="ctr"/>
+          <a:lstStyle/>
+          <a:p>
+            <a:pPr algn="ctr"/>
+          </a:p>
+        </p:txBody>
+      </p:sp>
+      <p:sp>
+        <p:nvSpPr>
+          <p:cNvPr id="14" name="TextBox 13"/>
+          <p:cNvSpPr txBox="1"/>
+          <p:nvPr/>
+        </p:nvSpPr>
+        <p:spPr>
+          <a:xfrm>
+            <a:off x="5096132" y="2971800"/>
+            <a:ext cx="1999426" cy="502920"/>
+          </a:xfrm>
+          <a:prstGeom prst="rect">
+            <a:avLst/>
+          </a:prstGeom>
+          <a:noFill/>
+        </p:spPr>
+        <p:txBody>
+          <a:bodyPr wrap="square" anchor="t" lIns="0" rIns="0" tIns="0" bIns="0"/>
+          <a:lstStyle/>
+          <a:p>
+            <a:pPr algn="ctr">
+              <a:lnSpc>
+                <a:spcPct val="105000"/>
+              </a:lnSpc>
+              <a:spcAft>
+                <a:spcPts val="0"/>
+              </a:spcAft>
+            </a:pPr>
+            <a:r>
+              <a:rPr sz="1450" b="1" i="0">
+                <a:solidFill>
+                  <a:srgbClr val="E0A458"/>
+                </a:solidFill>
+                <a:latin typeface="Cambria"/>
+              </a:rPr>
+              <a:t>Выборка вдоль лучей</a:t>
+            </a:r>
+          </a:p>
+        </p:txBody>
+      </p:sp>
+      <p:sp>
+        <p:nvSpPr>
+          <p:cNvPr id="15" name="TextBox 14"/>
+          <p:cNvSpPr txBox="1"/>
+          <p:nvPr/>
+        </p:nvSpPr>
+        <p:spPr>
+          <a:xfrm>
+            <a:off x="5096132" y="3520440"/>
+            <a:ext cx="1999426" cy="1463040"/>
+          </a:xfrm>
+          <a:prstGeom prst="rect">
+            <a:avLst/>
+          </a:prstGeom>
+          <a:noFill/>
+        </p:spPr>
+        <p:txBody>
+          <a:bodyPr wrap="square" anchor="t" lIns="0" rIns="0" tIns="0" bIns="0"/>
+          <a:lstStyle/>
+          <a:p>
+            <a:pPr algn="ctr">
+              <a:lnSpc>
+                <a:spcPct val="120000"/>
+              </a:lnSpc>
+              <a:spcAft>
+                <a:spcPts val="0"/>
+              </a:spcAft>
+            </a:pPr>
+            <a:r>
+              <a:rPr sz="1150" b="0" i="0">
+                <a:solidFill>
+                  <a:srgbClr val="E8E6DF"/>
+                </a:solidFill>
+                <a:latin typeface="Calibri"/>
+              </a:rPr>
+              <a:t>DEM + VV/VH (Sentinel-1) + slope + hillshade</a:t>
+            </a:r>
+          </a:p>
+          <a:p>
+            <a:pPr algn="ctr">
+              <a:lnSpc>
+                <a:spcPct val="120000"/>
+              </a:lnSpc>
+              <a:spcAft>
+                <a:spcPts val="0"/>
+              </a:spcAft>
+            </a:pPr>
+            <a:r>
+              <a:rPr sz="1150" b="0" i="0">
+                <a:solidFill>
+                  <a:srgbClr val="E8E6DF"/>
+                </a:solidFill>
+                <a:latin typeface="Calibri"/>
+              </a:rPr>
+              <a:t>(Google Earth Engine)</a:t>
+            </a:r>
+          </a:p>
+        </p:txBody>
+      </p:sp>
+      <p:sp>
+        <p:nvSpPr>
+          <p:cNvPr id="16" name="Oval 15"/>
+          <p:cNvSpPr/>
+          <p:nvPr/>
+        </p:nvSpPr>
+        <p:spPr>
+          <a:xfrm>
+            <a:off x="8072411" y="2011680"/>
+            <a:ext cx="685800" cy="685800"/>
+          </a:xfrm>
+          <a:prstGeom prst="ellipse">
+            <a:avLst/>
+          </a:prstGeom>
+          <a:solidFill>
+            <a:srgbClr val="5B8A72"/>
+          </a:solidFill>
+          <a:ln>
+            <a:noFill/>
+          </a:ln>
+          <a:effectLst/>
+        </p:spPr>
+        <p:style>
+          <a:lnRef idx="1">
+            <a:schemeClr val="accent1"/>
+          </a:lnRef>
+          <a:fillRef idx="3">
+            <a:schemeClr val="accent1"/>
+          </a:fillRef>
+          <a:effectRef idx="2">
+            <a:schemeClr val="accent1"/>
+          </a:effectRef>
+          <a:fontRef idx="minor">
+            <a:schemeClr val="lt1"/>
+          </a:fontRef>
+        </p:style>
+        <p:txBody>
+          <a:bodyPr rtlCol="0" anchor="ctr" lIns="0" rIns="0" tIns="0" bIns="0"/>
+          <a:lstStyle/>
+          <a:p>
+            <a:pPr algn="ctr"/>
+            <a:r>
+              <a:rPr sz="2000" b="1">
+                <a:solidFill>
+                  <a:srgbClr val="10203C"/>
+                </a:solidFill>
+                <a:latin typeface="Cambria"/>
+              </a:rPr>
+              <a:t>4</a:t>
+            </a:r>
+          </a:p>
+        </p:txBody>
+      </p:sp>
+      <p:sp>
+        <p:nvSpPr>
+          <p:cNvPr id="17" name="Right Arrow 16"/>
+          <p:cNvSpPr/>
+          <p:nvPr/>
+        </p:nvSpPr>
+        <p:spPr>
+          <a:xfrm>
+            <a:off x="9369304" y="2258568"/>
+            <a:ext cx="411480" cy="201168"/>
+          </a:xfrm>
+          <a:prstGeom prst="rightArrow">
+            <a:avLst/>
+          </a:prstGeom>
+          <a:solidFill>
+            <a:srgbClr val="9B978D"/>
+          </a:solidFill>
+          <a:ln>
+            <a:noFill/>
+          </a:ln>
+          <a:effectLst/>
+        </p:spPr>
+        <p:style>
+          <a:lnRef idx="1">
+            <a:schemeClr val="accent1"/>
+          </a:lnRef>
+          <a:fillRef idx="3">
+            <a:schemeClr val="accent1"/>
+          </a:fillRef>
+          <a:effectRef idx="2">
+            <a:schemeClr val="accent1"/>
+          </a:effectRef>
+          <a:fontRef idx="minor">
+            <a:schemeClr val="lt1"/>
+          </a:fontRef>
+        </p:style>
+        <p:txBody>
+          <a:bodyPr rtlCol="0" anchor="ctr"/>
+          <a:lstStyle/>
+          <a:p>
+            <a:pPr algn="ctr"/>
+          </a:p>
+        </p:txBody>
+      </p:sp>
+      <p:sp>
+        <p:nvSpPr>
+          <p:cNvPr id="18" name="TextBox 17"/>
+          <p:cNvSpPr txBox="1"/>
+          <p:nvPr/>
+        </p:nvSpPr>
+        <p:spPr>
+          <a:xfrm>
+            <a:off x="7415598" y="2971800"/>
+            <a:ext cx="1999426" cy="502920"/>
+          </a:xfrm>
+          <a:prstGeom prst="rect">
+            <a:avLst/>
+          </a:prstGeom>
+          <a:noFill/>
+        </p:spPr>
+        <p:txBody>
+          <a:bodyPr wrap="square" anchor="t" lIns="0" rIns="0" tIns="0" bIns="0"/>
+          <a:lstStyle/>
+          <a:p>
+            <a:pPr algn="ctr">
+              <a:lnSpc>
+                <a:spcPct val="105000"/>
+              </a:lnSpc>
+              <a:spcAft>
+                <a:spcPts val="0"/>
+              </a:spcAft>
+            </a:pPr>
+            <a:r>
+              <a:rPr sz="1450" b="1" i="0">
+                <a:solidFill>
+                  <a:srgbClr val="5B8A72"/>
+                </a:solidFill>
+                <a:latin typeface="Cambria"/>
+              </a:rPr>
+              <a:t>CSV → Python</a:t>
+            </a:r>
+          </a:p>
+        </p:txBody>
+      </p:sp>
+      <p:sp>
+        <p:nvSpPr>
+          <p:cNvPr id="19" name="TextBox 18"/>
+          <p:cNvSpPr txBox="1"/>
+          <p:nvPr/>
+        </p:nvSpPr>
+        <p:spPr>
+          <a:xfrm>
+            <a:off x="7415598" y="3520440"/>
+            <a:ext cx="1999426" cy="1463040"/>
+          </a:xfrm>
+          <a:prstGeom prst="rect">
+            <a:avLst/>
+          </a:prstGeom>
+          <a:noFill/>
+        </p:spPr>
+        <p:txBody>
+          <a:bodyPr wrap="square" anchor="t" lIns="0" rIns="0" tIns="0" bIns="0"/>
+          <a:lstStyle/>
+          <a:p>
+            <a:pPr algn="ctr">
+              <a:lnSpc>
+                <a:spcPct val="120000"/>
+              </a:lnSpc>
+              <a:spcAft>
+                <a:spcPts val="0"/>
+              </a:spcAft>
+            </a:pPr>
+            <a:r>
+              <a:rPr sz="1150" b="0" i="0">
+                <a:solidFill>
+                  <a:srgbClr val="E8E6DF"/>
+                </a:solidFill>
+                <a:latin typeface="Calibri"/>
+              </a:rPr>
+              <a:t>дно, гребень вала, диаметр, глубина,</a:t>
+            </a:r>
+          </a:p>
+          <a:p>
+            <a:pPr algn="ctr">
+              <a:lnSpc>
+                <a:spcPct val="120000"/>
+              </a:lnSpc>
+              <a:spcAft>
+                <a:spcPts val="0"/>
+              </a:spcAft>
+            </a:pPr>
+            <a:r>
+              <a:rPr sz="1150" b="0" i="0">
+                <a:solidFill>
+                  <a:srgbClr val="E8E6DF"/>
+                </a:solidFill>
+                <a:latin typeface="Calibri"/>
+              </a:rPr>
+              <a:t>индекс округлости</a:t>
+            </a:r>
+          </a:p>
+        </p:txBody>
+      </p:sp>
+      <p:sp>
+        <p:nvSpPr>
+          <p:cNvPr id="20" name="Oval 19"/>
+          <p:cNvSpPr/>
+          <p:nvPr/>
+        </p:nvSpPr>
+        <p:spPr>
+          <a:xfrm>
+            <a:off x="10391877" y="2011680"/>
+            <a:ext cx="685800" cy="685800"/>
+          </a:xfrm>
+          <a:prstGeom prst="ellipse">
+            <a:avLst/>
+          </a:prstGeom>
+          <a:solidFill>
+            <a:srgbClr val="8A6BB0"/>
+          </a:solidFill>
+          <a:ln>
+            <a:noFill/>
+          </a:ln>
+          <a:effectLst/>
+        </p:spPr>
+        <p:style>
+          <a:lnRef idx="1">
+            <a:schemeClr val="accent1"/>
+          </a:lnRef>
+          <a:fillRef idx="3">
+            <a:schemeClr val="accent1"/>
+          </a:fillRef>
+          <a:effectRef idx="2">
+            <a:schemeClr val="accent1"/>
+          </a:effectRef>
+          <a:fontRef idx="minor">
+            <a:schemeClr val="lt1"/>
+          </a:fontRef>
+        </p:style>
+        <p:txBody>
+          <a:bodyPr rtlCol="0" anchor="ctr" lIns="0" rIns="0" tIns="0" bIns="0"/>
+          <a:lstStyle/>
+          <a:p>
+            <a:pPr algn="ctr"/>
+            <a:r>
+              <a:rPr sz="2000" b="1">
+                <a:solidFill>
+                  <a:srgbClr val="10203C"/>
+                </a:solidFill>
+                <a:latin typeface="Cambria"/>
+              </a:rPr>
+              <a:t>5</a:t>
+            </a:r>
+          </a:p>
+        </p:txBody>
+      </p:sp>
+      <p:sp>
+        <p:nvSpPr>
+          <p:cNvPr id="21" name="TextBox 20"/>
+          <p:cNvSpPr txBox="1"/>
+          <p:nvPr/>
+        </p:nvSpPr>
+        <p:spPr>
+          <a:xfrm>
+            <a:off x="9735064" y="2971800"/>
+            <a:ext cx="1999426" cy="502920"/>
+          </a:xfrm>
+          <a:prstGeom prst="rect">
+            <a:avLst/>
+          </a:prstGeom>
+          <a:noFill/>
+        </p:spPr>
+        <p:txBody>
+          <a:bodyPr wrap="square" anchor="t" lIns="0" rIns="0" tIns="0" bIns="0"/>
+          <a:lstStyle/>
+          <a:p>
+            <a:pPr algn="ctr">
+              <a:lnSpc>
+                <a:spcPct val="105000"/>
+              </a:lnSpc>
+              <a:spcAft>
+                <a:spcPts val="0"/>
+              </a:spcAft>
+            </a:pPr>
+            <a:r>
+              <a:rPr sz="1450" b="1" i="0">
+                <a:solidFill>
+                  <a:srgbClr val="8A6BB0"/>
+                </a:solidFill>
+                <a:latin typeface="Cambria"/>
+              </a:rPr>
+              <a:t>Сопоставление</a:t>
+            </a:r>
+          </a:p>
+        </p:txBody>
+      </p:sp>
+      <p:sp>
+        <p:nvSpPr>
+          <p:cNvPr id="22" name="TextBox 21"/>
+          <p:cNvSpPr txBox="1"/>
+          <p:nvPr/>
+        </p:nvSpPr>
+        <p:spPr>
+          <a:xfrm>
+            <a:off x="9735064" y="3520440"/>
+            <a:ext cx="1999426" cy="1463040"/>
+          </a:xfrm>
+          <a:prstGeom prst="rect">
+            <a:avLst/>
+          </a:prstGeom>
+          <a:noFill/>
+        </p:spPr>
+        <p:txBody>
+          <a:bodyPr wrap="square" anchor="t" lIns="0" rIns="0" tIns="0" bIns="0"/>
+          <a:lstStyle/>
+          <a:p>
+            <a:pPr algn="ctr">
+              <a:lnSpc>
+                <a:spcPct val="120000"/>
+              </a:lnSpc>
+              <a:spcAft>
+                <a:spcPts val="0"/>
+              </a:spcAft>
+            </a:pPr>
+            <a:r>
+              <a:rPr sz="1150" b="0" i="0">
+                <a:solidFill>
+                  <a:srgbClr val="E8E6DF"/>
+                </a:solidFill>
+                <a:latin typeface="Calibri"/>
+              </a:rPr>
+              <a:t>с публикациями и эталонной кривой</a:t>
+            </a:r>
+          </a:p>
+          <a:p>
+            <a:pPr algn="ctr">
+              <a:lnSpc>
+                <a:spcPct val="120000"/>
+              </a:lnSpc>
+              <a:spcAft>
+                <a:spcPts val="0"/>
+              </a:spcAft>
+            </a:pPr>
+            <a:r>
+              <a:rPr sz="1150" b="0" i="0">
+                <a:solidFill>
+                  <a:srgbClr val="E8E6DF"/>
+                </a:solidFill>
+                <a:latin typeface="Calibri"/>
+              </a:rPr>
+              <a:t>глубина/диаметр</a:t>
+            </a:r>
+          </a:p>
+        </p:txBody>
+      </p:sp>
+      <p:sp>
+        <p:nvSpPr>
+          <p:cNvPr id="23" name="Rounded Rectangle 22"/>
+          <p:cNvSpPr/>
+          <p:nvPr/>
+        </p:nvSpPr>
+        <p:spPr>
+          <a:xfrm>
+            <a:off x="457200" y="5394960"/>
+            <a:ext cx="11277295" cy="1051560"/>
+          </a:xfrm>
+          <a:prstGeom prst="roundRect">
+            <a:avLst>
+              <a:gd name="adj" fmla="val 4000"/>
+            </a:avLst>
+          </a:prstGeom>
+          <a:solidFill>
+            <a:srgbClr val="1C2E4A"/>
+          </a:solidFill>
+          <a:ln>
+            <a:noFill/>
+          </a:ln>
+          <a:effectLst/>
+        </p:spPr>
+        <p:style>
+          <a:lnRef idx="1">
+            <a:schemeClr val="accent1"/>
+          </a:lnRef>
+          <a:fillRef idx="3">
+            <a:schemeClr val="accent1"/>
+          </a:fillRef>
+          <a:effectRef idx="2">
+            <a:schemeClr val="accent1"/>
+          </a:effectRef>
+          <a:fontRef idx="minor">
+            <a:schemeClr val="lt1"/>
+          </a:fontRef>
+        </p:style>
+        <p:txBody>
+          <a:bodyPr rtlCol="0" anchor="ctr"/>
+          <a:lstStyle/>
+          <a:p>
+            <a:pPr algn="ctr"/>
+          </a:p>
+        </p:txBody>
+      </p:sp>
+      <p:sp>
+        <p:nvSpPr>
+          <p:cNvPr id="24" name="TextBox 23"/>
+          <p:cNvSpPr txBox="1"/>
+          <p:nvPr/>
+        </p:nvSpPr>
+        <p:spPr>
+          <a:xfrm>
+            <a:off x="777240" y="5559552"/>
+            <a:ext cx="10637215" cy="777240"/>
+          </a:xfrm>
+          <a:prstGeom prst="rect">
+            <a:avLst/>
+          </a:prstGeom>
+          <a:noFill/>
+        </p:spPr>
+        <p:txBody>
+          <a:bodyPr wrap="square" anchor="ctr" lIns="0" rIns="0" tIns="0" bIns="0"/>
+          <a:lstStyle/>
+          <a:p>
+            <a:pPr algn="l">
+              <a:lnSpc>
+                <a:spcPct val="120000"/>
+              </a:lnSpc>
+              <a:spcAft>
+                <a:spcPts val="0"/>
+              </a:spcAft>
+            </a:pPr>
+            <a:r>
+              <a:rPr sz="1250" b="0" i="1">
+                <a:solidFill>
+                  <a:srgbClr val="E8E6DF"/>
+                </a:solidFill>
+                <a:latin typeface="Calibri"/>
+              </a:rPr>
+              <a:t>Источник рельефа выбирается автоматически по приоритету: лидар USGS 3DEP (1 м, США) → Copernicus GLO-30 (~30 м, глобально) → SRTM (запасной вариант).</a:t>
+            </a:r>
+          </a:p>
+        </p:txBody>
+      </p:sp>
+      <p:sp>
+        <p:nvSpPr>
+          <p:cNvPr id="25" name="TextBox 24"/>
           <p:cNvSpPr txBox="1"/>
           <p:nvPr/>
         </p:nvSpPr>
@@ -8536,7 +10375,7 @@
     <p:bg>
       <p:bgPr>
         <a:solidFill>
-          <a:srgbClr val="0B0D13"/>
+          <a:srgbClr val="10203C"/>
         </a:solidFill>
         <a:effectLst/>
       </p:bgPr>
@@ -8583,14 +10422,14 @@
                 </a:solidFill>
                 <a:latin typeface="Cambria"/>
               </a:rPr>
-              <a:t>Кейс 2 — Lonar</a:t>
+              <a:t>Кейс 1 — Барринджер (Meteor Crater)</a:t>
             </a:r>
           </a:p>
         </p:txBody>
       </p:sp>
       <p:pic>
         <p:nvPicPr>
-          <p:cNvPr id="3" name="Picture 2" descr="case_Lonar.png"/>
+          <p:cNvPr id="3" name="Picture 2" descr="case_Barringer.png"/>
           <p:cNvPicPr>
             <a:picLocks noChangeAspect="1"/>
           </p:cNvPicPr>
@@ -8605,7 +10444,7 @@
         <p:spPr>
           <a:xfrm>
             <a:off x="457200" y="1417320"/>
-            <a:ext cx="7178040" cy="4006798"/>
+            <a:ext cx="7178040" cy="3974643"/>
           </a:xfrm>
           <a:prstGeom prst="rect">
             <a:avLst/>
@@ -8614,7 +10453,7 @@
       </p:pic>
       <p:pic>
         <p:nvPicPr>
-          <p:cNvPr id="4" name="Picture 3" descr="S2_RGB_Lonar_______.png"/>
+          <p:cNvPr id="4" name="Picture 3" descr="S2_RGB_Barringer__Meteor_Crater______.png"/>
           <p:cNvPicPr>
             <a:picLocks noChangeAspect="1"/>
           </p:cNvPicPr>
@@ -8628,8 +10467,8 @@
         </p:blipFill>
         <p:spPr>
           <a:xfrm>
-            <a:off x="8686059" y="1417320"/>
-            <a:ext cx="2271936" cy="2148840"/>
+            <a:off x="8518522" y="1417320"/>
+            <a:ext cx="2607009" cy="2148840"/>
           </a:xfrm>
           <a:prstGeom prst="rect">
             <a:avLst/>
@@ -8653,7 +10492,7 @@
             </a:avLst>
           </a:prstGeom>
           <a:solidFill>
-            <a:srgbClr val="15181F"/>
+            <a:srgbClr val="1C2E4A"/>
           </a:solidFill>
           <a:ln>
             <a:noFill/>
@@ -8719,11 +10558,11 @@
             <a:r>
               <a:rPr sz="1600" b="1" i="0">
                 <a:solidFill>
-                  <a:srgbClr val="5B8A72"/>
-                </a:solidFill>
-                <a:latin typeface="Calibri"/>
-              </a:rPr>
-              <a:t>1785 м</a:t>
+                  <a:srgbClr val="C1440E"/>
+                </a:solidFill>
+                <a:latin typeface="Calibri"/>
+              </a:rPr>
+              <a:t>1200 м</a:t>
             </a:r>
             <a:r>
               <a:rPr sz="1100" b="0" i="1">
@@ -8732,7 +10571,7 @@
                 </a:solidFill>
                 <a:latin typeface="Calibri"/>
               </a:rPr>
-              <a:t>   публ. 1830 м</a:t>
+              <a:t>   публ. 1200 м</a:t>
             </a:r>
           </a:p>
         </p:txBody>
@@ -8774,11 +10613,11 @@
             <a:r>
               <a:rPr sz="1600" b="1" i="0">
                 <a:solidFill>
-                  <a:srgbClr val="5B8A72"/>
-                </a:solidFill>
-                <a:latin typeface="Calibri"/>
-              </a:rPr>
-              <a:t>100 м</a:t>
+                  <a:srgbClr val="C1440E"/>
+                </a:solidFill>
+                <a:latin typeface="Calibri"/>
+              </a:rPr>
+              <a:t>162 м</a:t>
             </a:r>
             <a:r>
               <a:rPr sz="1100" b="0" i="1">
@@ -8787,7 +10626,7 @@
                 </a:solidFill>
                 <a:latin typeface="Calibri"/>
               </a:rPr>
-              <a:t>   публ. ~137 м</a:t>
+              <a:t>   публ. 170 м</a:t>
             </a:r>
           </a:p>
         </p:txBody>
@@ -8829,11 +10668,11 @@
             <a:r>
               <a:rPr sz="1600" b="1" i="0">
                 <a:solidFill>
-                  <a:srgbClr val="5B8A72"/>
-                </a:solidFill>
-                <a:latin typeface="Calibri"/>
-              </a:rPr>
-              <a:t>0.056</a:t>
+                  <a:srgbClr val="C1440E"/>
+                </a:solidFill>
+                <a:latin typeface="Calibri"/>
+              </a:rPr>
+              <a:t>0.135</a:t>
             </a:r>
             <a:r>
               <a:rPr sz="1100" b="0" i="1">
@@ -8842,7 +10681,7 @@
                 </a:solidFill>
                 <a:latin typeface="Calibri"/>
               </a:rPr>
-              <a:t>   публ. 0.075</a:t>
+              <a:t>   публ. 0.142</a:t>
             </a:r>
           </a:p>
         </p:txBody>
@@ -8882,7 +10721,7 @@
                 </a:solidFill>
                 <a:latin typeface="Calibri"/>
               </a:rPr>
-              <a:t>Базальт (Деканские траппы). Два конфликтующих датирования: ~570 или ~37.5 тыс. лет. Глубина занижена — вероятно, DEM видит поверхность озера в кратере, а не истинное дно.</a:t>
+              <a:t>Осадочные породы, ~50 тыс. лет. Наилучшее совпадение с публикацией — валидация метода на эталонном объекте.</a:t>
             </a:r>
           </a:p>
         </p:txBody>
@@ -8941,7 +10780,7 @@
     <p:bg>
       <p:bgPr>
         <a:solidFill>
-          <a:srgbClr val="0B0D13"/>
+          <a:srgbClr val="10203C"/>
         </a:solidFill>
         <a:effectLst/>
       </p:bgPr>
@@ -8988,14 +10827,14 @@
                 </a:solidFill>
                 <a:latin typeface="Cambria"/>
               </a:rPr>
-              <a:t>Кейс 3 — Wolfe Creek</a:t>
+              <a:t>Кейс 2 — Lonar</a:t>
             </a:r>
           </a:p>
         </p:txBody>
       </p:sp>
       <p:pic>
         <p:nvPicPr>
-          <p:cNvPr id="3" name="Picture 2" descr="case_WolfeCreek.png"/>
+          <p:cNvPr id="3" name="Picture 2" descr="case_Lonar.png"/>
           <p:cNvPicPr>
             <a:picLocks noChangeAspect="1"/>
           </p:cNvPicPr>
@@ -9019,7 +10858,7 @@
       </p:pic>
       <p:pic>
         <p:nvPicPr>
-          <p:cNvPr id="4" name="Picture 3" descr="S2_RGB_Wolfe_Creek___________.png"/>
+          <p:cNvPr id="4" name="Picture 3" descr="S2_RGB_Lonar_______.png"/>
           <p:cNvPicPr>
             <a:picLocks noChangeAspect="1"/>
           </p:cNvPicPr>
@@ -9033,8 +10872,8 @@
         </p:blipFill>
         <p:spPr>
           <a:xfrm>
-            <a:off x="8691341" y="1417320"/>
-            <a:ext cx="2261372" cy="2148840"/>
+            <a:off x="8686059" y="1417320"/>
+            <a:ext cx="2271936" cy="2148840"/>
           </a:xfrm>
           <a:prstGeom prst="rect">
             <a:avLst/>
@@ -9050,7 +10889,7 @@
         <p:spPr>
           <a:xfrm>
             <a:off x="7909560" y="3703320"/>
-            <a:ext cx="3824935" cy="2185416"/>
+            <a:ext cx="3824935" cy="2569464"/>
           </a:xfrm>
           <a:prstGeom prst="roundRect">
             <a:avLst>
@@ -9058,7 +10897,7 @@
             </a:avLst>
           </a:prstGeom>
           <a:solidFill>
-            <a:srgbClr val="15181F"/>
+            <a:srgbClr val="1C2E4A"/>
           </a:solidFill>
           <a:ln>
             <a:noFill/>
@@ -9124,11 +10963,11 @@
             <a:r>
               <a:rPr sz="1600" b="1" i="0">
                 <a:solidFill>
-                  <a:srgbClr val="E0A458"/>
-                </a:solidFill>
-                <a:latin typeface="Calibri"/>
-              </a:rPr>
-              <a:t>900 м</a:t>
+                  <a:srgbClr val="5B8A72"/>
+                </a:solidFill>
+                <a:latin typeface="Calibri"/>
+              </a:rPr>
+              <a:t>1890 м</a:t>
             </a:r>
             <a:r>
               <a:rPr sz="1100" b="0" i="1">
@@ -9137,7 +10976,7 @@
                 </a:solidFill>
                 <a:latin typeface="Calibri"/>
               </a:rPr>
-              <a:t>   публ. 892 м</a:t>
+              <a:t>   публ. 1830 м</a:t>
             </a:r>
           </a:p>
         </p:txBody>
@@ -9179,11 +11018,11 @@
             <a:r>
               <a:rPr sz="1600" b="1" i="0">
                 <a:solidFill>
-                  <a:srgbClr val="E0A458"/>
-                </a:solidFill>
-                <a:latin typeface="Calibri"/>
-              </a:rPr>
-              <a:t>45 м</a:t>
+                  <a:srgbClr val="5B8A72"/>
+                </a:solidFill>
+                <a:latin typeface="Calibri"/>
+              </a:rPr>
+              <a:t>111 м</a:t>
             </a:r>
             <a:r>
               <a:rPr sz="1100" b="0" i="1">
@@ -9192,7 +11031,7 @@
                 </a:solidFill>
                 <a:latin typeface="Calibri"/>
               </a:rPr>
-              <a:t>   публ. 178 м*</a:t>
+              <a:t>   публ. ~137 м</a:t>
             </a:r>
           </a:p>
         </p:txBody>
@@ -9205,7 +11044,62 @@
         </p:nvSpPr>
         <p:spPr>
           <a:xfrm>
-            <a:off x="8183880" y="4791456"/>
+            <a:off x="8183880" y="4700016"/>
+            <a:ext cx="3276295" cy="329184"/>
+          </a:xfrm>
+          <a:prstGeom prst="rect">
+            <a:avLst/>
+          </a:prstGeom>
+          <a:noFill/>
+        </p:spPr>
+        <p:txBody>
+          <a:bodyPr wrap="square" anchor="t" lIns="0" rIns="0" tIns="0" bIns="0"/>
+          <a:lstStyle/>
+          <a:p>
+            <a:pPr algn="l">
+              <a:lnSpc>
+                <a:spcPct val="100000"/>
+              </a:lnSpc>
+            </a:pPr>
+            <a:r>
+              <a:rPr sz="1200" b="0" i="0">
+                <a:solidFill>
+                  <a:srgbClr val="9B978D"/>
+                </a:solidFill>
+                <a:latin typeface="Calibri"/>
+              </a:rPr>
+              <a:t>d/D:  </a:t>
+            </a:r>
+            <a:r>
+              <a:rPr sz="1600" b="1" i="0">
+                <a:solidFill>
+                  <a:srgbClr val="5B8A72"/>
+                </a:solidFill>
+                <a:latin typeface="Calibri"/>
+              </a:rPr>
+              <a:t>0.059</a:t>
+            </a:r>
+            <a:r>
+              <a:rPr sz="1100" b="0" i="1">
+                <a:solidFill>
+                  <a:srgbClr val="9B978D"/>
+                </a:solidFill>
+                <a:latin typeface="Calibri"/>
+              </a:rPr>
+              <a:t>   публ. 0.075</a:t>
+            </a:r>
+          </a:p>
+        </p:txBody>
+      </p:sp>
+      <p:sp>
+        <p:nvSpPr>
+          <p:cNvPr id="9" name="TextBox 8"/>
+          <p:cNvSpPr txBox="1"/>
+          <p:nvPr/>
+        </p:nvSpPr>
+        <p:spPr>
+          <a:xfrm>
+            <a:off x="8183880" y="5175504"/>
             <a:ext cx="3276295" cy="914400"/>
           </a:xfrm>
           <a:prstGeom prst="rect">
@@ -9232,14 +11126,14 @@
                 </a:solidFill>
                 <a:latin typeface="Calibri"/>
               </a:rPr>
-              <a:t>Песчаник, ~120 тыс. лет. *Исходная глубина по публикации — кратер занесён ~120 м песка; наш профиль отражает современную, а не исходную форму.</a:t>
-            </a:r>
-          </a:p>
-        </p:txBody>
-      </p:sp>
-      <p:sp>
-        <p:nvSpPr>
-          <p:cNvPr id="9" name="TextBox 8"/>
+              <a:t>Базальт (Деканские траппы). Два конфликтующих датирования: ~570 или ~37.5 тыс. лет. Глубина занижена — вероятно, DEM видит поверхность озера в кратере, а не истинное дно.</a:t>
+            </a:r>
+          </a:p>
+        </p:txBody>
+      </p:sp>
+      <p:sp>
+        <p:nvSpPr>
+          <p:cNvPr id="10" name="TextBox 9"/>
           <p:cNvSpPr txBox="1"/>
           <p:nvPr/>
         </p:nvSpPr>
@@ -9291,7 +11185,7 @@
     <p:bg>
       <p:bgPr>
         <a:solidFill>
-          <a:srgbClr val="0B0D13"/>
+          <a:srgbClr val="10203C"/>
         </a:solidFill>
         <a:effectLst/>
       </p:bgPr>
@@ -9338,54 +11232,14 @@
                 </a:solidFill>
                 <a:latin typeface="Cambria"/>
               </a:rPr>
-              <a:t>Радар видит вал независимо от освещения и облачности</a:t>
-            </a:r>
-          </a:p>
-        </p:txBody>
-      </p:sp>
-      <p:sp>
-        <p:nvSpPr>
-          <p:cNvPr id="3" name="TextBox 2"/>
-          <p:cNvSpPr txBox="1"/>
-          <p:nvPr/>
-        </p:nvSpPr>
-        <p:spPr>
-          <a:xfrm>
-            <a:off x="457200" y="932688"/>
-            <a:ext cx="11277295" cy="320040"/>
-          </a:xfrm>
-          <a:prstGeom prst="rect">
-            <a:avLst/>
-          </a:prstGeom>
-          <a:noFill/>
-        </p:spPr>
-        <p:txBody>
-          <a:bodyPr wrap="square" anchor="t" lIns="0" rIns="0" tIns="0" bIns="0"/>
-          <a:lstStyle/>
-          <a:p>
-            <a:pPr algn="l">
-              <a:lnSpc>
-                <a:spcPct val="100000"/>
-              </a:lnSpc>
-              <a:spcAft>
-                <a:spcPts val="0"/>
-              </a:spcAft>
-            </a:pPr>
-            <a:r>
-              <a:rPr sz="1300" b="0" i="1">
-                <a:solidFill>
-                  <a:srgbClr val="9B978D"/>
-                </a:solidFill>
-                <a:latin typeface="Calibri"/>
-              </a:rPr>
-              <a:t>Sentinel-1, среднее VV на валу против дна кратера</a:t>
+              <a:t>Кейс 3 — Wolfe Creek</a:t>
             </a:r>
           </a:p>
         </p:txBody>
       </p:sp>
       <p:pic>
         <p:nvPicPr>
-          <p:cNvPr id="4" name="Picture 3" descr="S1_VVVH_Barringer__Meteor_Crater______.png"/>
+          <p:cNvPr id="3" name="Picture 2" descr="case_WolfeCreek.png"/>
           <p:cNvPicPr>
             <a:picLocks noChangeAspect="1"/>
           </p:cNvPicPr>
@@ -9399,137 +11253,17 @@
         </p:blipFill>
         <p:spPr>
           <a:xfrm>
-            <a:off x="500613" y="1691640"/>
-            <a:ext cx="3489391" cy="2880360"/>
+            <a:off x="457200" y="1417320"/>
+            <a:ext cx="7178040" cy="4006798"/>
           </a:xfrm>
           <a:prstGeom prst="rect">
             <a:avLst/>
           </a:prstGeom>
         </p:spPr>
       </p:pic>
-      <p:sp>
-        <p:nvSpPr>
-          <p:cNvPr id="5" name="TextBox 4"/>
-          <p:cNvSpPr txBox="1"/>
-          <p:nvPr/>
-        </p:nvSpPr>
-        <p:spPr>
-          <a:xfrm>
-            <a:off x="457200" y="4681728"/>
-            <a:ext cx="3576218" cy="365760"/>
-          </a:xfrm>
-          <a:prstGeom prst="rect">
-            <a:avLst/>
-          </a:prstGeom>
-          <a:noFill/>
-        </p:spPr>
-        <p:txBody>
-          <a:bodyPr wrap="square" anchor="t" lIns="0" rIns="0" tIns="0" bIns="0"/>
-          <a:lstStyle/>
-          <a:p>
-            <a:pPr algn="ctr">
-              <a:lnSpc>
-                <a:spcPct val="100000"/>
-              </a:lnSpc>
-              <a:spcAft>
-                <a:spcPts val="0"/>
-              </a:spcAft>
-            </a:pPr>
-            <a:r>
-              <a:rPr sz="1500" b="1" i="0">
-                <a:solidFill>
-                  <a:srgbClr val="E8E6DF"/>
-                </a:solidFill>
-                <a:latin typeface="Cambria"/>
-              </a:rPr>
-              <a:t>Барринджер</a:t>
-            </a:r>
-          </a:p>
-        </p:txBody>
-      </p:sp>
-      <p:sp>
-        <p:nvSpPr>
-          <p:cNvPr id="6" name="TextBox 5"/>
-          <p:cNvSpPr txBox="1"/>
-          <p:nvPr/>
-        </p:nvSpPr>
-        <p:spPr>
-          <a:xfrm>
-            <a:off x="457200" y="5074920"/>
-            <a:ext cx="3576218" cy="640080"/>
-          </a:xfrm>
-          <a:prstGeom prst="rect">
-            <a:avLst/>
-          </a:prstGeom>
-          <a:noFill/>
-        </p:spPr>
-        <p:txBody>
-          <a:bodyPr wrap="square" anchor="t" lIns="0" rIns="0" tIns="0" bIns="0"/>
-          <a:lstStyle/>
-          <a:p>
-            <a:pPr algn="ctr">
-              <a:lnSpc>
-                <a:spcPct val="100000"/>
-              </a:lnSpc>
-              <a:spcAft>
-                <a:spcPts val="0"/>
-              </a:spcAft>
-            </a:pPr>
-            <a:r>
-              <a:rPr sz="3000" b="1" i="0">
-                <a:solidFill>
-                  <a:srgbClr val="C1440E"/>
-                </a:solidFill>
-                <a:latin typeface="Cambria"/>
-              </a:rPr>
-              <a:t>+6.9 дБ</a:t>
-            </a:r>
-          </a:p>
-        </p:txBody>
-      </p:sp>
-      <p:sp>
-        <p:nvSpPr>
-          <p:cNvPr id="7" name="TextBox 6"/>
-          <p:cNvSpPr txBox="1"/>
-          <p:nvPr/>
-        </p:nvSpPr>
-        <p:spPr>
-          <a:xfrm>
-            <a:off x="457200" y="5687568"/>
-            <a:ext cx="3576218" cy="274320"/>
-          </a:xfrm>
-          <a:prstGeom prst="rect">
-            <a:avLst/>
-          </a:prstGeom>
-          <a:noFill/>
-        </p:spPr>
-        <p:txBody>
-          <a:bodyPr wrap="square" anchor="t" lIns="0" rIns="0" tIns="0" bIns="0"/>
-          <a:lstStyle/>
-          <a:p>
-            <a:pPr algn="ctr">
-              <a:lnSpc>
-                <a:spcPct val="100000"/>
-              </a:lnSpc>
-              <a:spcAft>
-                <a:spcPts val="0"/>
-              </a:spcAft>
-            </a:pPr>
-            <a:r>
-              <a:rPr sz="1050" b="0" i="1">
-                <a:solidFill>
-                  <a:srgbClr val="9B978D"/>
-                </a:solidFill>
-                <a:latin typeface="Calibri"/>
-              </a:rPr>
-              <a:t>вал ярче дна (VV)</a:t>
-            </a:r>
-          </a:p>
-        </p:txBody>
-      </p:sp>
       <p:pic>
         <p:nvPicPr>
-          <p:cNvPr id="8" name="Picture 7" descr="S1_VVVH_Lonar_______.png"/>
+          <p:cNvPr id="4" name="Picture 3" descr="S2_RGB_Wolfe_Creek___________.png"/>
           <p:cNvPicPr>
             <a:picLocks noChangeAspect="1"/>
           </p:cNvPicPr>
@@ -9543,8 +11277,8 @@
         </p:blipFill>
         <p:spPr>
           <a:xfrm>
-            <a:off x="4573063" y="1691640"/>
-            <a:ext cx="3045567" cy="2880360"/>
+            <a:off x="8691341" y="1417320"/>
+            <a:ext cx="2261372" cy="2148840"/>
           </a:xfrm>
           <a:prstGeom prst="rect">
             <a:avLst/>
@@ -9553,14 +11287,60 @@
       </p:pic>
       <p:sp>
         <p:nvSpPr>
-          <p:cNvPr id="9" name="TextBox 8"/>
+          <p:cNvPr id="5" name="Rounded Rectangle 4"/>
+          <p:cNvSpPr/>
+          <p:nvPr/>
+        </p:nvSpPr>
+        <p:spPr>
+          <a:xfrm>
+            <a:off x="7909560" y="3703320"/>
+            <a:ext cx="3824935" cy="2185416"/>
+          </a:xfrm>
+          <a:prstGeom prst="roundRect">
+            <a:avLst>
+              <a:gd name="adj" fmla="val 4000"/>
+            </a:avLst>
+          </a:prstGeom>
+          <a:solidFill>
+            <a:srgbClr val="1C2E4A"/>
+          </a:solidFill>
+          <a:ln>
+            <a:noFill/>
+          </a:ln>
+          <a:effectLst/>
+        </p:spPr>
+        <p:style>
+          <a:lnRef idx="1">
+            <a:schemeClr val="accent1"/>
+          </a:lnRef>
+          <a:fillRef idx="3">
+            <a:schemeClr val="accent1"/>
+          </a:fillRef>
+          <a:effectRef idx="2">
+            <a:schemeClr val="accent1"/>
+          </a:effectRef>
+          <a:fontRef idx="minor">
+            <a:schemeClr val="lt1"/>
+          </a:fontRef>
+        </p:style>
+        <p:txBody>
+          <a:bodyPr rtlCol="0" anchor="ctr"/>
+          <a:lstStyle/>
+          <a:p>
+            <a:pPr algn="ctr"/>
+          </a:p>
+        </p:txBody>
+      </p:sp>
+      <p:sp>
+        <p:nvSpPr>
+          <p:cNvPr id="6" name="TextBox 5"/>
           <p:cNvSpPr txBox="1"/>
           <p:nvPr/>
         </p:nvSpPr>
         <p:spPr>
           <a:xfrm>
-            <a:off x="4307738" y="4681728"/>
-            <a:ext cx="3576218" cy="365760"/>
+            <a:off x="8183880" y="3931920"/>
+            <a:ext cx="3276295" cy="329184"/>
           </a:xfrm>
           <a:prstGeom prst="rect">
             <a:avLst/>
@@ -9571,253 +11351,139 @@
           <a:bodyPr wrap="square" anchor="t" lIns="0" rIns="0" tIns="0" bIns="0"/>
           <a:lstStyle/>
           <a:p>
-            <a:pPr algn="ctr">
+            <a:pPr algn="l">
               <a:lnSpc>
                 <a:spcPct val="100000"/>
+              </a:lnSpc>
+            </a:pPr>
+            <a:r>
+              <a:rPr sz="1200" b="0" i="0">
+                <a:solidFill>
+                  <a:srgbClr val="9B978D"/>
+                </a:solidFill>
+                <a:latin typeface="Calibri"/>
+              </a:rPr>
+              <a:t>Диаметр:  </a:t>
+            </a:r>
+            <a:r>
+              <a:rPr sz="1600" b="1" i="0">
+                <a:solidFill>
+                  <a:srgbClr val="E0A458"/>
+                </a:solidFill>
+                <a:latin typeface="Calibri"/>
+              </a:rPr>
+              <a:t>930 м</a:t>
+            </a:r>
+            <a:r>
+              <a:rPr sz="1100" b="0" i="1">
+                <a:solidFill>
+                  <a:srgbClr val="9B978D"/>
+                </a:solidFill>
+                <a:latin typeface="Calibri"/>
+              </a:rPr>
+              <a:t>   публ. 892 м</a:t>
+            </a:r>
+          </a:p>
+        </p:txBody>
+      </p:sp>
+      <p:sp>
+        <p:nvSpPr>
+          <p:cNvPr id="7" name="TextBox 6"/>
+          <p:cNvSpPr txBox="1"/>
+          <p:nvPr/>
+        </p:nvSpPr>
+        <p:spPr>
+          <a:xfrm>
+            <a:off x="8183880" y="4315968"/>
+            <a:ext cx="3276295" cy="329184"/>
+          </a:xfrm>
+          <a:prstGeom prst="rect">
+            <a:avLst/>
+          </a:prstGeom>
+          <a:noFill/>
+        </p:spPr>
+        <p:txBody>
+          <a:bodyPr wrap="square" anchor="t" lIns="0" rIns="0" tIns="0" bIns="0"/>
+          <a:lstStyle/>
+          <a:p>
+            <a:pPr algn="l">
+              <a:lnSpc>
+                <a:spcPct val="100000"/>
+              </a:lnSpc>
+            </a:pPr>
+            <a:r>
+              <a:rPr sz="1200" b="0" i="0">
+                <a:solidFill>
+                  <a:srgbClr val="9B978D"/>
+                </a:solidFill>
+                <a:latin typeface="Calibri"/>
+              </a:rPr>
+              <a:t>Глубина:  </a:t>
+            </a:r>
+            <a:r>
+              <a:rPr sz="1600" b="1" i="0">
+                <a:solidFill>
+                  <a:srgbClr val="E0A458"/>
+                </a:solidFill>
+                <a:latin typeface="Calibri"/>
+              </a:rPr>
+              <a:t>46 м</a:t>
+            </a:r>
+            <a:r>
+              <a:rPr sz="1100" b="0" i="1">
+                <a:solidFill>
+                  <a:srgbClr val="9B978D"/>
+                </a:solidFill>
+                <a:latin typeface="Calibri"/>
+              </a:rPr>
+              <a:t>   публ. 178 м*</a:t>
+            </a:r>
+          </a:p>
+        </p:txBody>
+      </p:sp>
+      <p:sp>
+        <p:nvSpPr>
+          <p:cNvPr id="8" name="TextBox 7"/>
+          <p:cNvSpPr txBox="1"/>
+          <p:nvPr/>
+        </p:nvSpPr>
+        <p:spPr>
+          <a:xfrm>
+            <a:off x="8183880" y="4791456"/>
+            <a:ext cx="3276295" cy="914400"/>
+          </a:xfrm>
+          <a:prstGeom prst="rect">
+            <a:avLst/>
+          </a:prstGeom>
+          <a:noFill/>
+        </p:spPr>
+        <p:txBody>
+          <a:bodyPr wrap="square" anchor="t" lIns="0" rIns="0" tIns="0" bIns="0"/>
+          <a:lstStyle/>
+          <a:p>
+            <a:pPr algn="l">
+              <a:lnSpc>
+                <a:spcPct val="122000"/>
               </a:lnSpc>
               <a:spcAft>
                 <a:spcPts val="0"/>
               </a:spcAft>
             </a:pPr>
             <a:r>
-              <a:rPr sz="1500" b="1" i="0">
+              <a:rPr sz="1100" b="0" i="1">
                 <a:solidFill>
                   <a:srgbClr val="E8E6DF"/>
                 </a:solidFill>
-                <a:latin typeface="Cambria"/>
-              </a:rPr>
-              <a:t>Lonar</a:t>
-            </a:r>
-          </a:p>
-        </p:txBody>
-      </p:sp>
-      <p:sp>
-        <p:nvSpPr>
-          <p:cNvPr id="10" name="TextBox 9"/>
-          <p:cNvSpPr txBox="1"/>
-          <p:nvPr/>
-        </p:nvSpPr>
-        <p:spPr>
-          <a:xfrm>
-            <a:off x="4307738" y="5074920"/>
-            <a:ext cx="3576218" cy="640080"/>
-          </a:xfrm>
-          <a:prstGeom prst="rect">
-            <a:avLst/>
-          </a:prstGeom>
-          <a:noFill/>
-        </p:spPr>
-        <p:txBody>
-          <a:bodyPr wrap="square" anchor="t" lIns="0" rIns="0" tIns="0" bIns="0"/>
-          <a:lstStyle/>
-          <a:p>
-            <a:pPr algn="ctr">
-              <a:lnSpc>
-                <a:spcPct val="100000"/>
-              </a:lnSpc>
-              <a:spcAft>
-                <a:spcPts val="0"/>
-              </a:spcAft>
-            </a:pPr>
-            <a:r>
-              <a:rPr sz="3000" b="1" i="0">
-                <a:solidFill>
-                  <a:srgbClr val="5B8A72"/>
-                </a:solidFill>
-                <a:latin typeface="Cambria"/>
-              </a:rPr>
-              <a:t>+12.3 дБ</a:t>
-            </a:r>
-          </a:p>
-        </p:txBody>
-      </p:sp>
-      <p:sp>
-        <p:nvSpPr>
-          <p:cNvPr id="11" name="TextBox 10"/>
-          <p:cNvSpPr txBox="1"/>
-          <p:nvPr/>
-        </p:nvSpPr>
-        <p:spPr>
-          <a:xfrm>
-            <a:off x="4307738" y="5687568"/>
-            <a:ext cx="3576218" cy="274320"/>
-          </a:xfrm>
-          <a:prstGeom prst="rect">
-            <a:avLst/>
-          </a:prstGeom>
-          <a:noFill/>
-        </p:spPr>
-        <p:txBody>
-          <a:bodyPr wrap="square" anchor="t" lIns="0" rIns="0" tIns="0" bIns="0"/>
-          <a:lstStyle/>
-          <a:p>
-            <a:pPr algn="ctr">
-              <a:lnSpc>
-                <a:spcPct val="100000"/>
-              </a:lnSpc>
-              <a:spcAft>
-                <a:spcPts val="0"/>
-              </a:spcAft>
-            </a:pPr>
-            <a:r>
-              <a:rPr sz="1050" b="0" i="1">
-                <a:solidFill>
-                  <a:srgbClr val="9B978D"/>
-                </a:solidFill>
-                <a:latin typeface="Calibri"/>
-              </a:rPr>
-              <a:t>вал ярче дна (VV)</a:t>
-            </a:r>
-          </a:p>
-        </p:txBody>
-      </p:sp>
-      <p:pic>
-        <p:nvPicPr>
-          <p:cNvPr id="12" name="Picture 11" descr="S1_VVVH_Wolfe_Creek___________.png"/>
-          <p:cNvPicPr>
-            <a:picLocks noChangeAspect="1"/>
-          </p:cNvPicPr>
-          <p:nvPr/>
-        </p:nvPicPr>
-        <p:blipFill>
-          <a:blip r:embed="rId4"/>
-          <a:stretch>
-            <a:fillRect/>
-          </a:stretch>
-        </p:blipFill>
-        <p:spPr>
-          <a:xfrm>
-            <a:off x="8434554" y="1691640"/>
-            <a:ext cx="3023661" cy="2880360"/>
-          </a:xfrm>
-          <a:prstGeom prst="rect">
-            <a:avLst/>
-          </a:prstGeom>
-        </p:spPr>
-      </p:pic>
-      <p:sp>
-        <p:nvSpPr>
-          <p:cNvPr id="13" name="TextBox 12"/>
-          <p:cNvSpPr txBox="1"/>
-          <p:nvPr/>
-        </p:nvSpPr>
-        <p:spPr>
-          <a:xfrm>
-            <a:off x="8158276" y="4681728"/>
-            <a:ext cx="3576218" cy="365760"/>
-          </a:xfrm>
-          <a:prstGeom prst="rect">
-            <a:avLst/>
-          </a:prstGeom>
-          <a:noFill/>
-        </p:spPr>
-        <p:txBody>
-          <a:bodyPr wrap="square" anchor="t" lIns="0" rIns="0" tIns="0" bIns="0"/>
-          <a:lstStyle/>
-          <a:p>
-            <a:pPr algn="ctr">
-              <a:lnSpc>
-                <a:spcPct val="100000"/>
-              </a:lnSpc>
-              <a:spcAft>
-                <a:spcPts val="0"/>
-              </a:spcAft>
-            </a:pPr>
-            <a:r>
-              <a:rPr sz="1500" b="1" i="0">
-                <a:solidFill>
-                  <a:srgbClr val="E8E6DF"/>
-                </a:solidFill>
-                <a:latin typeface="Cambria"/>
-              </a:rPr>
-              <a:t>Wolfe Creek</a:t>
-            </a:r>
-          </a:p>
-        </p:txBody>
-      </p:sp>
-      <p:sp>
-        <p:nvSpPr>
-          <p:cNvPr id="14" name="TextBox 13"/>
-          <p:cNvSpPr txBox="1"/>
-          <p:nvPr/>
-        </p:nvSpPr>
-        <p:spPr>
-          <a:xfrm>
-            <a:off x="8158276" y="5074920"/>
-            <a:ext cx="3576218" cy="640080"/>
-          </a:xfrm>
-          <a:prstGeom prst="rect">
-            <a:avLst/>
-          </a:prstGeom>
-          <a:noFill/>
-        </p:spPr>
-        <p:txBody>
-          <a:bodyPr wrap="square" anchor="t" lIns="0" rIns="0" tIns="0" bIns="0"/>
-          <a:lstStyle/>
-          <a:p>
-            <a:pPr algn="ctr">
-              <a:lnSpc>
-                <a:spcPct val="100000"/>
-              </a:lnSpc>
-              <a:spcAft>
-                <a:spcPts val="0"/>
-              </a:spcAft>
-            </a:pPr>
-            <a:r>
-              <a:rPr sz="3000" b="1" i="0">
-                <a:solidFill>
-                  <a:srgbClr val="E0A458"/>
-                </a:solidFill>
-                <a:latin typeface="Cambria"/>
-              </a:rPr>
-              <a:t>+9.3 дБ</a:t>
-            </a:r>
-          </a:p>
-        </p:txBody>
-      </p:sp>
-      <p:sp>
-        <p:nvSpPr>
-          <p:cNvPr id="15" name="TextBox 14"/>
-          <p:cNvSpPr txBox="1"/>
-          <p:nvPr/>
-        </p:nvSpPr>
-        <p:spPr>
-          <a:xfrm>
-            <a:off x="8158276" y="5687568"/>
-            <a:ext cx="3576218" cy="274320"/>
-          </a:xfrm>
-          <a:prstGeom prst="rect">
-            <a:avLst/>
-          </a:prstGeom>
-          <a:noFill/>
-        </p:spPr>
-        <p:txBody>
-          <a:bodyPr wrap="square" anchor="t" lIns="0" rIns="0" tIns="0" bIns="0"/>
-          <a:lstStyle/>
-          <a:p>
-            <a:pPr algn="ctr">
-              <a:lnSpc>
-                <a:spcPct val="100000"/>
-              </a:lnSpc>
-              <a:spcAft>
-                <a:spcPts val="0"/>
-              </a:spcAft>
-            </a:pPr>
-            <a:r>
-              <a:rPr sz="1050" b="0" i="1">
-                <a:solidFill>
-                  <a:srgbClr val="9B978D"/>
-                </a:solidFill>
-                <a:latin typeface="Calibri"/>
-              </a:rPr>
-              <a:t>вал ярче дна (VV)</a:t>
-            </a:r>
-          </a:p>
-        </p:txBody>
-      </p:sp>
-      <p:sp>
-        <p:nvSpPr>
-          <p:cNvPr id="16" name="TextBox 15"/>
+                <a:latin typeface="Calibri"/>
+              </a:rPr>
+              <a:t>Песчаник, ~120 тыс. лет. *Исходная глубина по публикации — кратер занесён ~120 м песка; наш профиль отражает современную, а не исходную форму.</a:t>
+            </a:r>
+          </a:p>
+        </p:txBody>
+      </p:sp>
+      <p:sp>
+        <p:nvSpPr>
+          <p:cNvPr id="9" name="TextBox 8"/>
           <p:cNvSpPr txBox="1"/>
           <p:nvPr/>
         </p:nvSpPr>

--- a/crater_presentation.pptx
+++ b/crater_presentation.pptx
@@ -3916,6 +3916,46 @@
         </p:nvSpPr>
         <p:spPr>
           <a:xfrm>
+            <a:off x="457200" y="6053328"/>
+            <a:ext cx="11277295" cy="457200"/>
+          </a:xfrm>
+          <a:prstGeom prst="rect">
+            <a:avLst/>
+          </a:prstGeom>
+          <a:noFill/>
+        </p:spPr>
+        <p:txBody>
+          <a:bodyPr wrap="square" anchor="t" lIns="0" rIns="0" tIns="0" bIns="0"/>
+          <a:lstStyle/>
+          <a:p>
+            <a:pPr algn="ctr">
+              <a:lnSpc>
+                <a:spcPct val="120000"/>
+              </a:lnSpc>
+              <a:spcAft>
+                <a:spcPts val="0"/>
+              </a:spcAft>
+            </a:pPr>
+            <a:r>
+              <a:rPr sz="1050" b="0" i="1">
+                <a:solidFill>
+                  <a:srgbClr val="9B978D"/>
+                </a:solidFill>
+                <a:latin typeface="Calibri"/>
+              </a:rPr>
+              <a:t>Различия обратного рассеяния интерпретируются с учётом шероховатости, влажности, геометрии наблюдения и морфологии рельефа — это эмпирическое наблюдение по трём объектам, а не общий закон.</a:t>
+            </a:r>
+          </a:p>
+        </p:txBody>
+      </p:sp>
+      <p:sp>
+        <p:nvSpPr>
+          <p:cNvPr id="17" name="TextBox 16"/>
+          <p:cNvSpPr txBox="1"/>
+          <p:nvPr/>
+        </p:nvSpPr>
+        <p:spPr>
+          <a:xfrm>
             <a:off x="11368735" y="6492240"/>
             <a:ext cx="457200" cy="274320"/>
           </a:xfrm>
@@ -10078,7 +10118,7 @@
                 </a:solidFill>
                 <a:latin typeface="Calibri"/>
               </a:rPr>
-              <a:t>индекс округлости</a:t>
+              <a:t>неоднородность радиуса вала (CV)</a:t>
             </a:r>
           </a:p>
         </p:txBody>
